--- a/docs/presentations/OmniBrain_Agentic_RAG_Project_Presentation.pptx
+++ b/docs/presentations/OmniBrain_Agentic_RAG_Project_Presentation.pptx
@@ -5,7 +5,7 @@
     <p:sldMasterId id="2147483648" r:id="rId1"/>
   </p:sldMasterIdLst>
   <p:notesMasterIdLst>
-    <p:notesMasterId r:id="rId12"/>
+    <p:notesMasterId r:id="rId14"/>
   </p:notesMasterIdLst>
   <p:sldIdLst>
     <p:sldId id="256" r:id="rId2"/>
@@ -13,11 +13,13 @@
     <p:sldId id="258" r:id="rId4"/>
     <p:sldId id="259" r:id="rId5"/>
     <p:sldId id="260" r:id="rId6"/>
-    <p:sldId id="261" r:id="rId7"/>
-    <p:sldId id="262" r:id="rId8"/>
-    <p:sldId id="263" r:id="rId9"/>
-    <p:sldId id="264" r:id="rId10"/>
-    <p:sldId id="265" r:id="rId11"/>
+    <p:sldId id="266" r:id="rId7"/>
+    <p:sldId id="267" r:id="rId8"/>
+    <p:sldId id="261" r:id="rId9"/>
+    <p:sldId id="262" r:id="rId10"/>
+    <p:sldId id="263" r:id="rId11"/>
+    <p:sldId id="264" r:id="rId12"/>
+    <p:sldId id="265" r:id="rId13"/>
   </p:sldIdLst>
   <p:sldSz cx="12192000" cy="6858000"/>
   <p:notesSz cx="6858000" cy="9144000"/>
@@ -116,6 +118,11 @@
       </a:defRPr>
     </a:lvl9pPr>
   </p:defaultTextStyle>
+  <p:extLst>
+    <p:ext uri="{EFAFB233-063F-42B5-8137-9DF3F51BA10A}">
+      <p15:sldGuideLst xmlns:p15="http://schemas.microsoft.com/office/powerpoint/2012/main"/>
+    </p:ext>
+  </p:extLst>
 </p:presentation>
 </file>
 
@@ -2237,6 +2244,2342 @@
       </p:grpSpPr>
       <p:sp>
         <p:nvSpPr>
+          <p:cNvPr id="21" name="eyebrow">
+            <a:extLst>
+              <a:ext uri="{FF2B5EF4-FFF2-40B4-BE49-F238E27FC236}">
+                <a16:creationId xmlns:a16="http://schemas.microsoft.com/office/drawing/2014/main" id="{D9B48522-6083-4EAE-80E4-83879CA98302}"/>
+              </a:ext>
+            </a:extLst>
+          </p:cNvPr>
+          <p:cNvSpPr>
+            <a:spLocks noGrp="1"/>
+          </p:cNvSpPr>
+          <p:nvPr/>
+        </p:nvSpPr>
+        <p:spPr>
+          <a:xfrm>
+            <a:off x="685800" y="419100"/>
+            <a:ext cx="3619500" cy="190500"/>
+          </a:xfrm>
+          <a:prstGeom prst="rect">
+            <a:avLst/>
+          </a:prstGeom>
+          <a:noFill/>
+          <a:ln w="0">
+            <a:noFill/>
+            <a:prstDash val="solid"/>
+          </a:ln>
+        </p:spPr>
+        <p:txBody>
+          <a:bodyPr anchor="t"/>
+          <a:lstStyle/>
+          <a:p>
+            <a:pPr algn="l">
+              <a:defRPr sz="900" b="1">
+                <a:solidFill>
+                  <a:srgbClr val="0E7490"/>
+                </a:solidFill>
+              </a:defRPr>
+            </a:pPr>
+            <a:r>
+              <a:rPr sz="900" b="1">
+                <a:solidFill>
+                  <a:srgbClr val="0E7490"/>
+                </a:solidFill>
+              </a:rPr>
+              <a:t>DEPLOYMENT MODEL</a:t>
+            </a:r>
+          </a:p>
+        </p:txBody>
+      </p:sp>
+      <p:sp>
+        <p:nvSpPr>
+          <p:cNvPr id="2" name="title">
+            <a:extLst>
+              <a:ext uri="{FF2B5EF4-FFF2-40B4-BE49-F238E27FC236}">
+                <a16:creationId xmlns:a16="http://schemas.microsoft.com/office/drawing/2014/main" id="{0FF1DC93-9AED-48E1-8279-D9A444578AEB}"/>
+              </a:ext>
+            </a:extLst>
+          </p:cNvPr>
+          <p:cNvSpPr>
+            <a:spLocks noGrp="1"/>
+          </p:cNvSpPr>
+          <p:nvPr/>
+        </p:nvSpPr>
+        <p:spPr>
+          <a:xfrm>
+            <a:off x="685800" y="762000"/>
+            <a:ext cx="10001250" cy="514350"/>
+          </a:xfrm>
+          <a:prstGeom prst="rect">
+            <a:avLst/>
+          </a:prstGeom>
+          <a:noFill/>
+          <a:ln w="0">
+            <a:noFill/>
+            <a:prstDash val="solid"/>
+          </a:ln>
+        </p:spPr>
+        <p:txBody>
+          <a:bodyPr anchor="t"/>
+          <a:lstStyle/>
+          <a:p>
+            <a:pPr algn="l">
+              <a:defRPr sz="2550" b="1">
+                <a:solidFill>
+                  <a:srgbClr val="10213F"/>
+                </a:solidFill>
+              </a:defRPr>
+            </a:pPr>
+            <a:r>
+              <a:rPr sz="2550" b="1">
+                <a:solidFill>
+                  <a:srgbClr val="10213F"/>
+                </a:solidFill>
+              </a:rPr>
+              <a:t>Docker Compose turns a multi-service AI application into a reproducible local environment</a:t>
+            </a:r>
+          </a:p>
+        </p:txBody>
+      </p:sp>
+      <p:sp>
+        <p:nvSpPr>
+          <p:cNvPr id="3" name="subtitle">
+            <a:extLst>
+              <a:ext uri="{FF2B5EF4-FFF2-40B4-BE49-F238E27FC236}">
+                <a16:creationId xmlns:a16="http://schemas.microsoft.com/office/drawing/2014/main" id="{5BCA78DB-414E-418E-94F4-5018742EA3B3}"/>
+              </a:ext>
+            </a:extLst>
+          </p:cNvPr>
+          <p:cNvSpPr>
+            <a:spLocks noGrp="1"/>
+          </p:cNvSpPr>
+          <p:nvPr/>
+        </p:nvSpPr>
+        <p:spPr>
+          <a:xfrm>
+            <a:off x="685800" y="1333500"/>
+            <a:ext cx="9715500" cy="323850"/>
+          </a:xfrm>
+          <a:prstGeom prst="rect">
+            <a:avLst/>
+          </a:prstGeom>
+          <a:noFill/>
+          <a:ln w="0">
+            <a:noFill/>
+            <a:prstDash val="solid"/>
+          </a:ln>
+        </p:spPr>
+        <p:txBody>
+          <a:bodyPr anchor="t"/>
+          <a:lstStyle/>
+          <a:p>
+            <a:pPr algn="l">
+              <a:defRPr sz="1275" b="0">
+                <a:solidFill>
+                  <a:srgbClr val="64748B"/>
+                </a:solidFill>
+              </a:defRPr>
+            </a:pPr>
+            <a:r>
+              <a:rPr sz="1275" b="0">
+                <a:solidFill>
+                  <a:srgbClr val="64748B"/>
+                </a:solidFill>
+              </a:rPr>
+              <a:t>The backend depends on infrastructure services, while Streamlit supplies the research workspace.</a:t>
+            </a:r>
+          </a:p>
+        </p:txBody>
+      </p:sp>
+      <p:sp>
+        <p:nvSpPr>
+          <p:cNvPr id="4" name="Straight Connector 3">
+            <a:extLst>
+              <a:ext uri="{FF2B5EF4-FFF2-40B4-BE49-F238E27FC236}">
+                <a16:creationId xmlns:a16="http://schemas.microsoft.com/office/drawing/2014/main" id="{567A6910-1E93-483A-B97D-D3E86C446B5D}"/>
+              </a:ext>
+            </a:extLst>
+          </p:cNvPr>
+          <p:cNvSpPr>
+            <a:spLocks noGrp="1"/>
+          </p:cNvSpPr>
+          <p:nvPr/>
+        </p:nvSpPr>
+        <p:spPr>
+          <a:xfrm>
+            <a:off x="685800" y="6429375"/>
+            <a:ext cx="10820400" cy="0"/>
+          </a:xfrm>
+          <a:prstGeom prst="line">
+            <a:avLst/>
+          </a:prstGeom>
+          <a:ln w="9525">
+            <a:solidFill>
+              <a:srgbClr val="CBD5E1"/>
+            </a:solidFill>
+            <a:prstDash val="solid"/>
+          </a:ln>
+        </p:spPr>
+      </p:sp>
+      <p:sp>
+        <p:nvSpPr>
+          <p:cNvPr id="5" name="footer">
+            <a:extLst>
+              <a:ext uri="{FF2B5EF4-FFF2-40B4-BE49-F238E27FC236}">
+                <a16:creationId xmlns:a16="http://schemas.microsoft.com/office/drawing/2014/main" id="{F1523515-4DB2-492A-9AE8-C0A8EF952558}"/>
+              </a:ext>
+            </a:extLst>
+          </p:cNvPr>
+          <p:cNvSpPr>
+            <a:spLocks noGrp="1"/>
+          </p:cNvSpPr>
+          <p:nvPr/>
+        </p:nvSpPr>
+        <p:spPr>
+          <a:xfrm>
+            <a:off x="685800" y="6543675"/>
+            <a:ext cx="3429000" cy="171450"/>
+          </a:xfrm>
+          <a:prstGeom prst="rect">
+            <a:avLst/>
+          </a:prstGeom>
+          <a:noFill/>
+          <a:ln w="0">
+            <a:noFill/>
+            <a:prstDash val="solid"/>
+          </a:ln>
+        </p:spPr>
+        <p:txBody>
+          <a:bodyPr anchor="t"/>
+          <a:lstStyle/>
+          <a:p>
+            <a:pPr algn="l">
+              <a:defRPr sz="750" b="1">
+                <a:solidFill>
+                  <a:srgbClr val="64748B"/>
+                </a:solidFill>
+              </a:defRPr>
+            </a:pPr>
+            <a:r>
+              <a:rPr sz="750" b="1">
+                <a:solidFill>
+                  <a:srgbClr val="64748B"/>
+                </a:solidFill>
+              </a:rPr>
+              <a:t>AXLERO SOLUTIONS | OMNIBRAIN</a:t>
+            </a:r>
+          </a:p>
+        </p:txBody>
+      </p:sp>
+      <p:sp>
+        <p:nvSpPr>
+          <p:cNvPr id="6" name="slide-num">
+            <a:extLst>
+              <a:ext uri="{FF2B5EF4-FFF2-40B4-BE49-F238E27FC236}">
+                <a16:creationId xmlns:a16="http://schemas.microsoft.com/office/drawing/2014/main" id="{60BA6850-F6E2-4E52-945E-4AD227438929}"/>
+              </a:ext>
+            </a:extLst>
+          </p:cNvPr>
+          <p:cNvSpPr>
+            <a:spLocks noGrp="1"/>
+          </p:cNvSpPr>
+          <p:nvPr/>
+        </p:nvSpPr>
+        <p:spPr>
+          <a:xfrm>
+            <a:off x="10858500" y="6543675"/>
+            <a:ext cx="647700" cy="171450"/>
+          </a:xfrm>
+          <a:prstGeom prst="rect">
+            <a:avLst/>
+          </a:prstGeom>
+          <a:noFill/>
+          <a:ln w="0">
+            <a:noFill/>
+            <a:prstDash val="solid"/>
+          </a:ln>
+        </p:spPr>
+        <p:txBody>
+          <a:bodyPr anchor="t"/>
+          <a:lstStyle/>
+          <a:p>
+            <a:pPr algn="r">
+              <a:defRPr sz="750" b="1">
+                <a:solidFill>
+                  <a:srgbClr val="64748B"/>
+                </a:solidFill>
+              </a:defRPr>
+            </a:pPr>
+            <a:r>
+              <a:rPr sz="750" b="1">
+                <a:solidFill>
+                  <a:srgbClr val="64748B"/>
+                </a:solidFill>
+              </a:rPr>
+              <a:t>08</a:t>
+            </a:r>
+          </a:p>
+        </p:txBody>
+      </p:sp>
+      <p:sp>
+        <p:nvSpPr>
+          <p:cNvPr id="7" name="svc-FastAPI">
+            <a:extLst>
+              <a:ext uri="{FF2B5EF4-FFF2-40B4-BE49-F238E27FC236}">
+                <a16:creationId xmlns:a16="http://schemas.microsoft.com/office/drawing/2014/main" id="{60AAF9CD-3C81-40D7-983A-4CF6578511EA}"/>
+              </a:ext>
+            </a:extLst>
+          </p:cNvPr>
+          <p:cNvSpPr>
+            <a:spLocks noGrp="1"/>
+          </p:cNvSpPr>
+          <p:nvPr/>
+        </p:nvSpPr>
+        <p:spPr>
+          <a:xfrm>
+            <a:off x="685800" y="2343150"/>
+            <a:ext cx="2428875" cy="1571625"/>
+          </a:xfrm>
+          <a:prstGeom prst="roundRect">
+            <a:avLst>
+              <a:gd name="adj" fmla="val 7273"/>
+            </a:avLst>
+          </a:prstGeom>
+          <a:solidFill>
+            <a:srgbClr val="F6F9FC"/>
+          </a:solidFill>
+          <a:ln w="9525">
+            <a:noFill/>
+            <a:prstDash val="solid"/>
+          </a:ln>
+        </p:spPr>
+      </p:sp>
+      <p:sp>
+        <p:nvSpPr>
+          <p:cNvPr id="8" name="svcH-FastAPI">
+            <a:extLst>
+              <a:ext uri="{FF2B5EF4-FFF2-40B4-BE49-F238E27FC236}">
+                <a16:creationId xmlns:a16="http://schemas.microsoft.com/office/drawing/2014/main" id="{793E2161-2FE9-43BC-BB76-B5D05C0B9A72}"/>
+              </a:ext>
+            </a:extLst>
+          </p:cNvPr>
+          <p:cNvSpPr>
+            <a:spLocks noGrp="1"/>
+          </p:cNvSpPr>
+          <p:nvPr/>
+        </p:nvSpPr>
+        <p:spPr>
+          <a:xfrm>
+            <a:off x="914400" y="2667000"/>
+            <a:ext cx="1962150" cy="295275"/>
+          </a:xfrm>
+          <a:prstGeom prst="rect">
+            <a:avLst/>
+          </a:prstGeom>
+          <a:noFill/>
+          <a:ln w="0">
+            <a:noFill/>
+            <a:prstDash val="solid"/>
+          </a:ln>
+        </p:spPr>
+        <p:txBody>
+          <a:bodyPr anchor="t"/>
+          <a:lstStyle/>
+          <a:p>
+            <a:pPr algn="l">
+              <a:defRPr sz="1800" b="1">
+                <a:solidFill>
+                  <a:srgbClr val="10213F"/>
+                </a:solidFill>
+              </a:defRPr>
+            </a:pPr>
+            <a:r>
+              <a:rPr sz="1800" b="1">
+                <a:solidFill>
+                  <a:srgbClr val="10213F"/>
+                </a:solidFill>
+              </a:rPr>
+              <a:t>FastAPI</a:t>
+            </a:r>
+          </a:p>
+        </p:txBody>
+      </p:sp>
+      <p:sp>
+        <p:nvSpPr>
+          <p:cNvPr id="9" name="svcB-FastAPI">
+            <a:extLst>
+              <a:ext uri="{FF2B5EF4-FFF2-40B4-BE49-F238E27FC236}">
+                <a16:creationId xmlns:a16="http://schemas.microsoft.com/office/drawing/2014/main" id="{728066D0-187C-41DE-9EDB-A31365B92228}"/>
+              </a:ext>
+            </a:extLst>
+          </p:cNvPr>
+          <p:cNvSpPr>
+            <a:spLocks noGrp="1"/>
+          </p:cNvSpPr>
+          <p:nvPr/>
+        </p:nvSpPr>
+        <p:spPr>
+          <a:xfrm>
+            <a:off x="914400" y="3171825"/>
+            <a:ext cx="1962150" cy="266700"/>
+          </a:xfrm>
+          <a:prstGeom prst="rect">
+            <a:avLst/>
+          </a:prstGeom>
+          <a:noFill/>
+          <a:ln w="0">
+            <a:noFill/>
+            <a:prstDash val="solid"/>
+          </a:ln>
+        </p:spPr>
+        <p:txBody>
+          <a:bodyPr anchor="t"/>
+          <a:lstStyle/>
+          <a:p>
+            <a:pPr algn="l">
+              <a:defRPr sz="1350" b="0">
+                <a:solidFill>
+                  <a:srgbClr val="64748B"/>
+                </a:solidFill>
+              </a:defRPr>
+            </a:pPr>
+            <a:r>
+              <a:rPr sz="1350" b="0">
+                <a:solidFill>
+                  <a:srgbClr val="64748B"/>
+                </a:solidFill>
+              </a:rPr>
+              <a:t>API / agent workflow</a:t>
+            </a:r>
+          </a:p>
+        </p:txBody>
+      </p:sp>
+      <p:sp>
+        <p:nvSpPr>
+          <p:cNvPr id="10" name="svc-PostgreSQL">
+            <a:extLst>
+              <a:ext uri="{FF2B5EF4-FFF2-40B4-BE49-F238E27FC236}">
+                <a16:creationId xmlns:a16="http://schemas.microsoft.com/office/drawing/2014/main" id="{4C2B50F9-5A29-442A-9C9B-DE2A766474DB}"/>
+              </a:ext>
+            </a:extLst>
+          </p:cNvPr>
+          <p:cNvSpPr>
+            <a:spLocks noGrp="1"/>
+          </p:cNvSpPr>
+          <p:nvPr/>
+        </p:nvSpPr>
+        <p:spPr>
+          <a:xfrm>
+            <a:off x="3381375" y="2343150"/>
+            <a:ext cx="2428875" cy="1571625"/>
+          </a:xfrm>
+          <a:prstGeom prst="roundRect">
+            <a:avLst>
+              <a:gd name="adj" fmla="val 7273"/>
+            </a:avLst>
+          </a:prstGeom>
+          <a:solidFill>
+            <a:srgbClr val="F6F9FC"/>
+          </a:solidFill>
+          <a:ln w="9525">
+            <a:noFill/>
+            <a:prstDash val="solid"/>
+          </a:ln>
+        </p:spPr>
+      </p:sp>
+      <p:sp>
+        <p:nvSpPr>
+          <p:cNvPr id="11" name="svcH-PostgreSQL">
+            <a:extLst>
+              <a:ext uri="{FF2B5EF4-FFF2-40B4-BE49-F238E27FC236}">
+                <a16:creationId xmlns:a16="http://schemas.microsoft.com/office/drawing/2014/main" id="{2A78A205-56BF-4E4F-A2D1-732C60D79F7F}"/>
+              </a:ext>
+            </a:extLst>
+          </p:cNvPr>
+          <p:cNvSpPr>
+            <a:spLocks noGrp="1"/>
+          </p:cNvSpPr>
+          <p:nvPr/>
+        </p:nvSpPr>
+        <p:spPr>
+          <a:xfrm>
+            <a:off x="3609975" y="2667000"/>
+            <a:ext cx="1962150" cy="295275"/>
+          </a:xfrm>
+          <a:prstGeom prst="rect">
+            <a:avLst/>
+          </a:prstGeom>
+          <a:noFill/>
+          <a:ln w="0">
+            <a:noFill/>
+            <a:prstDash val="solid"/>
+          </a:ln>
+        </p:spPr>
+        <p:txBody>
+          <a:bodyPr anchor="t"/>
+          <a:lstStyle/>
+          <a:p>
+            <a:pPr algn="l">
+              <a:defRPr sz="1800" b="1">
+                <a:solidFill>
+                  <a:srgbClr val="3D8DFF"/>
+                </a:solidFill>
+              </a:defRPr>
+            </a:pPr>
+            <a:r>
+              <a:rPr sz="1800" b="1">
+                <a:solidFill>
+                  <a:srgbClr val="3D8DFF"/>
+                </a:solidFill>
+              </a:rPr>
+              <a:t>PostgreSQL</a:t>
+            </a:r>
+          </a:p>
+        </p:txBody>
+      </p:sp>
+      <p:sp>
+        <p:nvSpPr>
+          <p:cNvPr id="12" name="svcB-PostgreSQL">
+            <a:extLst>
+              <a:ext uri="{FF2B5EF4-FFF2-40B4-BE49-F238E27FC236}">
+                <a16:creationId xmlns:a16="http://schemas.microsoft.com/office/drawing/2014/main" id="{7ABE0561-4C44-43C4-9FEE-B994A1795727}"/>
+              </a:ext>
+            </a:extLst>
+          </p:cNvPr>
+          <p:cNvSpPr>
+            <a:spLocks noGrp="1"/>
+          </p:cNvSpPr>
+          <p:nvPr/>
+        </p:nvSpPr>
+        <p:spPr>
+          <a:xfrm>
+            <a:off x="3609975" y="3171825"/>
+            <a:ext cx="1962150" cy="266700"/>
+          </a:xfrm>
+          <a:prstGeom prst="rect">
+            <a:avLst/>
+          </a:prstGeom>
+          <a:noFill/>
+          <a:ln w="0">
+            <a:noFill/>
+            <a:prstDash val="solid"/>
+          </a:ln>
+        </p:spPr>
+        <p:txBody>
+          <a:bodyPr anchor="t"/>
+          <a:lstStyle/>
+          <a:p>
+            <a:pPr algn="l">
+              <a:defRPr sz="1350" b="0">
+                <a:solidFill>
+                  <a:srgbClr val="64748B"/>
+                </a:solidFill>
+              </a:defRPr>
+            </a:pPr>
+            <a:r>
+              <a:rPr sz="1350" b="0">
+                <a:solidFill>
+                  <a:srgbClr val="64748B"/>
+                </a:solidFill>
+              </a:rPr>
+              <a:t>Users + metadata</a:t>
+            </a:r>
+          </a:p>
+        </p:txBody>
+      </p:sp>
+      <p:sp>
+        <p:nvSpPr>
+          <p:cNvPr id="13" name="svc-MinIO">
+            <a:extLst>
+              <a:ext uri="{FF2B5EF4-FFF2-40B4-BE49-F238E27FC236}">
+                <a16:creationId xmlns:a16="http://schemas.microsoft.com/office/drawing/2014/main" id="{31C5D5E8-A2B5-46C3-99E8-CB435F744797}"/>
+              </a:ext>
+            </a:extLst>
+          </p:cNvPr>
+          <p:cNvSpPr>
+            <a:spLocks noGrp="1"/>
+          </p:cNvSpPr>
+          <p:nvPr/>
+        </p:nvSpPr>
+        <p:spPr>
+          <a:xfrm>
+            <a:off x="6076950" y="2343150"/>
+            <a:ext cx="2428875" cy="1571625"/>
+          </a:xfrm>
+          <a:prstGeom prst="roundRect">
+            <a:avLst>
+              <a:gd name="adj" fmla="val 7273"/>
+            </a:avLst>
+          </a:prstGeom>
+          <a:solidFill>
+            <a:srgbClr val="F6F9FC"/>
+          </a:solidFill>
+          <a:ln w="9525">
+            <a:noFill/>
+            <a:prstDash val="solid"/>
+          </a:ln>
+        </p:spPr>
+      </p:sp>
+      <p:sp>
+        <p:nvSpPr>
+          <p:cNvPr id="14" name="svcH-MinIO">
+            <a:extLst>
+              <a:ext uri="{FF2B5EF4-FFF2-40B4-BE49-F238E27FC236}">
+                <a16:creationId xmlns:a16="http://schemas.microsoft.com/office/drawing/2014/main" id="{E45CB58F-1A57-47C9-A957-7D5897E29FC9}"/>
+              </a:ext>
+            </a:extLst>
+          </p:cNvPr>
+          <p:cNvSpPr>
+            <a:spLocks noGrp="1"/>
+          </p:cNvSpPr>
+          <p:nvPr/>
+        </p:nvSpPr>
+        <p:spPr>
+          <a:xfrm>
+            <a:off x="6305550" y="2667000"/>
+            <a:ext cx="1962150" cy="295275"/>
+          </a:xfrm>
+          <a:prstGeom prst="rect">
+            <a:avLst/>
+          </a:prstGeom>
+          <a:noFill/>
+          <a:ln w="0">
+            <a:noFill/>
+            <a:prstDash val="solid"/>
+          </a:ln>
+        </p:spPr>
+        <p:txBody>
+          <a:bodyPr anchor="t"/>
+          <a:lstStyle/>
+          <a:p>
+            <a:pPr algn="l">
+              <a:defRPr sz="1800" b="1">
+                <a:solidFill>
+                  <a:srgbClr val="0E7490"/>
+                </a:solidFill>
+              </a:defRPr>
+            </a:pPr>
+            <a:r>
+              <a:rPr sz="1800" b="1">
+                <a:solidFill>
+                  <a:srgbClr val="0E7490"/>
+                </a:solidFill>
+              </a:rPr>
+              <a:t>MinIO</a:t>
+            </a:r>
+          </a:p>
+        </p:txBody>
+      </p:sp>
+      <p:sp>
+        <p:nvSpPr>
+          <p:cNvPr id="15" name="svcB-MinIO">
+            <a:extLst>
+              <a:ext uri="{FF2B5EF4-FFF2-40B4-BE49-F238E27FC236}">
+                <a16:creationId xmlns:a16="http://schemas.microsoft.com/office/drawing/2014/main" id="{174D49F1-2946-44F5-884C-5855E9E98C6F}"/>
+              </a:ext>
+            </a:extLst>
+          </p:cNvPr>
+          <p:cNvSpPr>
+            <a:spLocks noGrp="1"/>
+          </p:cNvSpPr>
+          <p:nvPr/>
+        </p:nvSpPr>
+        <p:spPr>
+          <a:xfrm>
+            <a:off x="6305550" y="3171825"/>
+            <a:ext cx="1962150" cy="266700"/>
+          </a:xfrm>
+          <a:prstGeom prst="rect">
+            <a:avLst/>
+          </a:prstGeom>
+          <a:noFill/>
+          <a:ln w="0">
+            <a:noFill/>
+            <a:prstDash val="solid"/>
+          </a:ln>
+        </p:spPr>
+        <p:txBody>
+          <a:bodyPr anchor="t"/>
+          <a:lstStyle/>
+          <a:p>
+            <a:pPr algn="l">
+              <a:defRPr sz="1350" b="0">
+                <a:solidFill>
+                  <a:srgbClr val="64748B"/>
+                </a:solidFill>
+              </a:defRPr>
+            </a:pPr>
+            <a:r>
+              <a:rPr sz="1350" b="0">
+                <a:solidFill>
+                  <a:srgbClr val="64748B"/>
+                </a:solidFill>
+              </a:rPr>
+              <a:t>Uploaded files</a:t>
+            </a:r>
+          </a:p>
+        </p:txBody>
+      </p:sp>
+      <p:sp>
+        <p:nvSpPr>
+          <p:cNvPr id="16" name="svc-Qdrant">
+            <a:extLst>
+              <a:ext uri="{FF2B5EF4-FFF2-40B4-BE49-F238E27FC236}">
+                <a16:creationId xmlns:a16="http://schemas.microsoft.com/office/drawing/2014/main" id="{AB43CBDC-437C-4824-A100-E7C4EC04183B}"/>
+              </a:ext>
+            </a:extLst>
+          </p:cNvPr>
+          <p:cNvSpPr>
+            <a:spLocks noGrp="1"/>
+          </p:cNvSpPr>
+          <p:nvPr/>
+        </p:nvSpPr>
+        <p:spPr>
+          <a:xfrm>
+            <a:off x="8772525" y="2343150"/>
+            <a:ext cx="2428875" cy="1571625"/>
+          </a:xfrm>
+          <a:prstGeom prst="roundRect">
+            <a:avLst>
+              <a:gd name="adj" fmla="val 7273"/>
+            </a:avLst>
+          </a:prstGeom>
+          <a:solidFill>
+            <a:srgbClr val="F6F9FC"/>
+          </a:solidFill>
+          <a:ln w="9525">
+            <a:noFill/>
+            <a:prstDash val="solid"/>
+          </a:ln>
+        </p:spPr>
+      </p:sp>
+      <p:sp>
+        <p:nvSpPr>
+          <p:cNvPr id="17" name="svcH-Qdrant">
+            <a:extLst>
+              <a:ext uri="{FF2B5EF4-FFF2-40B4-BE49-F238E27FC236}">
+                <a16:creationId xmlns:a16="http://schemas.microsoft.com/office/drawing/2014/main" id="{D8EEC87D-B03E-449D-AA4A-819364BD296E}"/>
+              </a:ext>
+            </a:extLst>
+          </p:cNvPr>
+          <p:cNvSpPr>
+            <a:spLocks noGrp="1"/>
+          </p:cNvSpPr>
+          <p:nvPr/>
+        </p:nvSpPr>
+        <p:spPr>
+          <a:xfrm>
+            <a:off x="9001125" y="2667000"/>
+            <a:ext cx="1962150" cy="295275"/>
+          </a:xfrm>
+          <a:prstGeom prst="rect">
+            <a:avLst/>
+          </a:prstGeom>
+          <a:noFill/>
+          <a:ln w="0">
+            <a:noFill/>
+            <a:prstDash val="solid"/>
+          </a:ln>
+        </p:spPr>
+        <p:txBody>
+          <a:bodyPr anchor="t"/>
+          <a:lstStyle/>
+          <a:p>
+            <a:pPr algn="l">
+              <a:defRPr sz="1800" b="1">
+                <a:solidFill>
+                  <a:srgbClr val="6DCBF4"/>
+                </a:solidFill>
+              </a:defRPr>
+            </a:pPr>
+            <a:r>
+              <a:rPr sz="1800" b="1">
+                <a:solidFill>
+                  <a:srgbClr val="6DCBF4"/>
+                </a:solidFill>
+              </a:rPr>
+              <a:t>Qdrant</a:t>
+            </a:r>
+          </a:p>
+        </p:txBody>
+      </p:sp>
+      <p:sp>
+        <p:nvSpPr>
+          <p:cNvPr id="18" name="svcB-Qdrant">
+            <a:extLst>
+              <a:ext uri="{FF2B5EF4-FFF2-40B4-BE49-F238E27FC236}">
+                <a16:creationId xmlns:a16="http://schemas.microsoft.com/office/drawing/2014/main" id="{40E9CA19-5D20-4E32-8CEF-76BCCDAD86CB}"/>
+              </a:ext>
+            </a:extLst>
+          </p:cNvPr>
+          <p:cNvSpPr>
+            <a:spLocks noGrp="1"/>
+          </p:cNvSpPr>
+          <p:nvPr/>
+        </p:nvSpPr>
+        <p:spPr>
+          <a:xfrm>
+            <a:off x="9001125" y="3171825"/>
+            <a:ext cx="1962150" cy="266700"/>
+          </a:xfrm>
+          <a:prstGeom prst="rect">
+            <a:avLst/>
+          </a:prstGeom>
+          <a:noFill/>
+          <a:ln w="0">
+            <a:noFill/>
+            <a:prstDash val="solid"/>
+          </a:ln>
+        </p:spPr>
+        <p:txBody>
+          <a:bodyPr anchor="t"/>
+          <a:lstStyle/>
+          <a:p>
+            <a:pPr algn="l">
+              <a:defRPr sz="1350" b="0">
+                <a:solidFill>
+                  <a:srgbClr val="64748B"/>
+                </a:solidFill>
+              </a:defRPr>
+            </a:pPr>
+            <a:r>
+              <a:rPr sz="1350" b="0">
+                <a:solidFill>
+                  <a:srgbClr val="64748B"/>
+                </a:solidFill>
+              </a:rPr>
+              <a:t>Vector search</a:t>
+            </a:r>
+          </a:p>
+        </p:txBody>
+      </p:sp>
+      <p:sp>
+        <p:nvSpPr>
+          <p:cNvPr id="19" name="deploy-command">
+            <a:extLst>
+              <a:ext uri="{FF2B5EF4-FFF2-40B4-BE49-F238E27FC236}">
+                <a16:creationId xmlns:a16="http://schemas.microsoft.com/office/drawing/2014/main" id="{32100C59-7052-4C61-8F7F-85A20A52F56A}"/>
+              </a:ext>
+            </a:extLst>
+          </p:cNvPr>
+          <p:cNvSpPr>
+            <a:spLocks noGrp="1"/>
+          </p:cNvSpPr>
+          <p:nvPr/>
+        </p:nvSpPr>
+        <p:spPr>
+          <a:xfrm>
+            <a:off x="685800" y="4524375"/>
+            <a:ext cx="4381500" cy="304800"/>
+          </a:xfrm>
+          <a:prstGeom prst="rect">
+            <a:avLst/>
+          </a:prstGeom>
+          <a:noFill/>
+          <a:ln w="0">
+            <a:noFill/>
+            <a:prstDash val="solid"/>
+          </a:ln>
+        </p:spPr>
+        <p:txBody>
+          <a:bodyPr anchor="t"/>
+          <a:lstStyle/>
+          <a:p>
+            <a:pPr algn="l">
+              <a:defRPr sz="1650" b="1">
+                <a:solidFill>
+                  <a:srgbClr val="10213F"/>
+                </a:solidFill>
+              </a:defRPr>
+            </a:pPr>
+            <a:r>
+              <a:rPr sz="1650" b="1">
+                <a:solidFill>
+                  <a:srgbClr val="10213F"/>
+                </a:solidFill>
+              </a:rPr>
+              <a:t>docker compose up -d --build</a:t>
+            </a:r>
+          </a:p>
+        </p:txBody>
+      </p:sp>
+      <p:sp>
+        <p:nvSpPr>
+          <p:cNvPr id="20" name="deploy-copy">
+            <a:extLst>
+              <a:ext uri="{FF2B5EF4-FFF2-40B4-BE49-F238E27FC236}">
+                <a16:creationId xmlns:a16="http://schemas.microsoft.com/office/drawing/2014/main" id="{D228931A-4913-4310-837B-DEA5F681F60E}"/>
+              </a:ext>
+            </a:extLst>
+          </p:cNvPr>
+          <p:cNvSpPr>
+            <a:spLocks noGrp="1"/>
+          </p:cNvSpPr>
+          <p:nvPr/>
+        </p:nvSpPr>
+        <p:spPr>
+          <a:xfrm>
+            <a:off x="685800" y="4981575"/>
+            <a:ext cx="8858250" cy="285750"/>
+          </a:xfrm>
+          <a:prstGeom prst="rect">
+            <a:avLst/>
+          </a:prstGeom>
+          <a:noFill/>
+          <a:ln w="0">
+            <a:noFill/>
+            <a:prstDash val="solid"/>
+          </a:ln>
+        </p:spPr>
+        <p:txBody>
+          <a:bodyPr anchor="t"/>
+          <a:lstStyle/>
+          <a:p>
+            <a:pPr algn="l">
+              <a:defRPr sz="1350" b="0">
+                <a:solidFill>
+                  <a:srgbClr val="64748B"/>
+                </a:solidFill>
+              </a:defRPr>
+            </a:pPr>
+            <a:r>
+              <a:rPr sz="1350" b="0">
+                <a:solidFill>
+                  <a:srgbClr val="64748B"/>
+                </a:solidFill>
+              </a:rPr>
+              <a:t>Then open FastAPI docs on port 8000 and the Streamlit workspace on port 8501.</a:t>
+            </a:r>
+          </a:p>
+        </p:txBody>
+      </p:sp>
+    </p:spTree>
+    <p:extLst>
+      <p:ext uri="{BB962C8B-B14F-4D97-AF65-F5344CB8AC3E}">
+        <p14:creationId xmlns:p14="http://schemas.microsoft.com/office/powerpoint/2010/main" val="1125346078"/>
+      </p:ext>
+    </p:extLst>
+  </p:cSld>
+  <p:clrMapOvr>
+    <a:masterClrMapping/>
+  </p:clrMapOvr>
+</p:sld>
+</file>
+
+<file path=ppt/slides/slide11.xml><?xml version="1.0" encoding="utf-8"?>
+<p:sld xmlns:a="http://schemas.openxmlformats.org/drawingml/2006/main" xmlns:r="http://schemas.openxmlformats.org/officeDocument/2006/relationships" xmlns:p="http://schemas.openxmlformats.org/presentationml/2006/main">
+  <p:cSld>
+    <p:bg>
+      <p:bgPr>
+        <a:solidFill>
+          <a:srgbClr val="FFFFFF"/>
+        </a:solidFill>
+        <a:effectLst/>
+      </p:bgPr>
+    </p:bg>
+    <p:spTree>
+      <p:nvGrpSpPr>
+        <p:cNvPr id="1" name=""/>
+        <p:cNvGrpSpPr/>
+        <p:nvPr/>
+      </p:nvGrpSpPr>
+      <p:grpSpPr>
+        <a:xfrm>
+          <a:off x="0" y="0"/>
+          <a:ext cx="0" cy="0"/>
+          <a:chOff x="0" y="0"/>
+          <a:chExt cx="0" cy="0"/>
+        </a:xfrm>
+      </p:grpSpPr>
+      <p:sp>
+        <p:nvSpPr>
+          <p:cNvPr id="29" name="eyebrow">
+            <a:extLst>
+              <a:ext uri="{FF2B5EF4-FFF2-40B4-BE49-F238E27FC236}">
+                <a16:creationId xmlns:a16="http://schemas.microsoft.com/office/drawing/2014/main" id="{0D970C56-B447-41C6-9A91-9C86CD6E8504}"/>
+              </a:ext>
+            </a:extLst>
+          </p:cNvPr>
+          <p:cNvSpPr>
+            <a:spLocks noGrp="1"/>
+          </p:cNvSpPr>
+          <p:nvPr/>
+        </p:nvSpPr>
+        <p:spPr>
+          <a:xfrm>
+            <a:off x="685800" y="419100"/>
+            <a:ext cx="3619500" cy="190500"/>
+          </a:xfrm>
+          <a:prstGeom prst="rect">
+            <a:avLst/>
+          </a:prstGeom>
+          <a:noFill/>
+          <a:ln w="0">
+            <a:noFill/>
+            <a:prstDash val="solid"/>
+          </a:ln>
+        </p:spPr>
+        <p:txBody>
+          <a:bodyPr anchor="t"/>
+          <a:lstStyle/>
+          <a:p>
+            <a:pPr algn="l">
+              <a:defRPr sz="900" b="1">
+                <a:solidFill>
+                  <a:srgbClr val="0E7490"/>
+                </a:solidFill>
+              </a:defRPr>
+            </a:pPr>
+            <a:r>
+              <a:rPr sz="900" b="1">
+                <a:solidFill>
+                  <a:srgbClr val="0E7490"/>
+                </a:solidFill>
+              </a:rPr>
+              <a:t>DELIVERY STATUS</a:t>
+            </a:r>
+          </a:p>
+        </p:txBody>
+      </p:sp>
+      <p:sp>
+        <p:nvSpPr>
+          <p:cNvPr id="2" name="title">
+            <a:extLst>
+              <a:ext uri="{FF2B5EF4-FFF2-40B4-BE49-F238E27FC236}">
+                <a16:creationId xmlns:a16="http://schemas.microsoft.com/office/drawing/2014/main" id="{130664FE-3D20-47A6-B122-7E5E2DBBA1D7}"/>
+              </a:ext>
+            </a:extLst>
+          </p:cNvPr>
+          <p:cNvSpPr>
+            <a:spLocks noGrp="1"/>
+          </p:cNvSpPr>
+          <p:nvPr/>
+        </p:nvSpPr>
+        <p:spPr>
+          <a:xfrm>
+            <a:off x="685800" y="762000"/>
+            <a:ext cx="10001250" cy="514350"/>
+          </a:xfrm>
+          <a:prstGeom prst="rect">
+            <a:avLst/>
+          </a:prstGeom>
+          <a:noFill/>
+          <a:ln w="0">
+            <a:noFill/>
+            <a:prstDash val="solid"/>
+          </a:ln>
+        </p:spPr>
+        <p:txBody>
+          <a:bodyPr anchor="t"/>
+          <a:lstStyle/>
+          <a:p>
+            <a:pPr algn="l">
+              <a:defRPr sz="2550" b="1">
+                <a:solidFill>
+                  <a:srgbClr val="10213F"/>
+                </a:solidFill>
+              </a:defRPr>
+            </a:pPr>
+            <a:r>
+              <a:rPr sz="2550" b="1">
+                <a:solidFill>
+                  <a:srgbClr val="10213F"/>
+                </a:solidFill>
+              </a:rPr>
+              <a:t>What is implemented now—and what comes next</a:t>
+            </a:r>
+          </a:p>
+        </p:txBody>
+      </p:sp>
+      <p:sp>
+        <p:nvSpPr>
+          <p:cNvPr id="3" name="subtitle">
+            <a:extLst>
+              <a:ext uri="{FF2B5EF4-FFF2-40B4-BE49-F238E27FC236}">
+                <a16:creationId xmlns:a16="http://schemas.microsoft.com/office/drawing/2014/main" id="{9F32FE9E-76CE-4DA0-8B18-C043E2199D36}"/>
+              </a:ext>
+            </a:extLst>
+          </p:cNvPr>
+          <p:cNvSpPr>
+            <a:spLocks noGrp="1"/>
+          </p:cNvSpPr>
+          <p:nvPr/>
+        </p:nvSpPr>
+        <p:spPr>
+          <a:xfrm>
+            <a:off x="685800" y="1333500"/>
+            <a:ext cx="9715500" cy="323850"/>
+          </a:xfrm>
+          <a:prstGeom prst="rect">
+            <a:avLst/>
+          </a:prstGeom>
+          <a:noFill/>
+          <a:ln w="0">
+            <a:noFill/>
+            <a:prstDash val="solid"/>
+          </a:ln>
+        </p:spPr>
+        <p:txBody>
+          <a:bodyPr anchor="t"/>
+          <a:lstStyle/>
+          <a:p>
+            <a:pPr algn="l">
+              <a:defRPr sz="1275" b="0">
+                <a:solidFill>
+                  <a:srgbClr val="64748B"/>
+                </a:solidFill>
+              </a:defRPr>
+            </a:pPr>
+            <a:r>
+              <a:rPr sz="1275" b="0">
+                <a:solidFill>
+                  <a:srgbClr val="64748B"/>
+                </a:solidFill>
+              </a:rPr>
+              <a:t>The project already proves controlled routing and guarded retrieval; multi-modal reasoning is the next capability layer.</a:t>
+            </a:r>
+          </a:p>
+        </p:txBody>
+      </p:sp>
+      <p:sp>
+        <p:nvSpPr>
+          <p:cNvPr id="4" name="Straight Connector 3">
+            <a:extLst>
+              <a:ext uri="{FF2B5EF4-FFF2-40B4-BE49-F238E27FC236}">
+                <a16:creationId xmlns:a16="http://schemas.microsoft.com/office/drawing/2014/main" id="{8AF04DC5-4B0A-4C7E-B340-F4193CF6C7D4}"/>
+              </a:ext>
+            </a:extLst>
+          </p:cNvPr>
+          <p:cNvSpPr>
+            <a:spLocks noGrp="1"/>
+          </p:cNvSpPr>
+          <p:nvPr/>
+        </p:nvSpPr>
+        <p:spPr>
+          <a:xfrm>
+            <a:off x="685800" y="6429375"/>
+            <a:ext cx="10820400" cy="0"/>
+          </a:xfrm>
+          <a:prstGeom prst="line">
+            <a:avLst/>
+          </a:prstGeom>
+          <a:ln w="9525">
+            <a:solidFill>
+              <a:srgbClr val="CBD5E1"/>
+            </a:solidFill>
+            <a:prstDash val="solid"/>
+          </a:ln>
+        </p:spPr>
+      </p:sp>
+      <p:sp>
+        <p:nvSpPr>
+          <p:cNvPr id="5" name="footer">
+            <a:extLst>
+              <a:ext uri="{FF2B5EF4-FFF2-40B4-BE49-F238E27FC236}">
+                <a16:creationId xmlns:a16="http://schemas.microsoft.com/office/drawing/2014/main" id="{7EF10662-1953-4144-B41E-1B67E95F71AD}"/>
+              </a:ext>
+            </a:extLst>
+          </p:cNvPr>
+          <p:cNvSpPr>
+            <a:spLocks noGrp="1"/>
+          </p:cNvSpPr>
+          <p:nvPr/>
+        </p:nvSpPr>
+        <p:spPr>
+          <a:xfrm>
+            <a:off x="685800" y="6543675"/>
+            <a:ext cx="3429000" cy="171450"/>
+          </a:xfrm>
+          <a:prstGeom prst="rect">
+            <a:avLst/>
+          </a:prstGeom>
+          <a:noFill/>
+          <a:ln w="0">
+            <a:noFill/>
+            <a:prstDash val="solid"/>
+          </a:ln>
+        </p:spPr>
+        <p:txBody>
+          <a:bodyPr anchor="t"/>
+          <a:lstStyle/>
+          <a:p>
+            <a:pPr algn="l">
+              <a:defRPr sz="750" b="1">
+                <a:solidFill>
+                  <a:srgbClr val="64748B"/>
+                </a:solidFill>
+              </a:defRPr>
+            </a:pPr>
+            <a:r>
+              <a:rPr sz="750" b="1">
+                <a:solidFill>
+                  <a:srgbClr val="64748B"/>
+                </a:solidFill>
+              </a:rPr>
+              <a:t>AXLERO SOLUTIONS | OMNIBRAIN</a:t>
+            </a:r>
+          </a:p>
+        </p:txBody>
+      </p:sp>
+      <p:sp>
+        <p:nvSpPr>
+          <p:cNvPr id="6" name="slide-num">
+            <a:extLst>
+              <a:ext uri="{FF2B5EF4-FFF2-40B4-BE49-F238E27FC236}">
+                <a16:creationId xmlns:a16="http://schemas.microsoft.com/office/drawing/2014/main" id="{F59822E6-C7F3-4D65-9939-0290AA38F2CC}"/>
+              </a:ext>
+            </a:extLst>
+          </p:cNvPr>
+          <p:cNvSpPr>
+            <a:spLocks noGrp="1"/>
+          </p:cNvSpPr>
+          <p:nvPr/>
+        </p:nvSpPr>
+        <p:spPr>
+          <a:xfrm>
+            <a:off x="10858500" y="6543675"/>
+            <a:ext cx="647700" cy="171450"/>
+          </a:xfrm>
+          <a:prstGeom prst="rect">
+            <a:avLst/>
+          </a:prstGeom>
+          <a:noFill/>
+          <a:ln w="0">
+            <a:noFill/>
+            <a:prstDash val="solid"/>
+          </a:ln>
+        </p:spPr>
+        <p:txBody>
+          <a:bodyPr anchor="t"/>
+          <a:lstStyle/>
+          <a:p>
+            <a:pPr algn="r">
+              <a:defRPr sz="750" b="1">
+                <a:solidFill>
+                  <a:srgbClr val="64748B"/>
+                </a:solidFill>
+              </a:defRPr>
+            </a:pPr>
+            <a:r>
+              <a:rPr sz="750" b="1">
+                <a:solidFill>
+                  <a:srgbClr val="64748B"/>
+                </a:solidFill>
+              </a:rPr>
+              <a:t>09</a:t>
+            </a:r>
+          </a:p>
+        </p:txBody>
+      </p:sp>
+      <p:sp>
+        <p:nvSpPr>
+          <p:cNvPr id="7" name="implemented">
+            <a:extLst>
+              <a:ext uri="{FF2B5EF4-FFF2-40B4-BE49-F238E27FC236}">
+                <a16:creationId xmlns:a16="http://schemas.microsoft.com/office/drawing/2014/main" id="{7ED790B3-1A98-41FC-81E6-9825712F169E}"/>
+              </a:ext>
+            </a:extLst>
+          </p:cNvPr>
+          <p:cNvSpPr>
+            <a:spLocks noGrp="1"/>
+          </p:cNvSpPr>
+          <p:nvPr/>
+        </p:nvSpPr>
+        <p:spPr>
+          <a:xfrm>
+            <a:off x="685800" y="2076450"/>
+            <a:ext cx="4953000" cy="3333750"/>
+          </a:xfrm>
+          <a:prstGeom prst="roundRect">
+            <a:avLst>
+              <a:gd name="adj" fmla="val 3429"/>
+            </a:avLst>
+          </a:prstGeom>
+          <a:solidFill>
+            <a:srgbClr val="F6F9FC"/>
+          </a:solidFill>
+          <a:ln w="9525">
+            <a:noFill/>
+            <a:prstDash val="solid"/>
+          </a:ln>
+        </p:spPr>
+      </p:sp>
+      <p:sp>
+        <p:nvSpPr>
+          <p:cNvPr id="8" name="imp-h">
+            <a:extLst>
+              <a:ext uri="{FF2B5EF4-FFF2-40B4-BE49-F238E27FC236}">
+                <a16:creationId xmlns:a16="http://schemas.microsoft.com/office/drawing/2014/main" id="{B5A5917C-2BA2-466C-A694-AD8137DB5EE1}"/>
+              </a:ext>
+            </a:extLst>
+          </p:cNvPr>
+          <p:cNvSpPr>
+            <a:spLocks noGrp="1"/>
+          </p:cNvSpPr>
+          <p:nvPr/>
+        </p:nvSpPr>
+        <p:spPr>
+          <a:xfrm>
+            <a:off x="1028700" y="2400300"/>
+            <a:ext cx="2476500" cy="342900"/>
+          </a:xfrm>
+          <a:prstGeom prst="rect">
+            <a:avLst/>
+          </a:prstGeom>
+          <a:noFill/>
+          <a:ln w="0">
+            <a:noFill/>
+            <a:prstDash val="solid"/>
+          </a:ln>
+        </p:spPr>
+        <p:txBody>
+          <a:bodyPr anchor="t"/>
+          <a:lstStyle/>
+          <a:p>
+            <a:pPr algn="l">
+              <a:defRPr sz="2100" b="1">
+                <a:solidFill>
+                  <a:srgbClr val="0F766E"/>
+                </a:solidFill>
+              </a:defRPr>
+            </a:pPr>
+            <a:r>
+              <a:rPr sz="2100" b="1">
+                <a:solidFill>
+                  <a:srgbClr val="0F766E"/>
+                </a:solidFill>
+              </a:rPr>
+              <a:t>Implemented</a:t>
+            </a:r>
+          </a:p>
+        </p:txBody>
+      </p:sp>
+      <p:sp>
+        <p:nvSpPr>
+          <p:cNvPr id="9" name="b-Agents">
+            <a:extLst>
+              <a:ext uri="{FF2B5EF4-FFF2-40B4-BE49-F238E27FC236}">
+                <a16:creationId xmlns:a16="http://schemas.microsoft.com/office/drawing/2014/main" id="{25E29489-7D1E-4943-AC1B-894EFB7AB27B}"/>
+              </a:ext>
+            </a:extLst>
+          </p:cNvPr>
+          <p:cNvSpPr>
+            <a:spLocks noGrp="1"/>
+          </p:cNvSpPr>
+          <p:nvPr/>
+        </p:nvSpPr>
+        <p:spPr>
+          <a:xfrm>
+            <a:off x="1028700" y="3009900"/>
+            <a:ext cx="190500" cy="247650"/>
+          </a:xfrm>
+          <a:prstGeom prst="rect">
+            <a:avLst/>
+          </a:prstGeom>
+          <a:noFill/>
+          <a:ln w="0">
+            <a:noFill/>
+            <a:prstDash val="solid"/>
+          </a:ln>
+        </p:spPr>
+        <p:txBody>
+          <a:bodyPr anchor="t"/>
+          <a:lstStyle/>
+          <a:p>
+            <a:pPr algn="l">
+              <a:defRPr sz="1800" b="1">
+                <a:solidFill>
+                  <a:srgbClr val="3D8DFF"/>
+                </a:solidFill>
+              </a:defRPr>
+            </a:pPr>
+            <a:r>
+              <a:rPr sz="1800" b="1">
+                <a:solidFill>
+                  <a:srgbClr val="3D8DFF"/>
+                </a:solidFill>
+              </a:rPr>
+              <a:t>•</a:t>
+            </a:r>
+          </a:p>
+        </p:txBody>
+      </p:sp>
+      <p:sp>
+        <p:nvSpPr>
+          <p:cNvPr id="10" name="bl-Agents">
+            <a:extLst>
+              <a:ext uri="{FF2B5EF4-FFF2-40B4-BE49-F238E27FC236}">
+                <a16:creationId xmlns:a16="http://schemas.microsoft.com/office/drawing/2014/main" id="{1CBDA511-29A1-40AD-9F7E-B345A3A9CF40}"/>
+              </a:ext>
+            </a:extLst>
+          </p:cNvPr>
+          <p:cNvSpPr>
+            <a:spLocks noGrp="1"/>
+          </p:cNvSpPr>
+          <p:nvPr/>
+        </p:nvSpPr>
+        <p:spPr>
+          <a:xfrm>
+            <a:off x="1276350" y="3009900"/>
+            <a:ext cx="3467100" cy="238125"/>
+          </a:xfrm>
+          <a:prstGeom prst="rect">
+            <a:avLst/>
+          </a:prstGeom>
+          <a:noFill/>
+          <a:ln w="0">
+            <a:noFill/>
+            <a:prstDash val="solid"/>
+          </a:ln>
+        </p:spPr>
+        <p:txBody>
+          <a:bodyPr anchor="t"/>
+          <a:lstStyle/>
+          <a:p>
+            <a:pPr algn="l">
+              <a:defRPr sz="1350" b="1">
+                <a:solidFill>
+                  <a:srgbClr val="10213F"/>
+                </a:solidFill>
+              </a:defRPr>
+            </a:pPr>
+            <a:r>
+              <a:rPr sz="1350" b="1">
+                <a:solidFill>
+                  <a:srgbClr val="10213F"/>
+                </a:solidFill>
+              </a:rPr>
+              <a:t>Agents</a:t>
+            </a:r>
+          </a:p>
+        </p:txBody>
+      </p:sp>
+      <p:sp>
+        <p:nvSpPr>
+          <p:cNvPr id="11" name="bb-Agents">
+            <a:extLst>
+              <a:ext uri="{FF2B5EF4-FFF2-40B4-BE49-F238E27FC236}">
+                <a16:creationId xmlns:a16="http://schemas.microsoft.com/office/drawing/2014/main" id="{395E0D78-75A2-4F4D-90C2-AD46CEFAEA90}"/>
+              </a:ext>
+            </a:extLst>
+          </p:cNvPr>
+          <p:cNvSpPr>
+            <a:spLocks noGrp="1"/>
+          </p:cNvSpPr>
+          <p:nvPr/>
+        </p:nvSpPr>
+        <p:spPr>
+          <a:xfrm>
+            <a:off x="1276350" y="3267075"/>
+            <a:ext cx="3467100" cy="476250"/>
+          </a:xfrm>
+          <a:prstGeom prst="rect">
+            <a:avLst/>
+          </a:prstGeom>
+          <a:noFill/>
+          <a:ln w="0">
+            <a:noFill/>
+            <a:prstDash val="solid"/>
+          </a:ln>
+        </p:spPr>
+        <p:txBody>
+          <a:bodyPr anchor="t"/>
+          <a:lstStyle/>
+          <a:p>
+            <a:pPr algn="l">
+              <a:defRPr sz="1125" b="0">
+                <a:solidFill>
+                  <a:srgbClr val="64748B"/>
+                </a:solidFill>
+              </a:defRPr>
+            </a:pPr>
+            <a:r>
+              <a:rPr sz="1125" b="0">
+                <a:solidFill>
+                  <a:srgbClr val="64748B"/>
+                </a:solidFill>
+              </a:rPr>
+              <a:t>Document and SQL specialist routes.</a:t>
+            </a:r>
+          </a:p>
+        </p:txBody>
+      </p:sp>
+      <p:sp>
+        <p:nvSpPr>
+          <p:cNvPr id="12" name="b-Safety">
+            <a:extLst>
+              <a:ext uri="{FF2B5EF4-FFF2-40B4-BE49-F238E27FC236}">
+                <a16:creationId xmlns:a16="http://schemas.microsoft.com/office/drawing/2014/main" id="{88D56E0F-8A26-440A-ACA8-CC45D2445A17}"/>
+              </a:ext>
+            </a:extLst>
+          </p:cNvPr>
+          <p:cNvSpPr>
+            <a:spLocks noGrp="1"/>
+          </p:cNvSpPr>
+          <p:nvPr/>
+        </p:nvSpPr>
+        <p:spPr>
+          <a:xfrm>
+            <a:off x="1028700" y="3714750"/>
+            <a:ext cx="190500" cy="247650"/>
+          </a:xfrm>
+          <a:prstGeom prst="rect">
+            <a:avLst/>
+          </a:prstGeom>
+          <a:noFill/>
+          <a:ln w="0">
+            <a:noFill/>
+            <a:prstDash val="solid"/>
+          </a:ln>
+        </p:spPr>
+        <p:txBody>
+          <a:bodyPr anchor="t"/>
+          <a:lstStyle/>
+          <a:p>
+            <a:pPr algn="l">
+              <a:defRPr sz="1800" b="1">
+                <a:solidFill>
+                  <a:srgbClr val="3D8DFF"/>
+                </a:solidFill>
+              </a:defRPr>
+            </a:pPr>
+            <a:r>
+              <a:rPr sz="1800" b="1">
+                <a:solidFill>
+                  <a:srgbClr val="3D8DFF"/>
+                </a:solidFill>
+              </a:rPr>
+              <a:t>•</a:t>
+            </a:r>
+          </a:p>
+        </p:txBody>
+      </p:sp>
+      <p:sp>
+        <p:nvSpPr>
+          <p:cNvPr id="13" name="bl-Safety">
+            <a:extLst>
+              <a:ext uri="{FF2B5EF4-FFF2-40B4-BE49-F238E27FC236}">
+                <a16:creationId xmlns:a16="http://schemas.microsoft.com/office/drawing/2014/main" id="{483743D3-5CC5-4829-A237-8623FE902668}"/>
+              </a:ext>
+            </a:extLst>
+          </p:cNvPr>
+          <p:cNvSpPr>
+            <a:spLocks noGrp="1"/>
+          </p:cNvSpPr>
+          <p:nvPr/>
+        </p:nvSpPr>
+        <p:spPr>
+          <a:xfrm>
+            <a:off x="1276350" y="3714750"/>
+            <a:ext cx="3467100" cy="238125"/>
+          </a:xfrm>
+          <a:prstGeom prst="rect">
+            <a:avLst/>
+          </a:prstGeom>
+          <a:noFill/>
+          <a:ln w="0">
+            <a:noFill/>
+            <a:prstDash val="solid"/>
+          </a:ln>
+        </p:spPr>
+        <p:txBody>
+          <a:bodyPr anchor="t"/>
+          <a:lstStyle/>
+          <a:p>
+            <a:pPr algn="l">
+              <a:defRPr sz="1350" b="1">
+                <a:solidFill>
+                  <a:srgbClr val="10213F"/>
+                </a:solidFill>
+              </a:defRPr>
+            </a:pPr>
+            <a:r>
+              <a:rPr sz="1350" b="1">
+                <a:solidFill>
+                  <a:srgbClr val="10213F"/>
+                </a:solidFill>
+              </a:rPr>
+              <a:t>Safety</a:t>
+            </a:r>
+          </a:p>
+        </p:txBody>
+      </p:sp>
+      <p:sp>
+        <p:nvSpPr>
+          <p:cNvPr id="14" name="bb-Safety">
+            <a:extLst>
+              <a:ext uri="{FF2B5EF4-FFF2-40B4-BE49-F238E27FC236}">
+                <a16:creationId xmlns:a16="http://schemas.microsoft.com/office/drawing/2014/main" id="{925623DB-C88D-4E3B-A059-6A576E43A51E}"/>
+              </a:ext>
+            </a:extLst>
+          </p:cNvPr>
+          <p:cNvSpPr>
+            <a:spLocks noGrp="1"/>
+          </p:cNvSpPr>
+          <p:nvPr/>
+        </p:nvSpPr>
+        <p:spPr>
+          <a:xfrm>
+            <a:off x="1276350" y="3971925"/>
+            <a:ext cx="3467100" cy="476250"/>
+          </a:xfrm>
+          <a:prstGeom prst="rect">
+            <a:avLst/>
+          </a:prstGeom>
+          <a:noFill/>
+          <a:ln w="0">
+            <a:noFill/>
+            <a:prstDash val="solid"/>
+          </a:ln>
+        </p:spPr>
+        <p:txBody>
+          <a:bodyPr anchor="t"/>
+          <a:lstStyle/>
+          <a:p>
+            <a:pPr algn="l">
+              <a:defRPr sz="1125" b="0">
+                <a:solidFill>
+                  <a:srgbClr val="64748B"/>
+                </a:solidFill>
+              </a:defRPr>
+            </a:pPr>
+            <a:r>
+              <a:rPr sz="1125" b="0">
+                <a:solidFill>
+                  <a:srgbClr val="64748B"/>
+                </a:solidFill>
+              </a:rPr>
+              <a:t>Self-RAG retry, citations, and refusal.</a:t>
+            </a:r>
+          </a:p>
+        </p:txBody>
+      </p:sp>
+      <p:sp>
+        <p:nvSpPr>
+          <p:cNvPr id="15" name="b-Audit">
+            <a:extLst>
+              <a:ext uri="{FF2B5EF4-FFF2-40B4-BE49-F238E27FC236}">
+                <a16:creationId xmlns:a16="http://schemas.microsoft.com/office/drawing/2014/main" id="{3CCE3320-42D0-438F-AD3C-340B29E2DD64}"/>
+              </a:ext>
+            </a:extLst>
+          </p:cNvPr>
+          <p:cNvSpPr>
+            <a:spLocks noGrp="1"/>
+          </p:cNvSpPr>
+          <p:nvPr/>
+        </p:nvSpPr>
+        <p:spPr>
+          <a:xfrm>
+            <a:off x="1028700" y="4419600"/>
+            <a:ext cx="190500" cy="247650"/>
+          </a:xfrm>
+          <a:prstGeom prst="rect">
+            <a:avLst/>
+          </a:prstGeom>
+          <a:noFill/>
+          <a:ln w="0">
+            <a:noFill/>
+            <a:prstDash val="solid"/>
+          </a:ln>
+        </p:spPr>
+        <p:txBody>
+          <a:bodyPr anchor="t"/>
+          <a:lstStyle/>
+          <a:p>
+            <a:pPr algn="l">
+              <a:defRPr sz="1800" b="1">
+                <a:solidFill>
+                  <a:srgbClr val="3D8DFF"/>
+                </a:solidFill>
+              </a:defRPr>
+            </a:pPr>
+            <a:r>
+              <a:rPr sz="1800" b="1">
+                <a:solidFill>
+                  <a:srgbClr val="3D8DFF"/>
+                </a:solidFill>
+              </a:rPr>
+              <a:t>•</a:t>
+            </a:r>
+          </a:p>
+        </p:txBody>
+      </p:sp>
+      <p:sp>
+        <p:nvSpPr>
+          <p:cNvPr id="16" name="bl-Audit">
+            <a:extLst>
+              <a:ext uri="{FF2B5EF4-FFF2-40B4-BE49-F238E27FC236}">
+                <a16:creationId xmlns:a16="http://schemas.microsoft.com/office/drawing/2014/main" id="{1E64AEE1-CBFC-459A-973B-794F6643E1E4}"/>
+              </a:ext>
+            </a:extLst>
+          </p:cNvPr>
+          <p:cNvSpPr>
+            <a:spLocks noGrp="1"/>
+          </p:cNvSpPr>
+          <p:nvPr/>
+        </p:nvSpPr>
+        <p:spPr>
+          <a:xfrm>
+            <a:off x="1276350" y="4419600"/>
+            <a:ext cx="3467100" cy="238125"/>
+          </a:xfrm>
+          <a:prstGeom prst="rect">
+            <a:avLst/>
+          </a:prstGeom>
+          <a:noFill/>
+          <a:ln w="0">
+            <a:noFill/>
+            <a:prstDash val="solid"/>
+          </a:ln>
+        </p:spPr>
+        <p:txBody>
+          <a:bodyPr anchor="t"/>
+          <a:lstStyle/>
+          <a:p>
+            <a:pPr algn="l">
+              <a:defRPr sz="1350" b="1">
+                <a:solidFill>
+                  <a:srgbClr val="10213F"/>
+                </a:solidFill>
+              </a:defRPr>
+            </a:pPr>
+            <a:r>
+              <a:rPr sz="1350" b="1">
+                <a:solidFill>
+                  <a:srgbClr val="10213F"/>
+                </a:solidFill>
+              </a:rPr>
+              <a:t>Audit</a:t>
+            </a:r>
+          </a:p>
+        </p:txBody>
+      </p:sp>
+      <p:sp>
+        <p:nvSpPr>
+          <p:cNvPr id="17" name="bb-Audit">
+            <a:extLst>
+              <a:ext uri="{FF2B5EF4-FFF2-40B4-BE49-F238E27FC236}">
+                <a16:creationId xmlns:a16="http://schemas.microsoft.com/office/drawing/2014/main" id="{69114B1B-6B53-461D-946A-E64C4A179BC9}"/>
+              </a:ext>
+            </a:extLst>
+          </p:cNvPr>
+          <p:cNvSpPr>
+            <a:spLocks noGrp="1"/>
+          </p:cNvSpPr>
+          <p:nvPr/>
+        </p:nvSpPr>
+        <p:spPr>
+          <a:xfrm>
+            <a:off x="1276350" y="4676775"/>
+            <a:ext cx="3467100" cy="476250"/>
+          </a:xfrm>
+          <a:prstGeom prst="rect">
+            <a:avLst/>
+          </a:prstGeom>
+          <a:noFill/>
+          <a:ln w="0">
+            <a:noFill/>
+            <a:prstDash val="solid"/>
+          </a:ln>
+        </p:spPr>
+        <p:txBody>
+          <a:bodyPr anchor="t"/>
+          <a:lstStyle/>
+          <a:p>
+            <a:pPr algn="l">
+              <a:defRPr sz="1125" b="0">
+                <a:solidFill>
+                  <a:srgbClr val="64748B"/>
+                </a:solidFill>
+              </a:defRPr>
+            </a:pPr>
+            <a:r>
+              <a:rPr sz="1125" b="0">
+                <a:solidFill>
+                  <a:srgbClr val="64748B"/>
+                </a:solidFill>
+              </a:rPr>
+              <a:t>Routing and guardrail unit tests.</a:t>
+            </a:r>
+          </a:p>
+        </p:txBody>
+      </p:sp>
+      <p:sp>
+        <p:nvSpPr>
+          <p:cNvPr id="18" name="roadmap">
+            <a:extLst>
+              <a:ext uri="{FF2B5EF4-FFF2-40B4-BE49-F238E27FC236}">
+                <a16:creationId xmlns:a16="http://schemas.microsoft.com/office/drawing/2014/main" id="{811EEB4F-E2DF-4341-889C-C5F417712754}"/>
+              </a:ext>
+            </a:extLst>
+          </p:cNvPr>
+          <p:cNvSpPr>
+            <a:spLocks noGrp="1"/>
+          </p:cNvSpPr>
+          <p:nvPr/>
+        </p:nvSpPr>
+        <p:spPr>
+          <a:xfrm>
+            <a:off x="6553200" y="2076450"/>
+            <a:ext cx="4953000" cy="3333750"/>
+          </a:xfrm>
+          <a:prstGeom prst="roundRect">
+            <a:avLst>
+              <a:gd name="adj" fmla="val 3429"/>
+            </a:avLst>
+          </a:prstGeom>
+          <a:solidFill>
+            <a:srgbClr val="FFFFFF"/>
+          </a:solidFill>
+          <a:ln w="9525">
+            <a:solidFill>
+              <a:srgbClr val="CBD5E1"/>
+            </a:solidFill>
+            <a:prstDash val="solid"/>
+          </a:ln>
+        </p:spPr>
+      </p:sp>
+      <p:sp>
+        <p:nvSpPr>
+          <p:cNvPr id="19" name="road-h">
+            <a:extLst>
+              <a:ext uri="{FF2B5EF4-FFF2-40B4-BE49-F238E27FC236}">
+                <a16:creationId xmlns:a16="http://schemas.microsoft.com/office/drawing/2014/main" id="{C57C3315-3B3B-40BA-A982-E64939A95F83}"/>
+              </a:ext>
+            </a:extLst>
+          </p:cNvPr>
+          <p:cNvSpPr>
+            <a:spLocks noGrp="1"/>
+          </p:cNvSpPr>
+          <p:nvPr/>
+        </p:nvSpPr>
+        <p:spPr>
+          <a:xfrm>
+            <a:off x="6896100" y="2400300"/>
+            <a:ext cx="2857500" cy="342900"/>
+          </a:xfrm>
+          <a:prstGeom prst="rect">
+            <a:avLst/>
+          </a:prstGeom>
+          <a:noFill/>
+          <a:ln w="0">
+            <a:noFill/>
+            <a:prstDash val="solid"/>
+          </a:ln>
+        </p:spPr>
+        <p:txBody>
+          <a:bodyPr anchor="t"/>
+          <a:lstStyle/>
+          <a:p>
+            <a:pPr algn="l">
+              <a:defRPr sz="2100" b="1">
+                <a:solidFill>
+                  <a:srgbClr val="3D8DFF"/>
+                </a:solidFill>
+              </a:defRPr>
+            </a:pPr>
+            <a:r>
+              <a:rPr sz="2100" b="1">
+                <a:solidFill>
+                  <a:srgbClr val="3D8DFF"/>
+                </a:solidFill>
+              </a:rPr>
+              <a:t>Next milestones</a:t>
+            </a:r>
+          </a:p>
+        </p:txBody>
+      </p:sp>
+      <p:sp>
+        <p:nvSpPr>
+          <p:cNvPr id="20" name="b-Vision">
+            <a:extLst>
+              <a:ext uri="{FF2B5EF4-FFF2-40B4-BE49-F238E27FC236}">
+                <a16:creationId xmlns:a16="http://schemas.microsoft.com/office/drawing/2014/main" id="{B8C83F93-3A0F-46E6-ADBC-5F99E9990E17}"/>
+              </a:ext>
+            </a:extLst>
+          </p:cNvPr>
+          <p:cNvSpPr>
+            <a:spLocks noGrp="1"/>
+          </p:cNvSpPr>
+          <p:nvPr/>
+        </p:nvSpPr>
+        <p:spPr>
+          <a:xfrm>
+            <a:off x="6896100" y="3009900"/>
+            <a:ext cx="190500" cy="247650"/>
+          </a:xfrm>
+          <a:prstGeom prst="rect">
+            <a:avLst/>
+          </a:prstGeom>
+          <a:noFill/>
+          <a:ln w="0">
+            <a:noFill/>
+            <a:prstDash val="solid"/>
+          </a:ln>
+        </p:spPr>
+        <p:txBody>
+          <a:bodyPr anchor="t"/>
+          <a:lstStyle/>
+          <a:p>
+            <a:pPr algn="l">
+              <a:defRPr sz="1800" b="1">
+                <a:solidFill>
+                  <a:srgbClr val="3D8DFF"/>
+                </a:solidFill>
+              </a:defRPr>
+            </a:pPr>
+            <a:r>
+              <a:rPr sz="1800" b="1">
+                <a:solidFill>
+                  <a:srgbClr val="3D8DFF"/>
+                </a:solidFill>
+              </a:rPr>
+              <a:t>•</a:t>
+            </a:r>
+          </a:p>
+        </p:txBody>
+      </p:sp>
+      <p:sp>
+        <p:nvSpPr>
+          <p:cNvPr id="21" name="bl-Vision">
+            <a:extLst>
+              <a:ext uri="{FF2B5EF4-FFF2-40B4-BE49-F238E27FC236}">
+                <a16:creationId xmlns:a16="http://schemas.microsoft.com/office/drawing/2014/main" id="{7508921B-5565-4F41-AC8E-32F815974422}"/>
+              </a:ext>
+            </a:extLst>
+          </p:cNvPr>
+          <p:cNvSpPr>
+            <a:spLocks noGrp="1"/>
+          </p:cNvSpPr>
+          <p:nvPr/>
+        </p:nvSpPr>
+        <p:spPr>
+          <a:xfrm>
+            <a:off x="7143750" y="3009900"/>
+            <a:ext cx="3467100" cy="238125"/>
+          </a:xfrm>
+          <a:prstGeom prst="rect">
+            <a:avLst/>
+          </a:prstGeom>
+          <a:noFill/>
+          <a:ln w="0">
+            <a:noFill/>
+            <a:prstDash val="solid"/>
+          </a:ln>
+        </p:spPr>
+        <p:txBody>
+          <a:bodyPr anchor="t"/>
+          <a:lstStyle/>
+          <a:p>
+            <a:pPr algn="l">
+              <a:defRPr sz="1350" b="1">
+                <a:solidFill>
+                  <a:srgbClr val="10213F"/>
+                </a:solidFill>
+              </a:defRPr>
+            </a:pPr>
+            <a:r>
+              <a:rPr sz="1350" b="1">
+                <a:solidFill>
+                  <a:srgbClr val="10213F"/>
+                </a:solidFill>
+              </a:rPr>
+              <a:t>Vision</a:t>
+            </a:r>
+          </a:p>
+        </p:txBody>
+      </p:sp>
+      <p:sp>
+        <p:nvSpPr>
+          <p:cNvPr id="22" name="bb-Vision">
+            <a:extLst>
+              <a:ext uri="{FF2B5EF4-FFF2-40B4-BE49-F238E27FC236}">
+                <a16:creationId xmlns:a16="http://schemas.microsoft.com/office/drawing/2014/main" id="{9ECBB8F7-61CC-49CF-BDEE-964510A5C84D}"/>
+              </a:ext>
+            </a:extLst>
+          </p:cNvPr>
+          <p:cNvSpPr>
+            <a:spLocks noGrp="1"/>
+          </p:cNvSpPr>
+          <p:nvPr/>
+        </p:nvSpPr>
+        <p:spPr>
+          <a:xfrm>
+            <a:off x="7143750" y="3267075"/>
+            <a:ext cx="3467100" cy="476250"/>
+          </a:xfrm>
+          <a:prstGeom prst="rect">
+            <a:avLst/>
+          </a:prstGeom>
+          <a:noFill/>
+          <a:ln w="0">
+            <a:noFill/>
+            <a:prstDash val="solid"/>
+          </a:ln>
+        </p:spPr>
+        <p:txBody>
+          <a:bodyPr anchor="t"/>
+          <a:lstStyle/>
+          <a:p>
+            <a:pPr algn="l">
+              <a:defRPr sz="1125" b="0">
+                <a:solidFill>
+                  <a:srgbClr val="64748B"/>
+                </a:solidFill>
+              </a:defRPr>
+            </a:pPr>
+            <a:r>
+              <a:rPr sz="1125" b="0">
+                <a:solidFill>
+                  <a:srgbClr val="64748B"/>
+                </a:solidFill>
+              </a:rPr>
+              <a:t>Dedicated VLM route for charts and figures.</a:t>
+            </a:r>
+          </a:p>
+        </p:txBody>
+      </p:sp>
+      <p:sp>
+        <p:nvSpPr>
+          <p:cNvPr id="23" name="b-Embeddings">
+            <a:extLst>
+              <a:ext uri="{FF2B5EF4-FFF2-40B4-BE49-F238E27FC236}">
+                <a16:creationId xmlns:a16="http://schemas.microsoft.com/office/drawing/2014/main" id="{286F1127-C09D-433F-ACD9-17188838D13B}"/>
+              </a:ext>
+            </a:extLst>
+          </p:cNvPr>
+          <p:cNvSpPr>
+            <a:spLocks noGrp="1"/>
+          </p:cNvSpPr>
+          <p:nvPr/>
+        </p:nvSpPr>
+        <p:spPr>
+          <a:xfrm>
+            <a:off x="6896100" y="3714750"/>
+            <a:ext cx="190500" cy="247650"/>
+          </a:xfrm>
+          <a:prstGeom prst="rect">
+            <a:avLst/>
+          </a:prstGeom>
+          <a:noFill/>
+          <a:ln w="0">
+            <a:noFill/>
+            <a:prstDash val="solid"/>
+          </a:ln>
+        </p:spPr>
+        <p:txBody>
+          <a:bodyPr anchor="t"/>
+          <a:lstStyle/>
+          <a:p>
+            <a:pPr algn="l">
+              <a:defRPr sz="1800" b="1">
+                <a:solidFill>
+                  <a:srgbClr val="3D8DFF"/>
+                </a:solidFill>
+              </a:defRPr>
+            </a:pPr>
+            <a:r>
+              <a:rPr sz="1800" b="1">
+                <a:solidFill>
+                  <a:srgbClr val="3D8DFF"/>
+                </a:solidFill>
+              </a:rPr>
+              <a:t>•</a:t>
+            </a:r>
+          </a:p>
+        </p:txBody>
+      </p:sp>
+      <p:sp>
+        <p:nvSpPr>
+          <p:cNvPr id="24" name="bl-Embeddings">
+            <a:extLst>
+              <a:ext uri="{FF2B5EF4-FFF2-40B4-BE49-F238E27FC236}">
+                <a16:creationId xmlns:a16="http://schemas.microsoft.com/office/drawing/2014/main" id="{ECB38178-4BAE-400D-A9A5-978401176FA4}"/>
+              </a:ext>
+            </a:extLst>
+          </p:cNvPr>
+          <p:cNvSpPr>
+            <a:spLocks noGrp="1"/>
+          </p:cNvSpPr>
+          <p:nvPr/>
+        </p:nvSpPr>
+        <p:spPr>
+          <a:xfrm>
+            <a:off x="7143750" y="3714750"/>
+            <a:ext cx="3467100" cy="238125"/>
+          </a:xfrm>
+          <a:prstGeom prst="rect">
+            <a:avLst/>
+          </a:prstGeom>
+          <a:noFill/>
+          <a:ln w="0">
+            <a:noFill/>
+            <a:prstDash val="solid"/>
+          </a:ln>
+        </p:spPr>
+        <p:txBody>
+          <a:bodyPr anchor="t"/>
+          <a:lstStyle/>
+          <a:p>
+            <a:pPr algn="l">
+              <a:defRPr sz="1350" b="1">
+                <a:solidFill>
+                  <a:srgbClr val="10213F"/>
+                </a:solidFill>
+              </a:defRPr>
+            </a:pPr>
+            <a:r>
+              <a:rPr sz="1350" b="1">
+                <a:solidFill>
+                  <a:srgbClr val="10213F"/>
+                </a:solidFill>
+              </a:rPr>
+              <a:t>Embeddings</a:t>
+            </a:r>
+          </a:p>
+        </p:txBody>
+      </p:sp>
+      <p:sp>
+        <p:nvSpPr>
+          <p:cNvPr id="25" name="bb-Embeddings">
+            <a:extLst>
+              <a:ext uri="{FF2B5EF4-FFF2-40B4-BE49-F238E27FC236}">
+                <a16:creationId xmlns:a16="http://schemas.microsoft.com/office/drawing/2014/main" id="{EBB9662D-5E2F-4F6E-BFCF-7ED34ECEFA8D}"/>
+              </a:ext>
+            </a:extLst>
+          </p:cNvPr>
+          <p:cNvSpPr>
+            <a:spLocks noGrp="1"/>
+          </p:cNvSpPr>
+          <p:nvPr/>
+        </p:nvSpPr>
+        <p:spPr>
+          <a:xfrm>
+            <a:off x="7143750" y="3971925"/>
+            <a:ext cx="3467100" cy="476250"/>
+          </a:xfrm>
+          <a:prstGeom prst="rect">
+            <a:avLst/>
+          </a:prstGeom>
+          <a:noFill/>
+          <a:ln w="0">
+            <a:noFill/>
+            <a:prstDash val="solid"/>
+          </a:ln>
+        </p:spPr>
+        <p:txBody>
+          <a:bodyPr anchor="t"/>
+          <a:lstStyle/>
+          <a:p>
+            <a:pPr algn="l">
+              <a:defRPr sz="1125" b="0">
+                <a:solidFill>
+                  <a:srgbClr val="64748B"/>
+                </a:solidFill>
+              </a:defRPr>
+            </a:pPr>
+            <a:r>
+              <a:rPr sz="1125" b="0">
+                <a:solidFill>
+                  <a:srgbClr val="64748B"/>
+                </a:solidFill>
+              </a:rPr>
+              <a:t>Image embeddings for true multi-modal retrieval.</a:t>
+            </a:r>
+          </a:p>
+        </p:txBody>
+      </p:sp>
+      <p:sp>
+        <p:nvSpPr>
+          <p:cNvPr id="26" name="b-Observe">
+            <a:extLst>
+              <a:ext uri="{FF2B5EF4-FFF2-40B4-BE49-F238E27FC236}">
+                <a16:creationId xmlns:a16="http://schemas.microsoft.com/office/drawing/2014/main" id="{014D7B5F-805C-4D7F-BED9-B3B590717AD6}"/>
+              </a:ext>
+            </a:extLst>
+          </p:cNvPr>
+          <p:cNvSpPr>
+            <a:spLocks noGrp="1"/>
+          </p:cNvSpPr>
+          <p:nvPr/>
+        </p:nvSpPr>
+        <p:spPr>
+          <a:xfrm>
+            <a:off x="6896100" y="4419600"/>
+            <a:ext cx="190500" cy="247650"/>
+          </a:xfrm>
+          <a:prstGeom prst="rect">
+            <a:avLst/>
+          </a:prstGeom>
+          <a:noFill/>
+          <a:ln w="0">
+            <a:noFill/>
+            <a:prstDash val="solid"/>
+          </a:ln>
+        </p:spPr>
+        <p:txBody>
+          <a:bodyPr anchor="t"/>
+          <a:lstStyle/>
+          <a:p>
+            <a:pPr algn="l">
+              <a:defRPr sz="1800" b="1">
+                <a:solidFill>
+                  <a:srgbClr val="3D8DFF"/>
+                </a:solidFill>
+              </a:defRPr>
+            </a:pPr>
+            <a:r>
+              <a:rPr sz="1800" b="1">
+                <a:solidFill>
+                  <a:srgbClr val="3D8DFF"/>
+                </a:solidFill>
+              </a:rPr>
+              <a:t>•</a:t>
+            </a:r>
+          </a:p>
+        </p:txBody>
+      </p:sp>
+      <p:sp>
+        <p:nvSpPr>
+          <p:cNvPr id="27" name="bl-Observe">
+            <a:extLst>
+              <a:ext uri="{FF2B5EF4-FFF2-40B4-BE49-F238E27FC236}">
+                <a16:creationId xmlns:a16="http://schemas.microsoft.com/office/drawing/2014/main" id="{5B86EBF1-C701-4966-B1F9-C978B332AA49}"/>
+              </a:ext>
+            </a:extLst>
+          </p:cNvPr>
+          <p:cNvSpPr>
+            <a:spLocks noGrp="1"/>
+          </p:cNvSpPr>
+          <p:nvPr/>
+        </p:nvSpPr>
+        <p:spPr>
+          <a:xfrm>
+            <a:off x="7143750" y="4419600"/>
+            <a:ext cx="3467100" cy="238125"/>
+          </a:xfrm>
+          <a:prstGeom prst="rect">
+            <a:avLst/>
+          </a:prstGeom>
+          <a:noFill/>
+          <a:ln w="0">
+            <a:noFill/>
+            <a:prstDash val="solid"/>
+          </a:ln>
+        </p:spPr>
+        <p:txBody>
+          <a:bodyPr anchor="t"/>
+          <a:lstStyle/>
+          <a:p>
+            <a:pPr algn="l">
+              <a:defRPr sz="1350" b="1">
+                <a:solidFill>
+                  <a:srgbClr val="10213F"/>
+                </a:solidFill>
+              </a:defRPr>
+            </a:pPr>
+            <a:r>
+              <a:rPr sz="1350" b="1">
+                <a:solidFill>
+                  <a:srgbClr val="10213F"/>
+                </a:solidFill>
+              </a:rPr>
+              <a:t>Observe</a:t>
+            </a:r>
+          </a:p>
+        </p:txBody>
+      </p:sp>
+      <p:sp>
+        <p:nvSpPr>
+          <p:cNvPr id="28" name="bb-Observe">
+            <a:extLst>
+              <a:ext uri="{FF2B5EF4-FFF2-40B4-BE49-F238E27FC236}">
+                <a16:creationId xmlns:a16="http://schemas.microsoft.com/office/drawing/2014/main" id="{F9981493-F3A2-475D-A04C-CD64A9B89685}"/>
+              </a:ext>
+            </a:extLst>
+          </p:cNvPr>
+          <p:cNvSpPr>
+            <a:spLocks noGrp="1"/>
+          </p:cNvSpPr>
+          <p:nvPr/>
+        </p:nvSpPr>
+        <p:spPr>
+          <a:xfrm>
+            <a:off x="7143750" y="4676775"/>
+            <a:ext cx="3467100" cy="476250"/>
+          </a:xfrm>
+          <a:prstGeom prst="rect">
+            <a:avLst/>
+          </a:prstGeom>
+          <a:noFill/>
+          <a:ln w="0">
+            <a:noFill/>
+            <a:prstDash val="solid"/>
+          </a:ln>
+        </p:spPr>
+        <p:txBody>
+          <a:bodyPr anchor="t"/>
+          <a:lstStyle/>
+          <a:p>
+            <a:pPr algn="l">
+              <a:defRPr sz="1125" b="0">
+                <a:solidFill>
+                  <a:srgbClr val="64748B"/>
+                </a:solidFill>
+              </a:defRPr>
+            </a:pPr>
+            <a:r>
+              <a:rPr sz="1125" b="0">
+                <a:solidFill>
+                  <a:srgbClr val="64748B"/>
+                </a:solidFill>
+              </a:rPr>
+              <a:t>Langfuse + NeMo Guardrails evaluation layer.</a:t>
+            </a:r>
+          </a:p>
+        </p:txBody>
+      </p:sp>
+    </p:spTree>
+    <p:extLst>
+      <p:ext uri="{BB962C8B-B14F-4D97-AF65-F5344CB8AC3E}">
+        <p14:creationId xmlns:p14="http://schemas.microsoft.com/office/powerpoint/2010/main" val="1718776872"/>
+      </p:ext>
+    </p:extLst>
+  </p:cSld>
+  <p:clrMapOvr>
+    <a:masterClrMapping/>
+  </p:clrMapOvr>
+</p:sld>
+</file>
+
+<file path=ppt/slides/slide12.xml><?xml version="1.0" encoding="utf-8"?>
+<p:sld xmlns:a="http://schemas.openxmlformats.org/drawingml/2006/main" xmlns:r="http://schemas.openxmlformats.org/officeDocument/2006/relationships" xmlns:p="http://schemas.openxmlformats.org/presentationml/2006/main">
+  <p:cSld>
+    <p:bg>
+      <p:bgPr>
+        <a:solidFill>
+          <a:srgbClr val="FFFFFF"/>
+        </a:solidFill>
+        <a:effectLst/>
+      </p:bgPr>
+    </p:bg>
+    <p:spTree>
+      <p:nvGrpSpPr>
+        <p:cNvPr id="1" name=""/>
+        <p:cNvGrpSpPr/>
+        <p:nvPr/>
+      </p:nvGrpSpPr>
+      <p:grpSpPr>
+        <a:xfrm>
+          <a:off x="0" y="0"/>
+          <a:ext cx="0" cy="0"/>
+          <a:chOff x="0" y="0"/>
+          <a:chExt cx="0" cy="0"/>
+        </a:xfrm>
+      </p:grpSpPr>
+      <p:sp>
+        <p:nvSpPr>
           <p:cNvPr id="11" name="close-kicker">
             <a:extLst>
               <a:ext uri="{FF2B5EF4-FFF2-40B4-BE49-F238E27FC236}">
@@ -6284,14 +8627,6 @@
 <file path=ppt/slides/slide6.xml><?xml version="1.0" encoding="utf-8"?>
 <p:sld xmlns:a="http://schemas.openxmlformats.org/drawingml/2006/main" xmlns:r="http://schemas.openxmlformats.org/officeDocument/2006/relationships" xmlns:p="http://schemas.openxmlformats.org/presentationml/2006/main">
   <p:cSld>
-    <p:bg>
-      <p:bgPr>
-        <a:solidFill>
-          <a:srgbClr val="FFFFFF"/>
-        </a:solidFill>
-        <a:effectLst/>
-      </p:bgPr>
-    </p:bg>
     <p:spTree>
       <p:nvGrpSpPr>
         <p:cNvPr id="1" name=""/>
@@ -6308,725 +8643,73 @@
       </p:grpSpPr>
       <p:sp>
         <p:nvSpPr>
-          <p:cNvPr id="15" name="eyebrow">
-            <a:extLst>
-              <a:ext uri="{FF2B5EF4-FFF2-40B4-BE49-F238E27FC236}">
-                <a16:creationId xmlns:a16="http://schemas.microsoft.com/office/drawing/2014/main" id="{A8E9A7DD-693B-4FE7-8C00-670791499E78}"/>
-              </a:ext>
-            </a:extLst>
-          </p:cNvPr>
-          <p:cNvSpPr>
-            <a:spLocks noGrp="1"/>
-          </p:cNvSpPr>
-          <p:nvPr/>
-        </p:nvSpPr>
-        <p:spPr>
-          <a:xfrm>
-            <a:off x="685800" y="419100"/>
-            <a:ext cx="3619500" cy="190500"/>
-          </a:xfrm>
-          <a:prstGeom prst="rect">
-            <a:avLst/>
-          </a:prstGeom>
-          <a:noFill/>
-          <a:ln w="0">
-            <a:noFill/>
-            <a:prstDash val="solid"/>
-          </a:ln>
-        </p:spPr>
-        <p:txBody>
-          <a:bodyPr anchor="t"/>
-          <a:lstStyle/>
-          <a:p>
-            <a:pPr algn="l">
-              <a:defRPr sz="900" b="1">
-                <a:solidFill>
-                  <a:srgbClr val="0E7490"/>
-                </a:solidFill>
-              </a:defRPr>
-            </a:pPr>
-            <a:r>
-              <a:rPr sz="900" b="1">
-                <a:solidFill>
-                  <a:srgbClr val="0E7490"/>
-                </a:solidFill>
-              </a:rPr>
-              <a:t>SELF-CORRECTION LOOP</a:t>
-            </a:r>
-          </a:p>
-        </p:txBody>
-      </p:sp>
-      <p:sp>
-        <p:nvSpPr>
-          <p:cNvPr id="2" name="title">
-            <a:extLst>
-              <a:ext uri="{FF2B5EF4-FFF2-40B4-BE49-F238E27FC236}">
-                <a16:creationId xmlns:a16="http://schemas.microsoft.com/office/drawing/2014/main" id="{E41B7DF7-C889-438A-8FEA-862D7F2EDB41}"/>
-              </a:ext>
-            </a:extLst>
-          </p:cNvPr>
-          <p:cNvSpPr>
-            <a:spLocks noGrp="1"/>
-          </p:cNvSpPr>
-          <p:nvPr/>
-        </p:nvSpPr>
-        <p:spPr>
-          <a:xfrm>
-            <a:off x="685800" y="762000"/>
-            <a:ext cx="10001250" cy="514350"/>
-          </a:xfrm>
-          <a:prstGeom prst="rect">
-            <a:avLst/>
-          </a:prstGeom>
-          <a:noFill/>
-          <a:ln w="0">
-            <a:noFill/>
-            <a:prstDash val="solid"/>
-          </a:ln>
-        </p:spPr>
-        <p:txBody>
-          <a:bodyPr anchor="t"/>
-          <a:lstStyle/>
-          <a:p>
-            <a:pPr algn="l">
-              <a:defRPr sz="2550" b="1">
-                <a:solidFill>
-                  <a:srgbClr val="10213F"/>
-                </a:solidFill>
-              </a:defRPr>
-            </a:pPr>
-            <a:r>
-              <a:rPr sz="2550" b="1">
-                <a:solidFill>
-                  <a:srgbClr val="10213F"/>
-                </a:solidFill>
-              </a:rPr>
-              <a:t>Weak retrieval is corrected before the system answers</a:t>
-            </a:r>
-          </a:p>
-        </p:txBody>
-      </p:sp>
-      <p:sp>
-        <p:nvSpPr>
-          <p:cNvPr id="3" name="subtitle">
-            <a:extLst>
-              <a:ext uri="{FF2B5EF4-FFF2-40B4-BE49-F238E27FC236}">
-                <a16:creationId xmlns:a16="http://schemas.microsoft.com/office/drawing/2014/main" id="{E7D27117-C2B0-4510-A0BE-1927AF97F3A9}"/>
-              </a:ext>
-            </a:extLst>
-          </p:cNvPr>
-          <p:cNvSpPr>
-            <a:spLocks noGrp="1"/>
-          </p:cNvSpPr>
-          <p:nvPr/>
-        </p:nvSpPr>
-        <p:spPr>
-          <a:xfrm>
-            <a:off x="685800" y="1333500"/>
-            <a:ext cx="9715500" cy="323850"/>
-          </a:xfrm>
-          <a:prstGeom prst="rect">
-            <a:avLst/>
-          </a:prstGeom>
-          <a:noFill/>
-          <a:ln w="0">
-            <a:noFill/>
-            <a:prstDash val="solid"/>
-          </a:ln>
-        </p:spPr>
-        <p:txBody>
-          <a:bodyPr anchor="t"/>
-          <a:lstStyle/>
-          <a:p>
-            <a:pPr algn="l">
-              <a:defRPr sz="1275" b="0">
-                <a:solidFill>
-                  <a:srgbClr val="64748B"/>
-                </a:solidFill>
-              </a:defRPr>
-            </a:pPr>
-            <a:r>
-              <a:rPr sz="1275" b="0">
-                <a:solidFill>
-                  <a:srgbClr val="64748B"/>
-                </a:solidFill>
-              </a:rPr>
-              <a:t>The system retries once with a narrower query, then refuses unsupported responses.</a:t>
-            </a:r>
-          </a:p>
-        </p:txBody>
-      </p:sp>
-      <p:sp>
-        <p:nvSpPr>
-          <p:cNvPr id="4" name="Straight Connector 3">
-            <a:extLst>
-              <a:ext uri="{FF2B5EF4-FFF2-40B4-BE49-F238E27FC236}">
-                <a16:creationId xmlns:a16="http://schemas.microsoft.com/office/drawing/2014/main" id="{481A180C-A067-4E3D-B73A-FB98194054BC}"/>
-              </a:ext>
-            </a:extLst>
-          </p:cNvPr>
-          <p:cNvSpPr>
-            <a:spLocks noGrp="1"/>
-          </p:cNvSpPr>
-          <p:nvPr/>
-        </p:nvSpPr>
-        <p:spPr>
-          <a:xfrm>
-            <a:off x="685800" y="6429375"/>
-            <a:ext cx="10820400" cy="0"/>
-          </a:xfrm>
-          <a:prstGeom prst="line">
-            <a:avLst/>
-          </a:prstGeom>
-          <a:ln w="9525">
-            <a:solidFill>
-              <a:srgbClr val="CBD5E1"/>
-            </a:solidFill>
-            <a:prstDash val="solid"/>
-          </a:ln>
-        </p:spPr>
-      </p:sp>
-      <p:sp>
-        <p:nvSpPr>
-          <p:cNvPr id="5" name="footer">
-            <a:extLst>
-              <a:ext uri="{FF2B5EF4-FFF2-40B4-BE49-F238E27FC236}">
-                <a16:creationId xmlns:a16="http://schemas.microsoft.com/office/drawing/2014/main" id="{38B06DC5-B4DB-4B42-B5A3-6F7287D31748}"/>
-              </a:ext>
-            </a:extLst>
-          </p:cNvPr>
-          <p:cNvSpPr>
-            <a:spLocks noGrp="1"/>
-          </p:cNvSpPr>
-          <p:nvPr/>
-        </p:nvSpPr>
-        <p:spPr>
-          <a:xfrm>
-            <a:off x="685800" y="6543675"/>
-            <a:ext cx="3429000" cy="171450"/>
-          </a:xfrm>
-          <a:prstGeom prst="rect">
-            <a:avLst/>
-          </a:prstGeom>
-          <a:noFill/>
-          <a:ln w="0">
-            <a:noFill/>
-            <a:prstDash val="solid"/>
-          </a:ln>
-        </p:spPr>
-        <p:txBody>
-          <a:bodyPr anchor="t"/>
-          <a:lstStyle/>
-          <a:p>
-            <a:pPr algn="l">
-              <a:defRPr sz="750" b="1">
-                <a:solidFill>
-                  <a:srgbClr val="64748B"/>
-                </a:solidFill>
-              </a:defRPr>
-            </a:pPr>
-            <a:r>
-              <a:rPr sz="750" b="1">
-                <a:solidFill>
-                  <a:srgbClr val="64748B"/>
-                </a:solidFill>
-              </a:rPr>
-              <a:t>AXLERO SOLUTIONS | OMNIBRAIN</a:t>
-            </a:r>
-          </a:p>
-        </p:txBody>
-      </p:sp>
-      <p:sp>
-        <p:nvSpPr>
-          <p:cNvPr id="6" name="slide-num">
-            <a:extLst>
-              <a:ext uri="{FF2B5EF4-FFF2-40B4-BE49-F238E27FC236}">
-                <a16:creationId xmlns:a16="http://schemas.microsoft.com/office/drawing/2014/main" id="{A9522A38-BABA-49F6-BA2C-3A0EEB5C1F2D}"/>
-              </a:ext>
-            </a:extLst>
-          </p:cNvPr>
-          <p:cNvSpPr>
-            <a:spLocks noGrp="1"/>
-          </p:cNvSpPr>
-          <p:nvPr/>
-        </p:nvSpPr>
-        <p:spPr>
-          <a:xfrm>
-            <a:off x="10858500" y="6543675"/>
-            <a:ext cx="647700" cy="171450"/>
-          </a:xfrm>
-          <a:prstGeom prst="rect">
-            <a:avLst/>
-          </a:prstGeom>
-          <a:noFill/>
-          <a:ln w="0">
-            <a:noFill/>
-            <a:prstDash val="solid"/>
-          </a:ln>
-        </p:spPr>
-        <p:txBody>
-          <a:bodyPr anchor="t"/>
-          <a:lstStyle/>
-          <a:p>
-            <a:pPr algn="r">
-              <a:defRPr sz="750" b="1">
-                <a:solidFill>
-                  <a:srgbClr val="64748B"/>
-                </a:solidFill>
-              </a:defRPr>
-            </a:pPr>
-            <a:r>
-              <a:rPr sz="750" b="1">
-                <a:solidFill>
-                  <a:srgbClr val="64748B"/>
-                </a:solidFill>
-              </a:rPr>
-              <a:t>06</a:t>
-            </a:r>
-          </a:p>
-        </p:txBody>
-      </p:sp>
-      <p:sp>
-        <p:nvSpPr>
-          <p:cNvPr id="7" name="retrieve">
-            <a:extLst>
-              <a:ext uri="{FF2B5EF4-FFF2-40B4-BE49-F238E27FC236}">
-                <a16:creationId xmlns:a16="http://schemas.microsoft.com/office/drawing/2014/main" id="{64514E80-C494-49BB-9A12-CD317269FEA1}"/>
-              </a:ext>
-            </a:extLst>
-          </p:cNvPr>
-          <p:cNvSpPr>
-            <a:spLocks noGrp="1"/>
-          </p:cNvSpPr>
-          <p:nvPr/>
-        </p:nvSpPr>
-        <p:spPr>
-          <a:xfrm>
-            <a:off x="742950" y="2571750"/>
-            <a:ext cx="2000250" cy="1047750"/>
-          </a:xfrm>
-          <a:prstGeom prst="roundRect">
-            <a:avLst>
-              <a:gd name="adj" fmla="val 10909"/>
-            </a:avLst>
-          </a:prstGeom>
-          <a:solidFill>
-            <a:srgbClr val="F6F9FC"/>
-          </a:solidFill>
-          <a:ln w="9525">
-            <a:solidFill>
-              <a:srgbClr val="CBD5E1"/>
-            </a:solidFill>
-            <a:prstDash val="solid"/>
-          </a:ln>
-        </p:spPr>
-        <p:txBody>
-          <a:bodyPr anchor="ctr"/>
-          <a:lstStyle/>
-          <a:p>
-            <a:pPr algn="ctr">
-              <a:defRPr sz="1500" b="1">
-                <a:solidFill>
-                  <a:srgbClr val="10213F"/>
-                </a:solidFill>
-              </a:defRPr>
-            </a:pPr>
-            <a:r>
-              <a:rPr sz="1500" b="1">
-                <a:solidFill>
-                  <a:srgbClr val="10213F"/>
-                </a:solidFill>
-              </a:rPr>
-              <a:t>1. Retrieve</a:t>
-            </a:r>
-          </a:p>
-          <a:p>
-            <a:pPr algn="ctr">
-              <a:defRPr sz="1500" b="1">
-                <a:solidFill>
-                  <a:srgbClr val="10213F"/>
-                </a:solidFill>
-              </a:defRPr>
-            </a:pPr>
-            <a:r>
-              <a:rPr sz="1500" b="1">
-                <a:solidFill>
-                  <a:srgbClr val="10213F"/>
-                </a:solidFill>
-              </a:rPr>
-              <a:t>semantic chunks</a:t>
-            </a:r>
-          </a:p>
-        </p:txBody>
-      </p:sp>
-      <p:sp>
-        <p:nvSpPr>
-          <p:cNvPr id="8" name="score">
-            <a:extLst>
-              <a:ext uri="{FF2B5EF4-FFF2-40B4-BE49-F238E27FC236}">
-                <a16:creationId xmlns:a16="http://schemas.microsoft.com/office/drawing/2014/main" id="{71AB2FC0-7F3D-4558-B9F1-2A306FEAD10D}"/>
-              </a:ext>
-            </a:extLst>
-          </p:cNvPr>
-          <p:cNvSpPr>
-            <a:spLocks noGrp="1"/>
-          </p:cNvSpPr>
-          <p:nvPr/>
-        </p:nvSpPr>
-        <p:spPr>
-          <a:xfrm>
-            <a:off x="3429000" y="2571750"/>
-            <a:ext cx="2000250" cy="1047750"/>
-          </a:xfrm>
-          <a:prstGeom prst="roundRect">
-            <a:avLst>
-              <a:gd name="adj" fmla="val 10909"/>
-            </a:avLst>
-          </a:prstGeom>
-          <a:solidFill>
-            <a:srgbClr val="FFFFFF"/>
-          </a:solidFill>
-          <a:ln w="9525">
-            <a:solidFill>
-              <a:srgbClr val="3D8DFF"/>
-            </a:solidFill>
-            <a:prstDash val="solid"/>
-          </a:ln>
-        </p:spPr>
-        <p:txBody>
-          <a:bodyPr anchor="ctr"/>
-          <a:lstStyle/>
-          <a:p>
-            <a:pPr algn="ctr">
-              <a:defRPr sz="1500" b="1">
-                <a:solidFill>
-                  <a:srgbClr val="10213F"/>
-                </a:solidFill>
-              </a:defRPr>
-            </a:pPr>
-            <a:r>
-              <a:rPr sz="1500" b="1">
-                <a:solidFill>
-                  <a:srgbClr val="10213F"/>
-                </a:solidFill>
-              </a:rPr>
-              <a:t>2. Check</a:t>
-            </a:r>
-          </a:p>
-          <a:p>
-            <a:pPr algn="ctr">
-              <a:defRPr sz="1500" b="1">
-                <a:solidFill>
-                  <a:srgbClr val="10213F"/>
-                </a:solidFill>
-              </a:defRPr>
-            </a:pPr>
-            <a:r>
-              <a:rPr sz="1500" b="1">
-                <a:solidFill>
-                  <a:srgbClr val="10213F"/>
-                </a:solidFill>
-              </a:rPr>
-              <a:t>relevance score</a:t>
-            </a:r>
-          </a:p>
-        </p:txBody>
-      </p:sp>
-      <p:sp>
-        <p:nvSpPr>
-          <p:cNvPr id="9" name="rewrite">
-            <a:extLst>
-              <a:ext uri="{FF2B5EF4-FFF2-40B4-BE49-F238E27FC236}">
-                <a16:creationId xmlns:a16="http://schemas.microsoft.com/office/drawing/2014/main" id="{96162676-2300-490C-A4EF-2B3BBD5699A9}"/>
-              </a:ext>
-            </a:extLst>
-          </p:cNvPr>
-          <p:cNvSpPr>
-            <a:spLocks noGrp="1"/>
-          </p:cNvSpPr>
-          <p:nvPr/>
-        </p:nvSpPr>
-        <p:spPr>
-          <a:xfrm>
-            <a:off x="6115050" y="2571750"/>
-            <a:ext cx="2000250" cy="1047750"/>
-          </a:xfrm>
-          <a:prstGeom prst="roundRect">
-            <a:avLst>
-              <a:gd name="adj" fmla="val 10909"/>
-            </a:avLst>
-          </a:prstGeom>
-          <a:solidFill>
-            <a:srgbClr val="F6F9FC"/>
-          </a:solidFill>
-          <a:ln w="9525">
-            <a:solidFill>
-              <a:srgbClr val="CBD5E1"/>
-            </a:solidFill>
-            <a:prstDash val="solid"/>
-          </a:ln>
-        </p:spPr>
-        <p:txBody>
-          <a:bodyPr anchor="ctr"/>
-          <a:lstStyle/>
-          <a:p>
-            <a:pPr algn="ctr">
-              <a:defRPr sz="1500" b="1">
-                <a:solidFill>
-                  <a:srgbClr val="10213F"/>
-                </a:solidFill>
-              </a:defRPr>
-            </a:pPr>
-            <a:r>
-              <a:rPr sz="1500" b="1">
-                <a:solidFill>
-                  <a:srgbClr val="10213F"/>
-                </a:solidFill>
-              </a:rPr>
-              <a:t>3. Rewrite query</a:t>
-            </a:r>
-          </a:p>
-          <a:p>
-            <a:pPr algn="ctr">
-              <a:defRPr sz="1500" b="1">
-                <a:solidFill>
-                  <a:srgbClr val="10213F"/>
-                </a:solidFill>
-              </a:defRPr>
-            </a:pPr>
-            <a:r>
-              <a:rPr sz="1500" b="1">
-                <a:solidFill>
-                  <a:srgbClr val="10213F"/>
-                </a:solidFill>
-              </a:rPr>
-              <a:t>if score &lt; 0.45</a:t>
-            </a:r>
-          </a:p>
-        </p:txBody>
-      </p:sp>
-      <p:sp>
-        <p:nvSpPr>
-          <p:cNvPr id="10" name="result">
-            <a:extLst>
-              <a:ext uri="{FF2B5EF4-FFF2-40B4-BE49-F238E27FC236}">
-                <a16:creationId xmlns:a16="http://schemas.microsoft.com/office/drawing/2014/main" id="{64661C05-51A1-4DFD-9D12-9A95DC6C6306}"/>
-              </a:ext>
-            </a:extLst>
-          </p:cNvPr>
-          <p:cNvSpPr>
-            <a:spLocks noGrp="1"/>
-          </p:cNvSpPr>
-          <p:nvPr/>
-        </p:nvSpPr>
-        <p:spPr>
-          <a:xfrm>
-            <a:off x="8801100" y="2571750"/>
-            <a:ext cx="2000250" cy="1047750"/>
-          </a:xfrm>
-          <a:prstGeom prst="roundRect">
-            <a:avLst>
-              <a:gd name="adj" fmla="val 10909"/>
-            </a:avLst>
-          </a:prstGeom>
-          <a:solidFill>
-            <a:srgbClr val="0E7490"/>
-          </a:solidFill>
-          <a:ln w="9525">
-            <a:solidFill>
-              <a:srgbClr val="0E7490"/>
-            </a:solidFill>
-            <a:prstDash val="solid"/>
-          </a:ln>
-        </p:spPr>
-        <p:txBody>
-          <a:bodyPr anchor="ctr"/>
-          <a:lstStyle/>
-          <a:p>
-            <a:pPr algn="ctr">
-              <a:defRPr sz="1500" b="1">
-                <a:solidFill>
-                  <a:srgbClr val="FFFFFF"/>
-                </a:solidFill>
-              </a:defRPr>
-            </a:pPr>
-            <a:r>
-              <a:rPr sz="1500" b="1">
-                <a:solidFill>
-                  <a:srgbClr val="FFFFFF"/>
-                </a:solidFill>
-              </a:rPr>
-              <a:t>4. Cited answer</a:t>
-            </a:r>
-          </a:p>
-          <a:p>
-            <a:pPr algn="ctr">
-              <a:defRPr sz="1500" b="1">
-                <a:solidFill>
-                  <a:srgbClr val="FFFFFF"/>
-                </a:solidFill>
-              </a:defRPr>
-            </a:pPr>
-            <a:r>
-              <a:rPr sz="1500" b="1">
-                <a:solidFill>
-                  <a:srgbClr val="FFFFFF"/>
-                </a:solidFill>
-              </a:rPr>
-              <a:t>or refusal</a:t>
-            </a:r>
-          </a:p>
-        </p:txBody>
-      </p:sp>
-      <p:cxnSp>
-        <p:nvCxnSpPr>
-          <p:cNvPr id="25" name="Straight Arrow Connector 24"/>
-          <p:cNvCxnSpPr>
-            <a:stCxn id="7" idx="3"/>
-            <a:endCxn id="8" idx="1"/>
-          </p:cNvCxnSpPr>
-          <p:nvPr/>
-        </p:nvCxnSpPr>
-        <p:spPr>
-          <a:xfrm>
-            <a:off x="2743200" y="3095625"/>
-            <a:ext cx="685800" cy="0"/>
-          </a:xfrm>
-          <a:prstGeom prst="straightConnector1">
-            <a:avLst/>
-          </a:prstGeom>
-          <a:ln w="19050">
-            <a:solidFill>
-              <a:srgbClr val="3D8DFF"/>
-            </a:solidFill>
-            <a:prstDash val="solid"/>
-            <a:tailEnd type="arrow" w="med" len="med"/>
-          </a:ln>
-        </p:spPr>
-      </p:cxnSp>
-      <p:cxnSp>
-        <p:nvCxnSpPr>
-          <p:cNvPr id="26" name="Straight Arrow Connector 25"/>
-          <p:cNvCxnSpPr>
-            <a:stCxn id="8" idx="3"/>
-            <a:endCxn id="9" idx="1"/>
-          </p:cNvCxnSpPr>
-          <p:nvPr/>
-        </p:nvCxnSpPr>
-        <p:spPr>
-          <a:xfrm>
-            <a:off x="5429250" y="3095625"/>
-            <a:ext cx="685800" cy="0"/>
-          </a:xfrm>
-          <a:prstGeom prst="straightConnector1">
-            <a:avLst/>
-          </a:prstGeom>
-          <a:ln w="19050">
-            <a:solidFill>
-              <a:srgbClr val="3D8DFF"/>
-            </a:solidFill>
-            <a:prstDash val="solid"/>
-            <a:tailEnd type="arrow" w="med" len="med"/>
-          </a:ln>
-        </p:spPr>
-      </p:cxnSp>
-      <p:cxnSp>
-        <p:nvCxnSpPr>
-          <p:cNvPr id="27" name="Straight Arrow Connector 26"/>
-          <p:cNvCxnSpPr>
-            <a:stCxn id="9" idx="3"/>
-            <a:endCxn id="10" idx="1"/>
-          </p:cNvCxnSpPr>
-          <p:nvPr/>
-        </p:nvCxnSpPr>
-        <p:spPr>
-          <a:xfrm>
-            <a:off x="8115300" y="3095625"/>
-            <a:ext cx="685800" cy="0"/>
-          </a:xfrm>
-          <a:prstGeom prst="straightConnector1">
-            <a:avLst/>
-          </a:prstGeom>
-          <a:ln w="19050">
-            <a:solidFill>
-              <a:srgbClr val="3D8DFF"/>
-            </a:solidFill>
-            <a:prstDash val="solid"/>
-            <a:tailEnd type="arrow" w="med" len="med"/>
-          </a:ln>
-        </p:spPr>
-      </p:cxnSp>
-      <p:sp>
-        <p:nvSpPr>
-          <p:cNvPr id="14" name="self-rag-copy">
-            <a:extLst>
-              <a:ext uri="{FF2B5EF4-FFF2-40B4-BE49-F238E27FC236}">
-                <a16:creationId xmlns:a16="http://schemas.microsoft.com/office/drawing/2014/main" id="{C80441FB-DF75-43F8-8646-EDFEC3C0B4D7}"/>
-              </a:ext>
-            </a:extLst>
-          </p:cNvPr>
-          <p:cNvSpPr>
-            <a:spLocks noGrp="1"/>
-          </p:cNvSpPr>
-          <p:nvPr/>
-        </p:nvSpPr>
-        <p:spPr>
-          <a:xfrm>
-            <a:off x="1238250" y="4333875"/>
-            <a:ext cx="9429750" cy="666750"/>
-          </a:xfrm>
-          <a:prstGeom prst="rect">
-            <a:avLst/>
-          </a:prstGeom>
-          <a:noFill/>
-          <a:ln w="0">
-            <a:noFill/>
-            <a:prstDash val="solid"/>
-          </a:ln>
-        </p:spPr>
-        <p:txBody>
-          <a:bodyPr anchor="t"/>
-          <a:lstStyle/>
-          <a:p>
-            <a:pPr algn="ctr">
-              <a:defRPr sz="1500" b="0">
-                <a:solidFill>
-                  <a:srgbClr val="64748B"/>
-                </a:solidFill>
-              </a:defRPr>
-            </a:pPr>
-            <a:r>
-              <a:rPr sz="1500" b="0">
-                <a:solidFill>
-                  <a:srgbClr val="64748B"/>
-                </a:solidFill>
-              </a:rPr>
-              <a:t>Rewritten query focus: directly stated facts, named entities, and numerical evidence.</a:t>
-            </a:r>
-          </a:p>
-          <a:p>
-            <a:pPr algn="ctr">
-              <a:defRPr sz="1500" b="0">
-                <a:solidFill>
-                  <a:srgbClr val="64748B"/>
-                </a:solidFill>
-              </a:defRPr>
-            </a:pPr>
-            <a:r>
-              <a:rPr sz="1500" b="0">
-                <a:solidFill>
-                  <a:srgbClr val="64748B"/>
-                </a:solidFill>
-              </a:rPr>
-              <a:t>If a second retrieval remains weak, OmniBrain clearly says it cannot find sufficient evidence.</a:t>
-            </a:r>
-          </a:p>
-        </p:txBody>
-      </p:sp>
+          <p:cNvPr id="2" name="TextBox 1"/>
+          <p:cNvSpPr txBox="1"/>
+          <p:nvPr/>
+        </p:nvSpPr>
+        <p:spPr>
+          <a:xfrm>
+            <a:off x="550506" y="541176"/>
+            <a:ext cx="4609323" cy="646331"/>
+          </a:xfrm>
+          <a:prstGeom prst="rect">
+            <a:avLst/>
+          </a:prstGeom>
+          <a:noFill/>
+        </p:spPr>
+        <p:txBody>
+          <a:bodyPr wrap="square" rtlCol="0">
+            <a:spAutoFit/>
+          </a:bodyPr>
+          <a:lstStyle/>
+          <a:p>
+            <a:r>
+              <a:rPr lang="en-GB" b="1" dirty="0" smtClean="0"/>
+              <a:t>Frontend Design</a:t>
+            </a:r>
+          </a:p>
+          <a:p>
+            <a:endParaRPr lang="en-GB" b="1" dirty="0"/>
+          </a:p>
+        </p:txBody>
+      </p:sp>
+      <p:pic>
+        <p:nvPicPr>
+          <p:cNvPr id="3" name="Picture 2" descr="C:\Users\user\Downloads\WhatsApp Image 2026-08-10 at 4.13.17 PM.jpeg"/>
+          <p:cNvPicPr/>
+          <p:nvPr/>
+        </p:nvPicPr>
+        <p:blipFill>
+          <a:blip r:embed="rId2">
+            <a:extLst>
+              <a:ext uri="{28A0092B-C50C-407E-A947-70E740481C1C}">
+                <a14:useLocalDpi xmlns:a14="http://schemas.microsoft.com/office/drawing/2010/main" val="0"/>
+              </a:ext>
+            </a:extLst>
+          </a:blip>
+          <a:srcRect/>
+          <a:stretch>
+            <a:fillRect/>
+          </a:stretch>
+        </p:blipFill>
+        <p:spPr bwMode="auto">
+          <a:xfrm>
+            <a:off x="1623527" y="1110343"/>
+            <a:ext cx="9330612" cy="4973215"/>
+          </a:xfrm>
+          <a:prstGeom prst="rect">
+            <a:avLst/>
+          </a:prstGeom>
+          <a:noFill/>
+          <a:ln>
+            <a:noFill/>
+          </a:ln>
+        </p:spPr>
+      </p:pic>
     </p:spTree>
     <p:extLst>
       <p:ext uri="{BB962C8B-B14F-4D97-AF65-F5344CB8AC3E}">
-        <p14:creationId xmlns:p14="http://schemas.microsoft.com/office/powerpoint/2010/main" val="2106713162"/>
+        <p14:creationId xmlns:p14="http://schemas.microsoft.com/office/powerpoint/2010/main" val="1112817625"/>
       </p:ext>
     </p:extLst>
   </p:cSld>
@@ -7039,14 +8722,6 @@
 <file path=ppt/slides/slide7.xml><?xml version="1.0" encoding="utf-8"?>
 <p:sld xmlns:a="http://schemas.openxmlformats.org/drawingml/2006/main" xmlns:r="http://schemas.openxmlformats.org/officeDocument/2006/relationships" xmlns:p="http://schemas.openxmlformats.org/presentationml/2006/main">
   <p:cSld>
-    <p:bg>
-      <p:bgPr>
-        <a:solidFill>
-          <a:srgbClr val="FFFFFF"/>
-        </a:solidFill>
-        <a:effectLst/>
-      </p:bgPr>
-    </p:bg>
     <p:spTree>
       <p:nvGrpSpPr>
         <p:cNvPr id="1" name=""/>
@@ -7063,845 +8738,124 @@
       </p:grpSpPr>
       <p:sp>
         <p:nvSpPr>
-          <p:cNvPr id="19" name="eyebrow">
-            <a:extLst>
-              <a:ext uri="{FF2B5EF4-FFF2-40B4-BE49-F238E27FC236}">
-                <a16:creationId xmlns:a16="http://schemas.microsoft.com/office/drawing/2014/main" id="{4A8A66A2-55BE-4A1B-9E1D-92CCC1840599}"/>
-              </a:ext>
-            </a:extLst>
-          </p:cNvPr>
-          <p:cNvSpPr>
-            <a:spLocks noGrp="1"/>
-          </p:cNvSpPr>
-          <p:nvPr/>
-        </p:nvSpPr>
-        <p:spPr>
-          <a:xfrm>
-            <a:off x="685800" y="419100"/>
-            <a:ext cx="3619500" cy="190500"/>
-          </a:xfrm>
-          <a:prstGeom prst="rect">
-            <a:avLst/>
-          </a:prstGeom>
-          <a:noFill/>
-          <a:ln w="0">
-            <a:noFill/>
-            <a:prstDash val="solid"/>
-          </a:ln>
-        </p:spPr>
-        <p:txBody>
-          <a:bodyPr anchor="t"/>
-          <a:lstStyle/>
-          <a:p>
-            <a:pPr algn="l">
-              <a:defRPr sz="900" b="1">
-                <a:solidFill>
-                  <a:srgbClr val="0E7490"/>
-                </a:solidFill>
-              </a:defRPr>
-            </a:pPr>
-            <a:r>
-              <a:rPr sz="900" b="1">
-                <a:solidFill>
-                  <a:srgbClr val="0E7490"/>
-                </a:solidFill>
-              </a:rPr>
-              <a:t>TEST EVIDENCE</a:t>
-            </a:r>
-          </a:p>
-        </p:txBody>
-      </p:sp>
-      <p:sp>
-        <p:nvSpPr>
-          <p:cNvPr id="2" name="title">
-            <a:extLst>
-              <a:ext uri="{FF2B5EF4-FFF2-40B4-BE49-F238E27FC236}">
-                <a16:creationId xmlns:a16="http://schemas.microsoft.com/office/drawing/2014/main" id="{7DD3187A-5971-4081-8DE8-9AF767A833DE}"/>
-              </a:ext>
-            </a:extLst>
-          </p:cNvPr>
-          <p:cNvSpPr>
-            <a:spLocks noGrp="1"/>
-          </p:cNvSpPr>
-          <p:nvPr/>
-        </p:nvSpPr>
-        <p:spPr>
-          <a:xfrm>
-            <a:off x="685800" y="762000"/>
-            <a:ext cx="10001250" cy="514350"/>
-          </a:xfrm>
-          <a:prstGeom prst="rect">
-            <a:avLst/>
-          </a:prstGeom>
-          <a:noFill/>
-          <a:ln w="0">
-            <a:noFill/>
-            <a:prstDash val="solid"/>
-          </a:ln>
-        </p:spPr>
-        <p:txBody>
-          <a:bodyPr anchor="t"/>
-          <a:lstStyle/>
-          <a:p>
-            <a:pPr algn="l">
-              <a:defRPr sz="2550" b="1">
-                <a:solidFill>
-                  <a:srgbClr val="10213F"/>
-                </a:solidFill>
-              </a:defRPr>
-            </a:pPr>
-            <a:r>
-              <a:rPr sz="2550" b="1">
-                <a:solidFill>
-                  <a:srgbClr val="10213F"/>
-                </a:solidFill>
-              </a:rPr>
-              <a:t>Four guardrail checks pass deterministically</a:t>
-            </a:r>
-          </a:p>
-        </p:txBody>
-      </p:sp>
-      <p:sp>
-        <p:nvSpPr>
-          <p:cNvPr id="3" name="subtitle">
-            <a:extLst>
-              <a:ext uri="{FF2B5EF4-FFF2-40B4-BE49-F238E27FC236}">
-                <a16:creationId xmlns:a16="http://schemas.microsoft.com/office/drawing/2014/main" id="{48A4A943-70F8-425B-AEBA-C93E14AD7C0E}"/>
-              </a:ext>
-            </a:extLst>
-          </p:cNvPr>
-          <p:cNvSpPr>
-            <a:spLocks noGrp="1"/>
-          </p:cNvSpPr>
-          <p:nvPr/>
-        </p:nvSpPr>
-        <p:spPr>
-          <a:xfrm>
-            <a:off x="685800" y="1333500"/>
-            <a:ext cx="9715500" cy="323850"/>
-          </a:xfrm>
-          <a:prstGeom prst="rect">
-            <a:avLst/>
-          </a:prstGeom>
-          <a:noFill/>
-          <a:ln w="0">
-            <a:noFill/>
-            <a:prstDash val="solid"/>
-          </a:ln>
-        </p:spPr>
-        <p:txBody>
-          <a:bodyPr anchor="t"/>
-          <a:lstStyle/>
-          <a:p>
-            <a:pPr algn="l">
-              <a:defRPr sz="1275" b="0">
-                <a:solidFill>
-                  <a:srgbClr val="64748B"/>
-                </a:solidFill>
-              </a:defRPr>
-            </a:pPr>
-            <a:r>
-              <a:rPr sz="1275" b="0">
-                <a:solidFill>
-                  <a:srgbClr val="64748B"/>
-                </a:solidFill>
-              </a:rPr>
-              <a:t>The test suite validates retry behavior and citation enforcement without depending on a live LLM response.</a:t>
-            </a:r>
-          </a:p>
-        </p:txBody>
-      </p:sp>
-      <p:sp>
-        <p:nvSpPr>
-          <p:cNvPr id="4" name="Straight Connector 3">
-            <a:extLst>
-              <a:ext uri="{FF2B5EF4-FFF2-40B4-BE49-F238E27FC236}">
-                <a16:creationId xmlns:a16="http://schemas.microsoft.com/office/drawing/2014/main" id="{706F0FA3-2E32-4889-9C57-4D2819E41FB2}"/>
-              </a:ext>
-            </a:extLst>
-          </p:cNvPr>
-          <p:cNvSpPr>
-            <a:spLocks noGrp="1"/>
-          </p:cNvSpPr>
-          <p:nvPr/>
-        </p:nvSpPr>
-        <p:spPr>
-          <a:xfrm>
-            <a:off x="685800" y="6429375"/>
-            <a:ext cx="10820400" cy="0"/>
-          </a:xfrm>
-          <a:prstGeom prst="line">
-            <a:avLst/>
-          </a:prstGeom>
-          <a:ln w="9525">
-            <a:solidFill>
-              <a:srgbClr val="CBD5E1"/>
-            </a:solidFill>
-            <a:prstDash val="solid"/>
-          </a:ln>
-        </p:spPr>
-      </p:sp>
-      <p:sp>
-        <p:nvSpPr>
-          <p:cNvPr id="5" name="footer">
-            <a:extLst>
-              <a:ext uri="{FF2B5EF4-FFF2-40B4-BE49-F238E27FC236}">
-                <a16:creationId xmlns:a16="http://schemas.microsoft.com/office/drawing/2014/main" id="{E580F45B-DED5-41CC-B7D3-3649E21F0241}"/>
-              </a:ext>
-            </a:extLst>
-          </p:cNvPr>
-          <p:cNvSpPr>
-            <a:spLocks noGrp="1"/>
-          </p:cNvSpPr>
-          <p:nvPr/>
-        </p:nvSpPr>
-        <p:spPr>
-          <a:xfrm>
-            <a:off x="685800" y="6543675"/>
-            <a:ext cx="3429000" cy="171450"/>
-          </a:xfrm>
-          <a:prstGeom prst="rect">
-            <a:avLst/>
-          </a:prstGeom>
-          <a:noFill/>
-          <a:ln w="0">
-            <a:noFill/>
-            <a:prstDash val="solid"/>
-          </a:ln>
-        </p:spPr>
-        <p:txBody>
-          <a:bodyPr anchor="t"/>
-          <a:lstStyle/>
-          <a:p>
-            <a:pPr algn="l">
-              <a:defRPr sz="750" b="1">
-                <a:solidFill>
-                  <a:srgbClr val="64748B"/>
-                </a:solidFill>
-              </a:defRPr>
-            </a:pPr>
-            <a:r>
-              <a:rPr sz="750" b="1">
-                <a:solidFill>
-                  <a:srgbClr val="64748B"/>
-                </a:solidFill>
-              </a:rPr>
-              <a:t>AXLERO SOLUTIONS | OMNIBRAIN</a:t>
-            </a:r>
-          </a:p>
-        </p:txBody>
-      </p:sp>
-      <p:sp>
-        <p:nvSpPr>
-          <p:cNvPr id="6" name="slide-num">
-            <a:extLst>
-              <a:ext uri="{FF2B5EF4-FFF2-40B4-BE49-F238E27FC236}">
-                <a16:creationId xmlns:a16="http://schemas.microsoft.com/office/drawing/2014/main" id="{42C5B5D9-2F37-47DC-BD76-BBC69969426C}"/>
-              </a:ext>
-            </a:extLst>
-          </p:cNvPr>
-          <p:cNvSpPr>
-            <a:spLocks noGrp="1"/>
-          </p:cNvSpPr>
-          <p:nvPr/>
-        </p:nvSpPr>
-        <p:spPr>
-          <a:xfrm>
-            <a:off x="10858500" y="6543675"/>
-            <a:ext cx="647700" cy="171450"/>
-          </a:xfrm>
-          <a:prstGeom prst="rect">
-            <a:avLst/>
-          </a:prstGeom>
-          <a:noFill/>
-          <a:ln w="0">
-            <a:noFill/>
-            <a:prstDash val="solid"/>
-          </a:ln>
-        </p:spPr>
-        <p:txBody>
-          <a:bodyPr anchor="t"/>
-          <a:lstStyle/>
-          <a:p>
-            <a:pPr algn="r">
-              <a:defRPr sz="750" b="1">
-                <a:solidFill>
-                  <a:srgbClr val="64748B"/>
-                </a:solidFill>
-              </a:defRPr>
-            </a:pPr>
-            <a:r>
-              <a:rPr sz="750" b="1">
-                <a:solidFill>
-                  <a:srgbClr val="64748B"/>
-                </a:solidFill>
-              </a:rPr>
-              <a:t>07</a:t>
-            </a:r>
+          <p:cNvPr id="2" name="TextBox 1"/>
+          <p:cNvSpPr txBox="1"/>
+          <p:nvPr/>
+        </p:nvSpPr>
+        <p:spPr>
+          <a:xfrm>
+            <a:off x="457200" y="298579"/>
+            <a:ext cx="3984171" cy="369332"/>
+          </a:xfrm>
+          <a:prstGeom prst="rect">
+            <a:avLst/>
+          </a:prstGeom>
+          <a:noFill/>
+        </p:spPr>
+        <p:txBody>
+          <a:bodyPr wrap="square" rtlCol="0">
+            <a:spAutoFit/>
+          </a:bodyPr>
+          <a:lstStyle/>
+          <a:p>
+            <a:r>
+              <a:rPr lang="en-GB" b="1" dirty="0" smtClean="0"/>
+              <a:t>Backend Design</a:t>
+            </a:r>
+            <a:endParaRPr lang="en-GB" b="1" dirty="0"/>
           </a:p>
         </p:txBody>
       </p:sp>
       <p:pic>
         <p:nvPicPr>
-          <p:cNvPr id="25" name="Picture 24"/>
-          <p:cNvPicPr>
-            <a:picLocks noChangeAspect="1"/>
-          </p:cNvPicPr>
+          <p:cNvPr id="3" name="Picture 2" descr="C:\Users\user\Downloads\WhatsApp Image 2026-08-16 at 12.38.39 PM.jpeg"/>
+          <p:cNvPicPr/>
           <p:nvPr/>
         </p:nvPicPr>
         <p:blipFill>
-          <a:blip r:embed="rId3"/>
-          <a:stretch/>
+          <a:blip r:embed="rId2">
+            <a:extLst>
+              <a:ext uri="{28A0092B-C50C-407E-A947-70E740481C1C}">
+                <a14:useLocalDpi xmlns:a14="http://schemas.microsoft.com/office/drawing/2010/main" val="0"/>
+              </a:ext>
+            </a:extLst>
+          </a:blip>
+          <a:srcRect/>
+          <a:stretch>
+            <a:fillRect/>
+          </a:stretch>
         </p:blipFill>
-        <p:spPr>
-          <a:xfrm>
-            <a:off x="685800" y="2549523"/>
-            <a:ext cx="6429375" cy="2139955"/>
-          </a:xfrm>
-          <a:prstGeom prst="roundRect">
-            <a:avLst>
-              <a:gd name="adj" fmla="val 3636"/>
-            </a:avLst>
-          </a:prstGeom>
+        <p:spPr bwMode="auto">
+          <a:xfrm>
+            <a:off x="457201" y="2169315"/>
+            <a:ext cx="5066522" cy="2918460"/>
+          </a:xfrm>
+          <a:prstGeom prst="rect">
+            <a:avLst/>
+          </a:prstGeom>
+          <a:ln w="38100" cap="sq">
+            <a:solidFill>
+              <a:srgbClr val="000000"/>
+            </a:solidFill>
+            <a:prstDash val="solid"/>
+            <a:miter lim="800000"/>
+          </a:ln>
+          <a:effectLst>
+            <a:outerShdw blurRad="50800" dist="38100" dir="2700000" algn="tl" rotWithShape="0">
+              <a:srgbClr val="000000">
+                <a:alpha val="43000"/>
+              </a:srgbClr>
+            </a:outerShdw>
+          </a:effectLst>
         </p:spPr>
       </p:pic>
-      <p:sp>
-        <p:nvSpPr>
-          <p:cNvPr id="8" name="test-summary">
-            <a:extLst>
-              <a:ext uri="{FF2B5EF4-FFF2-40B4-BE49-F238E27FC236}">
-                <a16:creationId xmlns:a16="http://schemas.microsoft.com/office/drawing/2014/main" id="{3817C399-D854-4641-BCBA-22953E575044}"/>
-              </a:ext>
-            </a:extLst>
-          </p:cNvPr>
-          <p:cNvSpPr>
-            <a:spLocks noGrp="1"/>
-          </p:cNvSpPr>
-          <p:nvPr/>
-        </p:nvSpPr>
-        <p:spPr>
-          <a:xfrm>
-            <a:off x="7667625" y="2095500"/>
-            <a:ext cx="3810000" cy="3095625"/>
-          </a:xfrm>
-          <a:prstGeom prst="roundRect">
-            <a:avLst>
-              <a:gd name="adj" fmla="val 3692"/>
-            </a:avLst>
-          </a:prstGeom>
-          <a:solidFill>
-            <a:srgbClr val="F6F9FC"/>
-          </a:solidFill>
-          <a:ln w="9525">
-            <a:noFill/>
-            <a:prstDash val="solid"/>
-          </a:ln>
-        </p:spPr>
-      </p:sp>
-      <p:sp>
-        <p:nvSpPr>
-          <p:cNvPr id="9" name="test-head">
-            <a:extLst>
-              <a:ext uri="{FF2B5EF4-FFF2-40B4-BE49-F238E27FC236}">
-                <a16:creationId xmlns:a16="http://schemas.microsoft.com/office/drawing/2014/main" id="{93671DBE-AC14-4A83-979A-D8914FCF1BD9}"/>
-              </a:ext>
-            </a:extLst>
-          </p:cNvPr>
-          <p:cNvSpPr>
-            <a:spLocks noGrp="1"/>
-          </p:cNvSpPr>
-          <p:nvPr/>
-        </p:nvSpPr>
-        <p:spPr>
-          <a:xfrm>
-            <a:off x="8001000" y="2428875"/>
-            <a:ext cx="2857500" cy="304800"/>
-          </a:xfrm>
-          <a:prstGeom prst="rect">
-            <a:avLst/>
-          </a:prstGeom>
-          <a:noFill/>
-          <a:ln w="0">
-            <a:noFill/>
-            <a:prstDash val="solid"/>
-          </a:ln>
-        </p:spPr>
-        <p:txBody>
-          <a:bodyPr anchor="t"/>
-          <a:lstStyle/>
-          <a:p>
-            <a:pPr algn="l">
-              <a:defRPr sz="1800" b="1">
-                <a:solidFill>
-                  <a:srgbClr val="10213F"/>
-                </a:solidFill>
-              </a:defRPr>
-            </a:pPr>
-            <a:r>
-              <a:rPr sz="1800" b="1">
-                <a:solidFill>
-                  <a:srgbClr val="10213F"/>
-                </a:solidFill>
-              </a:rPr>
-              <a:t>What the checks prove</a:t>
-            </a:r>
-          </a:p>
-        </p:txBody>
-      </p:sp>
-      <p:sp>
-        <p:nvSpPr>
-          <p:cNvPr id="10" name="b-Retry">
-            <a:extLst>
-              <a:ext uri="{FF2B5EF4-FFF2-40B4-BE49-F238E27FC236}">
-                <a16:creationId xmlns:a16="http://schemas.microsoft.com/office/drawing/2014/main" id="{E52BFA2B-59D4-4426-9AA5-10F32F9310A6}"/>
-              </a:ext>
-            </a:extLst>
-          </p:cNvPr>
-          <p:cNvSpPr>
-            <a:spLocks noGrp="1"/>
-          </p:cNvSpPr>
-          <p:nvPr/>
-        </p:nvSpPr>
-        <p:spPr>
-          <a:xfrm>
-            <a:off x="8001000" y="3048000"/>
-            <a:ext cx="190500" cy="247650"/>
-          </a:xfrm>
-          <a:prstGeom prst="rect">
-            <a:avLst/>
-          </a:prstGeom>
-          <a:noFill/>
-          <a:ln w="0">
-            <a:noFill/>
-            <a:prstDash val="solid"/>
-          </a:ln>
-        </p:spPr>
-        <p:txBody>
-          <a:bodyPr anchor="t"/>
-          <a:lstStyle/>
-          <a:p>
-            <a:pPr algn="l">
-              <a:defRPr sz="1800" b="1">
-                <a:solidFill>
-                  <a:srgbClr val="3D8DFF"/>
-                </a:solidFill>
-              </a:defRPr>
-            </a:pPr>
-            <a:r>
-              <a:rPr sz="1800" b="1">
-                <a:solidFill>
-                  <a:srgbClr val="3D8DFF"/>
-                </a:solidFill>
-              </a:rPr>
-              <a:t>•</a:t>
-            </a:r>
-          </a:p>
-        </p:txBody>
-      </p:sp>
-      <p:sp>
-        <p:nvSpPr>
-          <p:cNvPr id="11" name="bl-Retry">
-            <a:extLst>
-              <a:ext uri="{FF2B5EF4-FFF2-40B4-BE49-F238E27FC236}">
-                <a16:creationId xmlns:a16="http://schemas.microsoft.com/office/drawing/2014/main" id="{7ABD4741-E20F-4BA4-8541-5871D57CFE84}"/>
-              </a:ext>
-            </a:extLst>
-          </p:cNvPr>
-          <p:cNvSpPr>
-            <a:spLocks noGrp="1"/>
-          </p:cNvSpPr>
-          <p:nvPr/>
-        </p:nvSpPr>
-        <p:spPr>
-          <a:xfrm>
-            <a:off x="8248650" y="3048000"/>
-            <a:ext cx="2800350" cy="238125"/>
-          </a:xfrm>
-          <a:prstGeom prst="rect">
-            <a:avLst/>
-          </a:prstGeom>
-          <a:noFill/>
-          <a:ln w="0">
-            <a:noFill/>
-            <a:prstDash val="solid"/>
-          </a:ln>
-        </p:spPr>
-        <p:txBody>
-          <a:bodyPr anchor="t"/>
-          <a:lstStyle/>
-          <a:p>
-            <a:pPr algn="l">
-              <a:defRPr sz="1350" b="1">
-                <a:solidFill>
-                  <a:srgbClr val="10213F"/>
-                </a:solidFill>
-              </a:defRPr>
-            </a:pPr>
-            <a:r>
-              <a:rPr sz="1350" b="1">
-                <a:solidFill>
-                  <a:srgbClr val="10213F"/>
-                </a:solidFill>
-              </a:rPr>
-              <a:t>Retry</a:t>
-            </a:r>
-          </a:p>
-        </p:txBody>
-      </p:sp>
-      <p:sp>
-        <p:nvSpPr>
-          <p:cNvPr id="12" name="bb-Retry">
-            <a:extLst>
-              <a:ext uri="{FF2B5EF4-FFF2-40B4-BE49-F238E27FC236}">
-                <a16:creationId xmlns:a16="http://schemas.microsoft.com/office/drawing/2014/main" id="{F6DAD9C5-11A3-4D1C-88F9-504BA6E93A0C}"/>
-              </a:ext>
-            </a:extLst>
-          </p:cNvPr>
-          <p:cNvSpPr>
-            <a:spLocks noGrp="1"/>
-          </p:cNvSpPr>
-          <p:nvPr/>
-        </p:nvSpPr>
-        <p:spPr>
-          <a:xfrm>
-            <a:off x="8248650" y="3305175"/>
-            <a:ext cx="2800350" cy="476250"/>
-          </a:xfrm>
-          <a:prstGeom prst="rect">
-            <a:avLst/>
-          </a:prstGeom>
-          <a:noFill/>
-          <a:ln w="0">
-            <a:noFill/>
-            <a:prstDash val="solid"/>
-          </a:ln>
-        </p:spPr>
-        <p:txBody>
-          <a:bodyPr anchor="t"/>
-          <a:lstStyle/>
-          <a:p>
-            <a:pPr algn="l">
-              <a:defRPr sz="1125" b="0">
-                <a:solidFill>
-                  <a:srgbClr val="64748B"/>
-                </a:solidFill>
-              </a:defRPr>
-            </a:pPr>
-            <a:r>
-              <a:rPr sz="1125" b="0">
-                <a:solidFill>
-                  <a:srgbClr val="64748B"/>
-                </a:solidFill>
-              </a:rPr>
-              <a:t>Weak retrieval triggers a second search.</a:t>
-            </a:r>
-          </a:p>
-        </p:txBody>
-      </p:sp>
-      <p:sp>
-        <p:nvSpPr>
-          <p:cNvPr id="13" name="b-Rewrite">
-            <a:extLst>
-              <a:ext uri="{FF2B5EF4-FFF2-40B4-BE49-F238E27FC236}">
-                <a16:creationId xmlns:a16="http://schemas.microsoft.com/office/drawing/2014/main" id="{080C7480-FAAB-46DD-8CE7-56EDD4F85F45}"/>
-              </a:ext>
-            </a:extLst>
-          </p:cNvPr>
-          <p:cNvSpPr>
-            <a:spLocks noGrp="1"/>
-          </p:cNvSpPr>
-          <p:nvPr/>
-        </p:nvSpPr>
-        <p:spPr>
-          <a:xfrm>
-            <a:off x="8001000" y="3743325"/>
-            <a:ext cx="190500" cy="247650"/>
-          </a:xfrm>
-          <a:prstGeom prst="rect">
-            <a:avLst/>
-          </a:prstGeom>
-          <a:noFill/>
-          <a:ln w="0">
-            <a:noFill/>
-            <a:prstDash val="solid"/>
-          </a:ln>
-        </p:spPr>
-        <p:txBody>
-          <a:bodyPr anchor="t"/>
-          <a:lstStyle/>
-          <a:p>
-            <a:pPr algn="l">
-              <a:defRPr sz="1800" b="1">
-                <a:solidFill>
-                  <a:srgbClr val="3D8DFF"/>
-                </a:solidFill>
-              </a:defRPr>
-            </a:pPr>
-            <a:r>
-              <a:rPr sz="1800" b="1">
-                <a:solidFill>
-                  <a:srgbClr val="3D8DFF"/>
-                </a:solidFill>
-              </a:rPr>
-              <a:t>•</a:t>
-            </a:r>
-          </a:p>
-        </p:txBody>
-      </p:sp>
-      <p:sp>
-        <p:nvSpPr>
-          <p:cNvPr id="14" name="bl-Rewrite">
-            <a:extLst>
-              <a:ext uri="{FF2B5EF4-FFF2-40B4-BE49-F238E27FC236}">
-                <a16:creationId xmlns:a16="http://schemas.microsoft.com/office/drawing/2014/main" id="{46FD94C7-3FED-4B45-A915-28E80AD62246}"/>
-              </a:ext>
-            </a:extLst>
-          </p:cNvPr>
-          <p:cNvSpPr>
-            <a:spLocks noGrp="1"/>
-          </p:cNvSpPr>
-          <p:nvPr/>
-        </p:nvSpPr>
-        <p:spPr>
-          <a:xfrm>
-            <a:off x="8248650" y="3743325"/>
-            <a:ext cx="2800350" cy="238125"/>
-          </a:xfrm>
-          <a:prstGeom prst="rect">
-            <a:avLst/>
-          </a:prstGeom>
-          <a:noFill/>
-          <a:ln w="0">
-            <a:noFill/>
-            <a:prstDash val="solid"/>
-          </a:ln>
-        </p:spPr>
-        <p:txBody>
-          <a:bodyPr anchor="t"/>
-          <a:lstStyle/>
-          <a:p>
-            <a:pPr algn="l">
-              <a:defRPr sz="1350" b="1">
-                <a:solidFill>
-                  <a:srgbClr val="10213F"/>
-                </a:solidFill>
-              </a:defRPr>
-            </a:pPr>
-            <a:r>
-              <a:rPr sz="1350" b="1">
-                <a:solidFill>
-                  <a:srgbClr val="10213F"/>
-                </a:solidFill>
-              </a:rPr>
-              <a:t>Rewrite</a:t>
-            </a:r>
-          </a:p>
-        </p:txBody>
-      </p:sp>
-      <p:sp>
-        <p:nvSpPr>
-          <p:cNvPr id="15" name="bb-Rewrite">
-            <a:extLst>
-              <a:ext uri="{FF2B5EF4-FFF2-40B4-BE49-F238E27FC236}">
-                <a16:creationId xmlns:a16="http://schemas.microsoft.com/office/drawing/2014/main" id="{A978F13A-575D-4FD2-9381-D655B4CE61DA}"/>
-              </a:ext>
-            </a:extLst>
-          </p:cNvPr>
-          <p:cNvSpPr>
-            <a:spLocks noGrp="1"/>
-          </p:cNvSpPr>
-          <p:nvPr/>
-        </p:nvSpPr>
-        <p:spPr>
-          <a:xfrm>
-            <a:off x="8248650" y="4000500"/>
-            <a:ext cx="2800350" cy="476250"/>
-          </a:xfrm>
-          <a:prstGeom prst="rect">
-            <a:avLst/>
-          </a:prstGeom>
-          <a:noFill/>
-          <a:ln w="0">
-            <a:noFill/>
-            <a:prstDash val="solid"/>
-          </a:ln>
-        </p:spPr>
-        <p:txBody>
-          <a:bodyPr anchor="t"/>
-          <a:lstStyle/>
-          <a:p>
-            <a:pPr algn="l">
-              <a:defRPr sz="1125" b="0">
-                <a:solidFill>
-                  <a:srgbClr val="64748B"/>
-                </a:solidFill>
-              </a:defRPr>
-            </a:pPr>
-            <a:r>
-              <a:rPr sz="1125" b="0">
-                <a:solidFill>
-                  <a:srgbClr val="64748B"/>
-                </a:solidFill>
-              </a:rPr>
-              <a:t>The retry query becomes more specific.</a:t>
-            </a:r>
-          </a:p>
-        </p:txBody>
-      </p:sp>
-      <p:sp>
-        <p:nvSpPr>
-          <p:cNvPr id="16" name="b-Citations">
-            <a:extLst>
-              <a:ext uri="{FF2B5EF4-FFF2-40B4-BE49-F238E27FC236}">
-                <a16:creationId xmlns:a16="http://schemas.microsoft.com/office/drawing/2014/main" id="{94716346-3D1F-43A1-860B-73EFFAFD8F42}"/>
-              </a:ext>
-            </a:extLst>
-          </p:cNvPr>
-          <p:cNvSpPr>
-            <a:spLocks noGrp="1"/>
-          </p:cNvSpPr>
-          <p:nvPr/>
-        </p:nvSpPr>
-        <p:spPr>
-          <a:xfrm>
-            <a:off x="8001000" y="4438650"/>
-            <a:ext cx="190500" cy="247650"/>
-          </a:xfrm>
-          <a:prstGeom prst="rect">
-            <a:avLst/>
-          </a:prstGeom>
-          <a:noFill/>
-          <a:ln w="0">
-            <a:noFill/>
-            <a:prstDash val="solid"/>
-          </a:ln>
-        </p:spPr>
-        <p:txBody>
-          <a:bodyPr anchor="t"/>
-          <a:lstStyle/>
-          <a:p>
-            <a:pPr algn="l">
-              <a:defRPr sz="1800" b="1">
-                <a:solidFill>
-                  <a:srgbClr val="3D8DFF"/>
-                </a:solidFill>
-              </a:defRPr>
-            </a:pPr>
-            <a:r>
-              <a:rPr sz="1800" b="1">
-                <a:solidFill>
-                  <a:srgbClr val="3D8DFF"/>
-                </a:solidFill>
-              </a:rPr>
-              <a:t>•</a:t>
-            </a:r>
-          </a:p>
-        </p:txBody>
-      </p:sp>
-      <p:sp>
-        <p:nvSpPr>
-          <p:cNvPr id="17" name="bl-Citations">
-            <a:extLst>
-              <a:ext uri="{FF2B5EF4-FFF2-40B4-BE49-F238E27FC236}">
-                <a16:creationId xmlns:a16="http://schemas.microsoft.com/office/drawing/2014/main" id="{49433936-6F8B-4205-AFA6-3520668E0F72}"/>
-              </a:ext>
-            </a:extLst>
-          </p:cNvPr>
-          <p:cNvSpPr>
-            <a:spLocks noGrp="1"/>
-          </p:cNvSpPr>
-          <p:nvPr/>
-        </p:nvSpPr>
-        <p:spPr>
-          <a:xfrm>
-            <a:off x="8248650" y="4438650"/>
-            <a:ext cx="2800350" cy="238125"/>
-          </a:xfrm>
-          <a:prstGeom prst="rect">
-            <a:avLst/>
-          </a:prstGeom>
-          <a:noFill/>
-          <a:ln w="0">
-            <a:noFill/>
-            <a:prstDash val="solid"/>
-          </a:ln>
-        </p:spPr>
-        <p:txBody>
-          <a:bodyPr anchor="t"/>
-          <a:lstStyle/>
-          <a:p>
-            <a:pPr algn="l">
-              <a:defRPr sz="1350" b="1">
-                <a:solidFill>
-                  <a:srgbClr val="10213F"/>
-                </a:solidFill>
-              </a:defRPr>
-            </a:pPr>
-            <a:r>
-              <a:rPr sz="1350" b="1">
-                <a:solidFill>
-                  <a:srgbClr val="10213F"/>
-                </a:solidFill>
-              </a:rPr>
-              <a:t>Citations</a:t>
-            </a:r>
-          </a:p>
-        </p:txBody>
-      </p:sp>
-      <p:sp>
-        <p:nvSpPr>
-          <p:cNvPr id="18" name="bb-Citations">
-            <a:extLst>
-              <a:ext uri="{FF2B5EF4-FFF2-40B4-BE49-F238E27FC236}">
-                <a16:creationId xmlns:a16="http://schemas.microsoft.com/office/drawing/2014/main" id="{C1C78F36-D706-49B7-8093-85296DC96359}"/>
-              </a:ext>
-            </a:extLst>
-          </p:cNvPr>
-          <p:cNvSpPr>
-            <a:spLocks noGrp="1"/>
-          </p:cNvSpPr>
-          <p:nvPr/>
-        </p:nvSpPr>
-        <p:spPr>
-          <a:xfrm>
-            <a:off x="8248650" y="4695825"/>
-            <a:ext cx="2800350" cy="476250"/>
-          </a:xfrm>
-          <a:prstGeom prst="rect">
-            <a:avLst/>
-          </a:prstGeom>
-          <a:noFill/>
-          <a:ln w="0">
-            <a:noFill/>
-            <a:prstDash val="solid"/>
-          </a:ln>
-        </p:spPr>
-        <p:txBody>
-          <a:bodyPr anchor="t"/>
-          <a:lstStyle/>
-          <a:p>
-            <a:pPr algn="l">
-              <a:defRPr sz="1125" b="0">
-                <a:solidFill>
-                  <a:srgbClr val="64748B"/>
-                </a:solidFill>
-              </a:defRPr>
-            </a:pPr>
-            <a:r>
-              <a:rPr sz="1125" b="0">
-                <a:solidFill>
-                  <a:srgbClr val="64748B"/>
-                </a:solidFill>
-              </a:rPr>
-              <a:t>Uncited answers are blocked; cited ones pass.</a:t>
-            </a:r>
-          </a:p>
-        </p:txBody>
-      </p:sp>
+      <p:pic>
+        <p:nvPicPr>
+          <p:cNvPr id="4" name="Picture 3" descr="C:\Users\user\Downloads\WhatsApp Image 2026-08-16 at 12.38.40 PM.jpeg"/>
+          <p:cNvPicPr/>
+          <p:nvPr/>
+        </p:nvPicPr>
+        <p:blipFill>
+          <a:blip r:embed="rId3">
+            <a:extLst>
+              <a:ext uri="{28A0092B-C50C-407E-A947-70E740481C1C}">
+                <a14:useLocalDpi xmlns:a14="http://schemas.microsoft.com/office/drawing/2010/main" val="0"/>
+              </a:ext>
+            </a:extLst>
+          </a:blip>
+          <a:srcRect/>
+          <a:stretch>
+            <a:fillRect/>
+          </a:stretch>
+        </p:blipFill>
+        <p:spPr bwMode="auto">
+          <a:xfrm>
+            <a:off x="6102454" y="2169315"/>
+            <a:ext cx="5585460" cy="2918460"/>
+          </a:xfrm>
+          <a:prstGeom prst="rect">
+            <a:avLst/>
+          </a:prstGeom>
+          <a:ln w="38100" cap="sq">
+            <a:solidFill>
+              <a:srgbClr val="000000"/>
+            </a:solidFill>
+            <a:prstDash val="solid"/>
+            <a:miter lim="800000"/>
+          </a:ln>
+          <a:effectLst>
+            <a:outerShdw blurRad="50800" dist="38100" dir="2700000" algn="tl" rotWithShape="0">
+              <a:srgbClr val="000000">
+                <a:alpha val="43000"/>
+              </a:srgbClr>
+            </a:outerShdw>
+          </a:effectLst>
+        </p:spPr>
+      </p:pic>
     </p:spTree>
     <p:extLst>
       <p:ext uri="{BB962C8B-B14F-4D97-AF65-F5344CB8AC3E}">
-        <p14:creationId xmlns:p14="http://schemas.microsoft.com/office/powerpoint/2010/main" val="838198572"/>
+        <p14:creationId xmlns:p14="http://schemas.microsoft.com/office/powerpoint/2010/main" val="3966260979"/>
       </p:ext>
     </p:extLst>
   </p:cSld>
@@ -7938,10 +8892,10 @@
       </p:grpSpPr>
       <p:sp>
         <p:nvSpPr>
-          <p:cNvPr id="21" name="eyebrow">
-            <a:extLst>
-              <a:ext uri="{FF2B5EF4-FFF2-40B4-BE49-F238E27FC236}">
-                <a16:creationId xmlns:a16="http://schemas.microsoft.com/office/drawing/2014/main" id="{D9B48522-6083-4EAE-80E4-83879CA98302}"/>
+          <p:cNvPr id="15" name="eyebrow">
+            <a:extLst>
+              <a:ext uri="{FF2B5EF4-FFF2-40B4-BE49-F238E27FC236}">
+                <a16:creationId xmlns:a16="http://schemas.microsoft.com/office/drawing/2014/main" id="{A8E9A7DD-693B-4FE7-8C00-670791499E78}"/>
               </a:ext>
             </a:extLst>
           </p:cNvPr>
@@ -7981,7 +8935,7 @@
                   <a:srgbClr val="0E7490"/>
                 </a:solidFill>
               </a:rPr>
-              <a:t>DEPLOYMENT MODEL</a:t>
+              <a:t>SELF-CORRECTION LOOP</a:t>
             </a:r>
           </a:p>
         </p:txBody>
@@ -7991,7 +8945,7 @@
           <p:cNvPr id="2" name="title">
             <a:extLst>
               <a:ext uri="{FF2B5EF4-FFF2-40B4-BE49-F238E27FC236}">
-                <a16:creationId xmlns:a16="http://schemas.microsoft.com/office/drawing/2014/main" id="{0FF1DC93-9AED-48E1-8279-D9A444578AEB}"/>
+                <a16:creationId xmlns:a16="http://schemas.microsoft.com/office/drawing/2014/main" id="{E41B7DF7-C889-438A-8FEA-862D7F2EDB41}"/>
               </a:ext>
             </a:extLst>
           </p:cNvPr>
@@ -8031,7 +8985,7 @@
                   <a:srgbClr val="10213F"/>
                 </a:solidFill>
               </a:rPr>
-              <a:t>Docker Compose turns a multi-service AI application into a reproducible local environment</a:t>
+              <a:t>Weak retrieval is corrected before the system answers</a:t>
             </a:r>
           </a:p>
         </p:txBody>
@@ -8041,7 +8995,7 @@
           <p:cNvPr id="3" name="subtitle">
             <a:extLst>
               <a:ext uri="{FF2B5EF4-FFF2-40B4-BE49-F238E27FC236}">
-                <a16:creationId xmlns:a16="http://schemas.microsoft.com/office/drawing/2014/main" id="{5BCA78DB-414E-418E-94F4-5018742EA3B3}"/>
+                <a16:creationId xmlns:a16="http://schemas.microsoft.com/office/drawing/2014/main" id="{E7D27117-C2B0-4510-A0BE-1927AF97F3A9}"/>
               </a:ext>
             </a:extLst>
           </p:cNvPr>
@@ -8081,7 +9035,7 @@
                   <a:srgbClr val="64748B"/>
                 </a:solidFill>
               </a:rPr>
-              <a:t>The backend depends on infrastructure services, while Streamlit supplies the research workspace.</a:t>
+              <a:t>The system retries once with a narrower query, then refuses unsupported responses.</a:t>
             </a:r>
           </a:p>
         </p:txBody>
@@ -8091,7 +9045,7 @@
           <p:cNvPr id="4" name="Straight Connector 3">
             <a:extLst>
               <a:ext uri="{FF2B5EF4-FFF2-40B4-BE49-F238E27FC236}">
-                <a16:creationId xmlns:a16="http://schemas.microsoft.com/office/drawing/2014/main" id="{567A6910-1E93-483A-B97D-D3E86C446B5D}"/>
+                <a16:creationId xmlns:a16="http://schemas.microsoft.com/office/drawing/2014/main" id="{481A180C-A067-4E3D-B73A-FB98194054BC}"/>
               </a:ext>
             </a:extLst>
           </p:cNvPr>
@@ -8121,7 +9075,7 @@
           <p:cNvPr id="5" name="footer">
             <a:extLst>
               <a:ext uri="{FF2B5EF4-FFF2-40B4-BE49-F238E27FC236}">
-                <a16:creationId xmlns:a16="http://schemas.microsoft.com/office/drawing/2014/main" id="{F1523515-4DB2-492A-9AE8-C0A8EF952558}"/>
+                <a16:creationId xmlns:a16="http://schemas.microsoft.com/office/drawing/2014/main" id="{38B06DC5-B4DB-4B42-B5A3-6F7287D31748}"/>
               </a:ext>
             </a:extLst>
           </p:cNvPr>
@@ -8171,7 +9125,7 @@
           <p:cNvPr id="6" name="slide-num">
             <a:extLst>
               <a:ext uri="{FF2B5EF4-FFF2-40B4-BE49-F238E27FC236}">
-                <a16:creationId xmlns:a16="http://schemas.microsoft.com/office/drawing/2014/main" id="{60BA6850-F6E2-4E52-945E-4AD227438929}"/>
+                <a16:creationId xmlns:a16="http://schemas.microsoft.com/office/drawing/2014/main" id="{A9522A38-BABA-49F6-BA2C-3A0EEB5C1F2D}"/>
               </a:ext>
             </a:extLst>
           </p:cNvPr>
@@ -8211,639 +9165,444 @@
                   <a:srgbClr val="64748B"/>
                 </a:solidFill>
               </a:rPr>
-              <a:t>08</a:t>
-            </a:r>
-          </a:p>
-        </p:txBody>
-      </p:sp>
-      <p:sp>
-        <p:nvSpPr>
-          <p:cNvPr id="7" name="svc-FastAPI">
-            <a:extLst>
-              <a:ext uri="{FF2B5EF4-FFF2-40B4-BE49-F238E27FC236}">
-                <a16:creationId xmlns:a16="http://schemas.microsoft.com/office/drawing/2014/main" id="{60AAF9CD-3C81-40D7-983A-4CF6578511EA}"/>
-              </a:ext>
-            </a:extLst>
-          </p:cNvPr>
-          <p:cNvSpPr>
-            <a:spLocks noGrp="1"/>
-          </p:cNvSpPr>
-          <p:nvPr/>
-        </p:nvSpPr>
-        <p:spPr>
-          <a:xfrm>
-            <a:off x="685800" y="2343150"/>
-            <a:ext cx="2428875" cy="1571625"/>
+              <a:t>06</a:t>
+            </a:r>
+          </a:p>
+        </p:txBody>
+      </p:sp>
+      <p:sp>
+        <p:nvSpPr>
+          <p:cNvPr id="7" name="retrieve">
+            <a:extLst>
+              <a:ext uri="{FF2B5EF4-FFF2-40B4-BE49-F238E27FC236}">
+                <a16:creationId xmlns:a16="http://schemas.microsoft.com/office/drawing/2014/main" id="{64514E80-C494-49BB-9A12-CD317269FEA1}"/>
+              </a:ext>
+            </a:extLst>
+          </p:cNvPr>
+          <p:cNvSpPr>
+            <a:spLocks noGrp="1"/>
+          </p:cNvSpPr>
+          <p:nvPr/>
+        </p:nvSpPr>
+        <p:spPr>
+          <a:xfrm>
+            <a:off x="742950" y="2571750"/>
+            <a:ext cx="2000250" cy="1047750"/>
           </a:xfrm>
           <a:prstGeom prst="roundRect">
             <a:avLst>
-              <a:gd name="adj" fmla="val 7273"/>
+              <a:gd name="adj" fmla="val 10909"/>
             </a:avLst>
           </a:prstGeom>
           <a:solidFill>
             <a:srgbClr val="F6F9FC"/>
           </a:solidFill>
           <a:ln w="9525">
-            <a:noFill/>
-            <a:prstDash val="solid"/>
-          </a:ln>
-        </p:spPr>
-      </p:sp>
-      <p:sp>
-        <p:nvSpPr>
-          <p:cNvPr id="8" name="svcH-FastAPI">
-            <a:extLst>
-              <a:ext uri="{FF2B5EF4-FFF2-40B4-BE49-F238E27FC236}">
-                <a16:creationId xmlns:a16="http://schemas.microsoft.com/office/drawing/2014/main" id="{793E2161-2FE9-43BC-BB76-B5D05C0B9A72}"/>
-              </a:ext>
-            </a:extLst>
-          </p:cNvPr>
-          <p:cNvSpPr>
-            <a:spLocks noGrp="1"/>
-          </p:cNvSpPr>
-          <p:nvPr/>
-        </p:nvSpPr>
-        <p:spPr>
-          <a:xfrm>
-            <a:off x="914400" y="2667000"/>
-            <a:ext cx="1962150" cy="295275"/>
-          </a:xfrm>
-          <a:prstGeom prst="rect">
-            <a:avLst/>
-          </a:prstGeom>
-          <a:noFill/>
-          <a:ln w="0">
-            <a:noFill/>
-            <a:prstDash val="solid"/>
-          </a:ln>
-        </p:spPr>
-        <p:txBody>
-          <a:bodyPr anchor="t"/>
-          <a:lstStyle/>
-          <a:p>
-            <a:pPr algn="l">
-              <a:defRPr sz="1800" b="1">
-                <a:solidFill>
-                  <a:srgbClr val="10213F"/>
-                </a:solidFill>
-              </a:defRPr>
-            </a:pPr>
-            <a:r>
-              <a:rPr sz="1800" b="1">
-                <a:solidFill>
-                  <a:srgbClr val="10213F"/>
-                </a:solidFill>
-              </a:rPr>
-              <a:t>FastAPI</a:t>
-            </a:r>
-          </a:p>
-        </p:txBody>
-      </p:sp>
-      <p:sp>
-        <p:nvSpPr>
-          <p:cNvPr id="9" name="svcB-FastAPI">
-            <a:extLst>
-              <a:ext uri="{FF2B5EF4-FFF2-40B4-BE49-F238E27FC236}">
-                <a16:creationId xmlns:a16="http://schemas.microsoft.com/office/drawing/2014/main" id="{728066D0-187C-41DE-9EDB-A31365B92228}"/>
-              </a:ext>
-            </a:extLst>
-          </p:cNvPr>
-          <p:cNvSpPr>
-            <a:spLocks noGrp="1"/>
-          </p:cNvSpPr>
-          <p:nvPr/>
-        </p:nvSpPr>
-        <p:spPr>
-          <a:xfrm>
-            <a:off x="914400" y="3171825"/>
-            <a:ext cx="1962150" cy="266700"/>
-          </a:xfrm>
-          <a:prstGeom prst="rect">
-            <a:avLst/>
-          </a:prstGeom>
-          <a:noFill/>
-          <a:ln w="0">
-            <a:noFill/>
-            <a:prstDash val="solid"/>
-          </a:ln>
-        </p:spPr>
-        <p:txBody>
-          <a:bodyPr anchor="t"/>
-          <a:lstStyle/>
-          <a:p>
-            <a:pPr algn="l">
-              <a:defRPr sz="1350" b="0">
-                <a:solidFill>
-                  <a:srgbClr val="64748B"/>
-                </a:solidFill>
-              </a:defRPr>
-            </a:pPr>
-            <a:r>
-              <a:rPr sz="1350" b="0">
-                <a:solidFill>
-                  <a:srgbClr val="64748B"/>
-                </a:solidFill>
-              </a:rPr>
-              <a:t>API / agent workflow</a:t>
-            </a:r>
-          </a:p>
-        </p:txBody>
-      </p:sp>
-      <p:sp>
-        <p:nvSpPr>
-          <p:cNvPr id="10" name="svc-PostgreSQL">
-            <a:extLst>
-              <a:ext uri="{FF2B5EF4-FFF2-40B4-BE49-F238E27FC236}">
-                <a16:creationId xmlns:a16="http://schemas.microsoft.com/office/drawing/2014/main" id="{4C2B50F9-5A29-442A-9C9B-DE2A766474DB}"/>
-              </a:ext>
-            </a:extLst>
-          </p:cNvPr>
-          <p:cNvSpPr>
-            <a:spLocks noGrp="1"/>
-          </p:cNvSpPr>
-          <p:nvPr/>
-        </p:nvSpPr>
-        <p:spPr>
-          <a:xfrm>
-            <a:off x="3381375" y="2343150"/>
-            <a:ext cx="2428875" cy="1571625"/>
+            <a:solidFill>
+              <a:srgbClr val="CBD5E1"/>
+            </a:solidFill>
+            <a:prstDash val="solid"/>
+          </a:ln>
+        </p:spPr>
+        <p:txBody>
+          <a:bodyPr anchor="ctr"/>
+          <a:lstStyle/>
+          <a:p>
+            <a:pPr algn="ctr">
+              <a:defRPr sz="1500" b="1">
+                <a:solidFill>
+                  <a:srgbClr val="10213F"/>
+                </a:solidFill>
+              </a:defRPr>
+            </a:pPr>
+            <a:r>
+              <a:rPr sz="1500" b="1">
+                <a:solidFill>
+                  <a:srgbClr val="10213F"/>
+                </a:solidFill>
+              </a:rPr>
+              <a:t>1. Retrieve</a:t>
+            </a:r>
+          </a:p>
+          <a:p>
+            <a:pPr algn="ctr">
+              <a:defRPr sz="1500" b="1">
+                <a:solidFill>
+                  <a:srgbClr val="10213F"/>
+                </a:solidFill>
+              </a:defRPr>
+            </a:pPr>
+            <a:r>
+              <a:rPr sz="1500" b="1">
+                <a:solidFill>
+                  <a:srgbClr val="10213F"/>
+                </a:solidFill>
+              </a:rPr>
+              <a:t>semantic chunks</a:t>
+            </a:r>
+          </a:p>
+        </p:txBody>
+      </p:sp>
+      <p:sp>
+        <p:nvSpPr>
+          <p:cNvPr id="8" name="score">
+            <a:extLst>
+              <a:ext uri="{FF2B5EF4-FFF2-40B4-BE49-F238E27FC236}">
+                <a16:creationId xmlns:a16="http://schemas.microsoft.com/office/drawing/2014/main" id="{71AB2FC0-7F3D-4558-B9F1-2A306FEAD10D}"/>
+              </a:ext>
+            </a:extLst>
+          </p:cNvPr>
+          <p:cNvSpPr>
+            <a:spLocks noGrp="1"/>
+          </p:cNvSpPr>
+          <p:nvPr/>
+        </p:nvSpPr>
+        <p:spPr>
+          <a:xfrm>
+            <a:off x="3429000" y="2571750"/>
+            <a:ext cx="2000250" cy="1047750"/>
           </a:xfrm>
           <a:prstGeom prst="roundRect">
             <a:avLst>
-              <a:gd name="adj" fmla="val 7273"/>
+              <a:gd name="adj" fmla="val 10909"/>
+            </a:avLst>
+          </a:prstGeom>
+          <a:solidFill>
+            <a:srgbClr val="FFFFFF"/>
+          </a:solidFill>
+          <a:ln w="9525">
+            <a:solidFill>
+              <a:srgbClr val="3D8DFF"/>
+            </a:solidFill>
+            <a:prstDash val="solid"/>
+          </a:ln>
+        </p:spPr>
+        <p:txBody>
+          <a:bodyPr anchor="ctr"/>
+          <a:lstStyle/>
+          <a:p>
+            <a:pPr algn="ctr">
+              <a:defRPr sz="1500" b="1">
+                <a:solidFill>
+                  <a:srgbClr val="10213F"/>
+                </a:solidFill>
+              </a:defRPr>
+            </a:pPr>
+            <a:r>
+              <a:rPr sz="1500" b="1">
+                <a:solidFill>
+                  <a:srgbClr val="10213F"/>
+                </a:solidFill>
+              </a:rPr>
+              <a:t>2. Check</a:t>
+            </a:r>
+          </a:p>
+          <a:p>
+            <a:pPr algn="ctr">
+              <a:defRPr sz="1500" b="1">
+                <a:solidFill>
+                  <a:srgbClr val="10213F"/>
+                </a:solidFill>
+              </a:defRPr>
+            </a:pPr>
+            <a:r>
+              <a:rPr sz="1500" b="1">
+                <a:solidFill>
+                  <a:srgbClr val="10213F"/>
+                </a:solidFill>
+              </a:rPr>
+              <a:t>relevance score</a:t>
+            </a:r>
+          </a:p>
+        </p:txBody>
+      </p:sp>
+      <p:sp>
+        <p:nvSpPr>
+          <p:cNvPr id="9" name="rewrite">
+            <a:extLst>
+              <a:ext uri="{FF2B5EF4-FFF2-40B4-BE49-F238E27FC236}">
+                <a16:creationId xmlns:a16="http://schemas.microsoft.com/office/drawing/2014/main" id="{96162676-2300-490C-A4EF-2B3BBD5699A9}"/>
+              </a:ext>
+            </a:extLst>
+          </p:cNvPr>
+          <p:cNvSpPr>
+            <a:spLocks noGrp="1"/>
+          </p:cNvSpPr>
+          <p:nvPr/>
+        </p:nvSpPr>
+        <p:spPr>
+          <a:xfrm>
+            <a:off x="6115050" y="2571750"/>
+            <a:ext cx="2000250" cy="1047750"/>
+          </a:xfrm>
+          <a:prstGeom prst="roundRect">
+            <a:avLst>
+              <a:gd name="adj" fmla="val 10909"/>
             </a:avLst>
           </a:prstGeom>
           <a:solidFill>
             <a:srgbClr val="F6F9FC"/>
           </a:solidFill>
           <a:ln w="9525">
-            <a:noFill/>
-            <a:prstDash val="solid"/>
-          </a:ln>
-        </p:spPr>
-      </p:sp>
-      <p:sp>
-        <p:nvSpPr>
-          <p:cNvPr id="11" name="svcH-PostgreSQL">
-            <a:extLst>
-              <a:ext uri="{FF2B5EF4-FFF2-40B4-BE49-F238E27FC236}">
-                <a16:creationId xmlns:a16="http://schemas.microsoft.com/office/drawing/2014/main" id="{2A78A205-56BF-4E4F-A2D1-732C60D79F7F}"/>
-              </a:ext>
-            </a:extLst>
-          </p:cNvPr>
-          <p:cNvSpPr>
-            <a:spLocks noGrp="1"/>
-          </p:cNvSpPr>
-          <p:nvPr/>
-        </p:nvSpPr>
-        <p:spPr>
-          <a:xfrm>
-            <a:off x="3609975" y="2667000"/>
-            <a:ext cx="1962150" cy="295275"/>
-          </a:xfrm>
-          <a:prstGeom prst="rect">
-            <a:avLst/>
-          </a:prstGeom>
-          <a:noFill/>
-          <a:ln w="0">
-            <a:noFill/>
-            <a:prstDash val="solid"/>
-          </a:ln>
-        </p:spPr>
-        <p:txBody>
-          <a:bodyPr anchor="t"/>
-          <a:lstStyle/>
-          <a:p>
-            <a:pPr algn="l">
-              <a:defRPr sz="1800" b="1">
-                <a:solidFill>
-                  <a:srgbClr val="3D8DFF"/>
-                </a:solidFill>
-              </a:defRPr>
-            </a:pPr>
-            <a:r>
-              <a:rPr sz="1800" b="1">
-                <a:solidFill>
-                  <a:srgbClr val="3D8DFF"/>
-                </a:solidFill>
-              </a:rPr>
-              <a:t>PostgreSQL</a:t>
-            </a:r>
-          </a:p>
-        </p:txBody>
-      </p:sp>
-      <p:sp>
-        <p:nvSpPr>
-          <p:cNvPr id="12" name="svcB-PostgreSQL">
-            <a:extLst>
-              <a:ext uri="{FF2B5EF4-FFF2-40B4-BE49-F238E27FC236}">
-                <a16:creationId xmlns:a16="http://schemas.microsoft.com/office/drawing/2014/main" id="{7ABE0561-4C44-43C4-9FEE-B994A1795727}"/>
-              </a:ext>
-            </a:extLst>
-          </p:cNvPr>
-          <p:cNvSpPr>
-            <a:spLocks noGrp="1"/>
-          </p:cNvSpPr>
-          <p:nvPr/>
-        </p:nvSpPr>
-        <p:spPr>
-          <a:xfrm>
-            <a:off x="3609975" y="3171825"/>
-            <a:ext cx="1962150" cy="266700"/>
-          </a:xfrm>
-          <a:prstGeom prst="rect">
-            <a:avLst/>
-          </a:prstGeom>
-          <a:noFill/>
-          <a:ln w="0">
-            <a:noFill/>
-            <a:prstDash val="solid"/>
-          </a:ln>
-        </p:spPr>
-        <p:txBody>
-          <a:bodyPr anchor="t"/>
-          <a:lstStyle/>
-          <a:p>
-            <a:pPr algn="l">
-              <a:defRPr sz="1350" b="0">
-                <a:solidFill>
-                  <a:srgbClr val="64748B"/>
-                </a:solidFill>
-              </a:defRPr>
-            </a:pPr>
-            <a:r>
-              <a:rPr sz="1350" b="0">
-                <a:solidFill>
-                  <a:srgbClr val="64748B"/>
-                </a:solidFill>
-              </a:rPr>
-              <a:t>Users + metadata</a:t>
-            </a:r>
-          </a:p>
-        </p:txBody>
-      </p:sp>
-      <p:sp>
-        <p:nvSpPr>
-          <p:cNvPr id="13" name="svc-MinIO">
-            <a:extLst>
-              <a:ext uri="{FF2B5EF4-FFF2-40B4-BE49-F238E27FC236}">
-                <a16:creationId xmlns:a16="http://schemas.microsoft.com/office/drawing/2014/main" id="{31C5D5E8-A2B5-46C3-99E8-CB435F744797}"/>
-              </a:ext>
-            </a:extLst>
-          </p:cNvPr>
-          <p:cNvSpPr>
-            <a:spLocks noGrp="1"/>
-          </p:cNvSpPr>
-          <p:nvPr/>
-        </p:nvSpPr>
-        <p:spPr>
-          <a:xfrm>
-            <a:off x="6076950" y="2343150"/>
-            <a:ext cx="2428875" cy="1571625"/>
+            <a:solidFill>
+              <a:srgbClr val="CBD5E1"/>
+            </a:solidFill>
+            <a:prstDash val="solid"/>
+          </a:ln>
+        </p:spPr>
+        <p:txBody>
+          <a:bodyPr anchor="ctr"/>
+          <a:lstStyle/>
+          <a:p>
+            <a:pPr algn="ctr">
+              <a:defRPr sz="1500" b="1">
+                <a:solidFill>
+                  <a:srgbClr val="10213F"/>
+                </a:solidFill>
+              </a:defRPr>
+            </a:pPr>
+            <a:r>
+              <a:rPr sz="1500" b="1">
+                <a:solidFill>
+                  <a:srgbClr val="10213F"/>
+                </a:solidFill>
+              </a:rPr>
+              <a:t>3. Rewrite query</a:t>
+            </a:r>
+          </a:p>
+          <a:p>
+            <a:pPr algn="ctr">
+              <a:defRPr sz="1500" b="1">
+                <a:solidFill>
+                  <a:srgbClr val="10213F"/>
+                </a:solidFill>
+              </a:defRPr>
+            </a:pPr>
+            <a:r>
+              <a:rPr sz="1500" b="1">
+                <a:solidFill>
+                  <a:srgbClr val="10213F"/>
+                </a:solidFill>
+              </a:rPr>
+              <a:t>if score &lt; 0.45</a:t>
+            </a:r>
+          </a:p>
+        </p:txBody>
+      </p:sp>
+      <p:sp>
+        <p:nvSpPr>
+          <p:cNvPr id="10" name="result">
+            <a:extLst>
+              <a:ext uri="{FF2B5EF4-FFF2-40B4-BE49-F238E27FC236}">
+                <a16:creationId xmlns:a16="http://schemas.microsoft.com/office/drawing/2014/main" id="{64661C05-51A1-4DFD-9D12-9A95DC6C6306}"/>
+              </a:ext>
+            </a:extLst>
+          </p:cNvPr>
+          <p:cNvSpPr>
+            <a:spLocks noGrp="1"/>
+          </p:cNvSpPr>
+          <p:nvPr/>
+        </p:nvSpPr>
+        <p:spPr>
+          <a:xfrm>
+            <a:off x="8801100" y="2571750"/>
+            <a:ext cx="2000250" cy="1047750"/>
           </a:xfrm>
           <a:prstGeom prst="roundRect">
             <a:avLst>
-              <a:gd name="adj" fmla="val 7273"/>
+              <a:gd name="adj" fmla="val 10909"/>
             </a:avLst>
           </a:prstGeom>
           <a:solidFill>
-            <a:srgbClr val="F6F9FC"/>
+            <a:srgbClr val="0E7490"/>
           </a:solidFill>
           <a:ln w="9525">
-            <a:noFill/>
-            <a:prstDash val="solid"/>
-          </a:ln>
-        </p:spPr>
-      </p:sp>
-      <p:sp>
-        <p:nvSpPr>
-          <p:cNvPr id="14" name="svcH-MinIO">
-            <a:extLst>
-              <a:ext uri="{FF2B5EF4-FFF2-40B4-BE49-F238E27FC236}">
-                <a16:creationId xmlns:a16="http://schemas.microsoft.com/office/drawing/2014/main" id="{E45CB58F-1A57-47C9-A957-7D5897E29FC9}"/>
-              </a:ext>
-            </a:extLst>
-          </p:cNvPr>
-          <p:cNvSpPr>
-            <a:spLocks noGrp="1"/>
-          </p:cNvSpPr>
-          <p:nvPr/>
-        </p:nvSpPr>
-        <p:spPr>
-          <a:xfrm>
-            <a:off x="6305550" y="2667000"/>
-            <a:ext cx="1962150" cy="295275"/>
-          </a:xfrm>
-          <a:prstGeom prst="rect">
-            <a:avLst/>
-          </a:prstGeom>
-          <a:noFill/>
-          <a:ln w="0">
-            <a:noFill/>
-            <a:prstDash val="solid"/>
-          </a:ln>
-        </p:spPr>
-        <p:txBody>
-          <a:bodyPr anchor="t"/>
-          <a:lstStyle/>
-          <a:p>
-            <a:pPr algn="l">
-              <a:defRPr sz="1800" b="1">
-                <a:solidFill>
-                  <a:srgbClr val="0E7490"/>
-                </a:solidFill>
-              </a:defRPr>
-            </a:pPr>
-            <a:r>
-              <a:rPr sz="1800" b="1">
-                <a:solidFill>
-                  <a:srgbClr val="0E7490"/>
-                </a:solidFill>
-              </a:rPr>
-              <a:t>MinIO</a:t>
-            </a:r>
-          </a:p>
-        </p:txBody>
-      </p:sp>
-      <p:sp>
-        <p:nvSpPr>
-          <p:cNvPr id="15" name="svcB-MinIO">
-            <a:extLst>
-              <a:ext uri="{FF2B5EF4-FFF2-40B4-BE49-F238E27FC236}">
-                <a16:creationId xmlns:a16="http://schemas.microsoft.com/office/drawing/2014/main" id="{174D49F1-2946-44F5-884C-5855E9E98C6F}"/>
-              </a:ext>
-            </a:extLst>
-          </p:cNvPr>
-          <p:cNvSpPr>
-            <a:spLocks noGrp="1"/>
-          </p:cNvSpPr>
-          <p:nvPr/>
-        </p:nvSpPr>
-        <p:spPr>
-          <a:xfrm>
-            <a:off x="6305550" y="3171825"/>
-            <a:ext cx="1962150" cy="266700"/>
-          </a:xfrm>
-          <a:prstGeom prst="rect">
-            <a:avLst/>
-          </a:prstGeom>
-          <a:noFill/>
-          <a:ln w="0">
-            <a:noFill/>
-            <a:prstDash val="solid"/>
-          </a:ln>
-        </p:spPr>
-        <p:txBody>
-          <a:bodyPr anchor="t"/>
-          <a:lstStyle/>
-          <a:p>
-            <a:pPr algn="l">
-              <a:defRPr sz="1350" b="0">
-                <a:solidFill>
-                  <a:srgbClr val="64748B"/>
-                </a:solidFill>
-              </a:defRPr>
-            </a:pPr>
-            <a:r>
-              <a:rPr sz="1350" b="0">
-                <a:solidFill>
-                  <a:srgbClr val="64748B"/>
-                </a:solidFill>
-              </a:rPr>
-              <a:t>Uploaded files</a:t>
-            </a:r>
-          </a:p>
-        </p:txBody>
-      </p:sp>
-      <p:sp>
-        <p:nvSpPr>
-          <p:cNvPr id="16" name="svc-Qdrant">
-            <a:extLst>
-              <a:ext uri="{FF2B5EF4-FFF2-40B4-BE49-F238E27FC236}">
-                <a16:creationId xmlns:a16="http://schemas.microsoft.com/office/drawing/2014/main" id="{AB43CBDC-437C-4824-A100-E7C4EC04183B}"/>
-              </a:ext>
-            </a:extLst>
-          </p:cNvPr>
-          <p:cNvSpPr>
-            <a:spLocks noGrp="1"/>
-          </p:cNvSpPr>
-          <p:nvPr/>
-        </p:nvSpPr>
-        <p:spPr>
-          <a:xfrm>
-            <a:off x="8772525" y="2343150"/>
-            <a:ext cx="2428875" cy="1571625"/>
-          </a:xfrm>
-          <a:prstGeom prst="roundRect">
-            <a:avLst>
-              <a:gd name="adj" fmla="val 7273"/>
-            </a:avLst>
-          </a:prstGeom>
-          <a:solidFill>
-            <a:srgbClr val="F6F9FC"/>
-          </a:solidFill>
-          <a:ln w="9525">
-            <a:noFill/>
-            <a:prstDash val="solid"/>
-          </a:ln>
-        </p:spPr>
-      </p:sp>
-      <p:sp>
-        <p:nvSpPr>
-          <p:cNvPr id="17" name="svcH-Qdrant">
-            <a:extLst>
-              <a:ext uri="{FF2B5EF4-FFF2-40B4-BE49-F238E27FC236}">
-                <a16:creationId xmlns:a16="http://schemas.microsoft.com/office/drawing/2014/main" id="{D8EEC87D-B03E-449D-AA4A-819364BD296E}"/>
-              </a:ext>
-            </a:extLst>
-          </p:cNvPr>
-          <p:cNvSpPr>
-            <a:spLocks noGrp="1"/>
-          </p:cNvSpPr>
-          <p:nvPr/>
-        </p:nvSpPr>
-        <p:spPr>
-          <a:xfrm>
-            <a:off x="9001125" y="2667000"/>
-            <a:ext cx="1962150" cy="295275"/>
-          </a:xfrm>
-          <a:prstGeom prst="rect">
-            <a:avLst/>
-          </a:prstGeom>
-          <a:noFill/>
-          <a:ln w="0">
-            <a:noFill/>
-            <a:prstDash val="solid"/>
-          </a:ln>
-        </p:spPr>
-        <p:txBody>
-          <a:bodyPr anchor="t"/>
-          <a:lstStyle/>
-          <a:p>
-            <a:pPr algn="l">
-              <a:defRPr sz="1800" b="1">
-                <a:solidFill>
-                  <a:srgbClr val="6DCBF4"/>
-                </a:solidFill>
-              </a:defRPr>
-            </a:pPr>
-            <a:r>
-              <a:rPr sz="1800" b="1">
-                <a:solidFill>
-                  <a:srgbClr val="6DCBF4"/>
-                </a:solidFill>
-              </a:rPr>
-              <a:t>Qdrant</a:t>
-            </a:r>
-          </a:p>
-        </p:txBody>
-      </p:sp>
-      <p:sp>
-        <p:nvSpPr>
-          <p:cNvPr id="18" name="svcB-Qdrant">
-            <a:extLst>
-              <a:ext uri="{FF2B5EF4-FFF2-40B4-BE49-F238E27FC236}">
-                <a16:creationId xmlns:a16="http://schemas.microsoft.com/office/drawing/2014/main" id="{40E9CA19-5D20-4E32-8CEF-76BCCDAD86CB}"/>
-              </a:ext>
-            </a:extLst>
-          </p:cNvPr>
-          <p:cNvSpPr>
-            <a:spLocks noGrp="1"/>
-          </p:cNvSpPr>
-          <p:nvPr/>
-        </p:nvSpPr>
-        <p:spPr>
-          <a:xfrm>
-            <a:off x="9001125" y="3171825"/>
-            <a:ext cx="1962150" cy="266700"/>
-          </a:xfrm>
-          <a:prstGeom prst="rect">
-            <a:avLst/>
-          </a:prstGeom>
-          <a:noFill/>
-          <a:ln w="0">
-            <a:noFill/>
-            <a:prstDash val="solid"/>
-          </a:ln>
-        </p:spPr>
-        <p:txBody>
-          <a:bodyPr anchor="t"/>
-          <a:lstStyle/>
-          <a:p>
-            <a:pPr algn="l">
-              <a:defRPr sz="1350" b="0">
-                <a:solidFill>
-                  <a:srgbClr val="64748B"/>
-                </a:solidFill>
-              </a:defRPr>
-            </a:pPr>
-            <a:r>
-              <a:rPr sz="1350" b="0">
-                <a:solidFill>
-                  <a:srgbClr val="64748B"/>
-                </a:solidFill>
-              </a:rPr>
-              <a:t>Vector search</a:t>
-            </a:r>
-          </a:p>
-        </p:txBody>
-      </p:sp>
-      <p:sp>
-        <p:nvSpPr>
-          <p:cNvPr id="19" name="deploy-command">
-            <a:extLst>
-              <a:ext uri="{FF2B5EF4-FFF2-40B4-BE49-F238E27FC236}">
-                <a16:creationId xmlns:a16="http://schemas.microsoft.com/office/drawing/2014/main" id="{32100C59-7052-4C61-8F7F-85A20A52F56A}"/>
-              </a:ext>
-            </a:extLst>
-          </p:cNvPr>
-          <p:cNvSpPr>
-            <a:spLocks noGrp="1"/>
-          </p:cNvSpPr>
-          <p:nvPr/>
-        </p:nvSpPr>
-        <p:spPr>
-          <a:xfrm>
-            <a:off x="685800" y="4524375"/>
-            <a:ext cx="4381500" cy="304800"/>
-          </a:xfrm>
-          <a:prstGeom prst="rect">
-            <a:avLst/>
-          </a:prstGeom>
-          <a:noFill/>
-          <a:ln w="0">
-            <a:noFill/>
-            <a:prstDash val="solid"/>
-          </a:ln>
-        </p:spPr>
-        <p:txBody>
-          <a:bodyPr anchor="t"/>
-          <a:lstStyle/>
-          <a:p>
-            <a:pPr algn="l">
-              <a:defRPr sz="1650" b="1">
-                <a:solidFill>
-                  <a:srgbClr val="10213F"/>
-                </a:solidFill>
-              </a:defRPr>
-            </a:pPr>
-            <a:r>
-              <a:rPr sz="1650" b="1">
-                <a:solidFill>
-                  <a:srgbClr val="10213F"/>
-                </a:solidFill>
-              </a:rPr>
-              <a:t>docker compose up -d --build</a:t>
-            </a:r>
-          </a:p>
-        </p:txBody>
-      </p:sp>
-      <p:sp>
-        <p:nvSpPr>
-          <p:cNvPr id="20" name="deploy-copy">
-            <a:extLst>
-              <a:ext uri="{FF2B5EF4-FFF2-40B4-BE49-F238E27FC236}">
-                <a16:creationId xmlns:a16="http://schemas.microsoft.com/office/drawing/2014/main" id="{D228931A-4913-4310-837B-DEA5F681F60E}"/>
-              </a:ext>
-            </a:extLst>
-          </p:cNvPr>
-          <p:cNvSpPr>
-            <a:spLocks noGrp="1"/>
-          </p:cNvSpPr>
-          <p:nvPr/>
-        </p:nvSpPr>
-        <p:spPr>
-          <a:xfrm>
-            <a:off x="685800" y="4981575"/>
-            <a:ext cx="8858250" cy="285750"/>
-          </a:xfrm>
-          <a:prstGeom prst="rect">
-            <a:avLst/>
-          </a:prstGeom>
-          <a:noFill/>
-          <a:ln w="0">
-            <a:noFill/>
-            <a:prstDash val="solid"/>
-          </a:ln>
-        </p:spPr>
-        <p:txBody>
-          <a:bodyPr anchor="t"/>
-          <a:lstStyle/>
-          <a:p>
-            <a:pPr algn="l">
-              <a:defRPr sz="1350" b="0">
-                <a:solidFill>
-                  <a:srgbClr val="64748B"/>
-                </a:solidFill>
-              </a:defRPr>
-            </a:pPr>
-            <a:r>
-              <a:rPr sz="1350" b="0">
-                <a:solidFill>
-                  <a:srgbClr val="64748B"/>
-                </a:solidFill>
-              </a:rPr>
-              <a:t>Then open FastAPI docs on port 8000 and the Streamlit workspace on port 8501.</a:t>
+            <a:solidFill>
+              <a:srgbClr val="0E7490"/>
+            </a:solidFill>
+            <a:prstDash val="solid"/>
+          </a:ln>
+        </p:spPr>
+        <p:txBody>
+          <a:bodyPr anchor="ctr"/>
+          <a:lstStyle/>
+          <a:p>
+            <a:pPr algn="ctr">
+              <a:defRPr sz="1500" b="1">
+                <a:solidFill>
+                  <a:srgbClr val="FFFFFF"/>
+                </a:solidFill>
+              </a:defRPr>
+            </a:pPr>
+            <a:r>
+              <a:rPr sz="1500" b="1">
+                <a:solidFill>
+                  <a:srgbClr val="FFFFFF"/>
+                </a:solidFill>
+              </a:rPr>
+              <a:t>4. Cited answer</a:t>
+            </a:r>
+          </a:p>
+          <a:p>
+            <a:pPr algn="ctr">
+              <a:defRPr sz="1500" b="1">
+                <a:solidFill>
+                  <a:srgbClr val="FFFFFF"/>
+                </a:solidFill>
+              </a:defRPr>
+            </a:pPr>
+            <a:r>
+              <a:rPr sz="1500" b="1">
+                <a:solidFill>
+                  <a:srgbClr val="FFFFFF"/>
+                </a:solidFill>
+              </a:rPr>
+              <a:t>or refusal</a:t>
+            </a:r>
+          </a:p>
+        </p:txBody>
+      </p:sp>
+      <p:cxnSp>
+        <p:nvCxnSpPr>
+          <p:cNvPr id="25" name="Straight Arrow Connector 24"/>
+          <p:cNvCxnSpPr>
+            <a:stCxn id="7" idx="3"/>
+            <a:endCxn id="8" idx="1"/>
+          </p:cNvCxnSpPr>
+          <p:nvPr/>
+        </p:nvCxnSpPr>
+        <p:spPr>
+          <a:xfrm>
+            <a:off x="2743200" y="3095625"/>
+            <a:ext cx="685800" cy="0"/>
+          </a:xfrm>
+          <a:prstGeom prst="straightConnector1">
+            <a:avLst/>
+          </a:prstGeom>
+          <a:ln w="19050">
+            <a:solidFill>
+              <a:srgbClr val="3D8DFF"/>
+            </a:solidFill>
+            <a:prstDash val="solid"/>
+            <a:tailEnd type="arrow" w="med" len="med"/>
+          </a:ln>
+        </p:spPr>
+      </p:cxnSp>
+      <p:cxnSp>
+        <p:nvCxnSpPr>
+          <p:cNvPr id="26" name="Straight Arrow Connector 25"/>
+          <p:cNvCxnSpPr>
+            <a:stCxn id="8" idx="3"/>
+            <a:endCxn id="9" idx="1"/>
+          </p:cNvCxnSpPr>
+          <p:nvPr/>
+        </p:nvCxnSpPr>
+        <p:spPr>
+          <a:xfrm>
+            <a:off x="5429250" y="3095625"/>
+            <a:ext cx="685800" cy="0"/>
+          </a:xfrm>
+          <a:prstGeom prst="straightConnector1">
+            <a:avLst/>
+          </a:prstGeom>
+          <a:ln w="19050">
+            <a:solidFill>
+              <a:srgbClr val="3D8DFF"/>
+            </a:solidFill>
+            <a:prstDash val="solid"/>
+            <a:tailEnd type="arrow" w="med" len="med"/>
+          </a:ln>
+        </p:spPr>
+      </p:cxnSp>
+      <p:cxnSp>
+        <p:nvCxnSpPr>
+          <p:cNvPr id="27" name="Straight Arrow Connector 26"/>
+          <p:cNvCxnSpPr>
+            <a:stCxn id="9" idx="3"/>
+            <a:endCxn id="10" idx="1"/>
+          </p:cNvCxnSpPr>
+          <p:nvPr/>
+        </p:nvCxnSpPr>
+        <p:spPr>
+          <a:xfrm>
+            <a:off x="8115300" y="3095625"/>
+            <a:ext cx="685800" cy="0"/>
+          </a:xfrm>
+          <a:prstGeom prst="straightConnector1">
+            <a:avLst/>
+          </a:prstGeom>
+          <a:ln w="19050">
+            <a:solidFill>
+              <a:srgbClr val="3D8DFF"/>
+            </a:solidFill>
+            <a:prstDash val="solid"/>
+            <a:tailEnd type="arrow" w="med" len="med"/>
+          </a:ln>
+        </p:spPr>
+      </p:cxnSp>
+      <p:sp>
+        <p:nvSpPr>
+          <p:cNvPr id="14" name="self-rag-copy">
+            <a:extLst>
+              <a:ext uri="{FF2B5EF4-FFF2-40B4-BE49-F238E27FC236}">
+                <a16:creationId xmlns:a16="http://schemas.microsoft.com/office/drawing/2014/main" id="{C80441FB-DF75-43F8-8646-EDFEC3C0B4D7}"/>
+              </a:ext>
+            </a:extLst>
+          </p:cNvPr>
+          <p:cNvSpPr>
+            <a:spLocks noGrp="1"/>
+          </p:cNvSpPr>
+          <p:nvPr/>
+        </p:nvSpPr>
+        <p:spPr>
+          <a:xfrm>
+            <a:off x="1238250" y="4333875"/>
+            <a:ext cx="9429750" cy="666750"/>
+          </a:xfrm>
+          <a:prstGeom prst="rect">
+            <a:avLst/>
+          </a:prstGeom>
+          <a:noFill/>
+          <a:ln w="0">
+            <a:noFill/>
+            <a:prstDash val="solid"/>
+          </a:ln>
+        </p:spPr>
+        <p:txBody>
+          <a:bodyPr anchor="t"/>
+          <a:lstStyle/>
+          <a:p>
+            <a:pPr algn="ctr">
+              <a:defRPr sz="1500" b="0">
+                <a:solidFill>
+                  <a:srgbClr val="64748B"/>
+                </a:solidFill>
+              </a:defRPr>
+            </a:pPr>
+            <a:r>
+              <a:rPr sz="1500" b="0">
+                <a:solidFill>
+                  <a:srgbClr val="64748B"/>
+                </a:solidFill>
+              </a:rPr>
+              <a:t>Rewritten query focus: directly stated facts, named entities, and numerical evidence.</a:t>
+            </a:r>
+          </a:p>
+          <a:p>
+            <a:pPr algn="ctr">
+              <a:defRPr sz="1500" b="0">
+                <a:solidFill>
+                  <a:srgbClr val="64748B"/>
+                </a:solidFill>
+              </a:defRPr>
+            </a:pPr>
+            <a:r>
+              <a:rPr sz="1500" b="0">
+                <a:solidFill>
+                  <a:srgbClr val="64748B"/>
+                </a:solidFill>
+              </a:rPr>
+              <a:t>If a second retrieval remains weak, OmniBrain clearly says it cannot find sufficient evidence.</a:t>
             </a:r>
           </a:p>
         </p:txBody>
@@ -8851,7 +9610,7 @@
     </p:spTree>
     <p:extLst>
       <p:ext uri="{BB962C8B-B14F-4D97-AF65-F5344CB8AC3E}">
-        <p14:creationId xmlns:p14="http://schemas.microsoft.com/office/powerpoint/2010/main" val="1125346078"/>
+        <p14:creationId xmlns:p14="http://schemas.microsoft.com/office/powerpoint/2010/main" val="2106713162"/>
       </p:ext>
     </p:extLst>
   </p:cSld>
@@ -8888,10 +9647,10 @@
       </p:grpSpPr>
       <p:sp>
         <p:nvSpPr>
-          <p:cNvPr id="29" name="eyebrow">
-            <a:extLst>
-              <a:ext uri="{FF2B5EF4-FFF2-40B4-BE49-F238E27FC236}">
-                <a16:creationId xmlns:a16="http://schemas.microsoft.com/office/drawing/2014/main" id="{0D970C56-B447-41C6-9A91-9C86CD6E8504}"/>
+          <p:cNvPr id="19" name="eyebrow">
+            <a:extLst>
+              <a:ext uri="{FF2B5EF4-FFF2-40B4-BE49-F238E27FC236}">
+                <a16:creationId xmlns:a16="http://schemas.microsoft.com/office/drawing/2014/main" id="{4A8A66A2-55BE-4A1B-9E1D-92CCC1840599}"/>
               </a:ext>
             </a:extLst>
           </p:cNvPr>
@@ -8931,7 +9690,7 @@
                   <a:srgbClr val="0E7490"/>
                 </a:solidFill>
               </a:rPr>
-              <a:t>DELIVERY STATUS</a:t>
+              <a:t>TEST EVIDENCE</a:t>
             </a:r>
           </a:p>
         </p:txBody>
@@ -8941,7 +9700,7 @@
           <p:cNvPr id="2" name="title">
             <a:extLst>
               <a:ext uri="{FF2B5EF4-FFF2-40B4-BE49-F238E27FC236}">
-                <a16:creationId xmlns:a16="http://schemas.microsoft.com/office/drawing/2014/main" id="{130664FE-3D20-47A6-B122-7E5E2DBBA1D7}"/>
+                <a16:creationId xmlns:a16="http://schemas.microsoft.com/office/drawing/2014/main" id="{7DD3187A-5971-4081-8DE8-9AF767A833DE}"/>
               </a:ext>
             </a:extLst>
           </p:cNvPr>
@@ -8981,7 +9740,7 @@
                   <a:srgbClr val="10213F"/>
                 </a:solidFill>
               </a:rPr>
-              <a:t>What is implemented now—and what comes next</a:t>
+              <a:t>Four guardrail checks pass deterministically</a:t>
             </a:r>
           </a:p>
         </p:txBody>
@@ -8991,7 +9750,7 @@
           <p:cNvPr id="3" name="subtitle">
             <a:extLst>
               <a:ext uri="{FF2B5EF4-FFF2-40B4-BE49-F238E27FC236}">
-                <a16:creationId xmlns:a16="http://schemas.microsoft.com/office/drawing/2014/main" id="{9F32FE9E-76CE-4DA0-8B18-C043E2199D36}"/>
+                <a16:creationId xmlns:a16="http://schemas.microsoft.com/office/drawing/2014/main" id="{48A4A943-70F8-425B-AEBA-C93E14AD7C0E}"/>
               </a:ext>
             </a:extLst>
           </p:cNvPr>
@@ -9031,7 +9790,7 @@
                   <a:srgbClr val="64748B"/>
                 </a:solidFill>
               </a:rPr>
-              <a:t>The project already proves controlled routing and guarded retrieval; multi-modal reasoning is the next capability layer.</a:t>
+              <a:t>The test suite validates retry behavior and citation enforcement without depending on a live LLM response.</a:t>
             </a:r>
           </a:p>
         </p:txBody>
@@ -9041,7 +9800,7 @@
           <p:cNvPr id="4" name="Straight Connector 3">
             <a:extLst>
               <a:ext uri="{FF2B5EF4-FFF2-40B4-BE49-F238E27FC236}">
-                <a16:creationId xmlns:a16="http://schemas.microsoft.com/office/drawing/2014/main" id="{8AF04DC5-4B0A-4C7E-B340-F4193CF6C7D4}"/>
+                <a16:creationId xmlns:a16="http://schemas.microsoft.com/office/drawing/2014/main" id="{706F0FA3-2E32-4889-9C57-4D2819E41FB2}"/>
               </a:ext>
             </a:extLst>
           </p:cNvPr>
@@ -9071,7 +9830,7 @@
           <p:cNvPr id="5" name="footer">
             <a:extLst>
               <a:ext uri="{FF2B5EF4-FFF2-40B4-BE49-F238E27FC236}">
-                <a16:creationId xmlns:a16="http://schemas.microsoft.com/office/drawing/2014/main" id="{7EF10662-1953-4144-B41E-1B67E95F71AD}"/>
+                <a16:creationId xmlns:a16="http://schemas.microsoft.com/office/drawing/2014/main" id="{E580F45B-DED5-41CC-B7D3-3649E21F0241}"/>
               </a:ext>
             </a:extLst>
           </p:cNvPr>
@@ -9121,7 +9880,7 @@
           <p:cNvPr id="6" name="slide-num">
             <a:extLst>
               <a:ext uri="{FF2B5EF4-FFF2-40B4-BE49-F238E27FC236}">
-                <a16:creationId xmlns:a16="http://schemas.microsoft.com/office/drawing/2014/main" id="{F59822E6-C7F3-4D65-9939-0290AA38F2CC}"/>
+                <a16:creationId xmlns:a16="http://schemas.microsoft.com/office/drawing/2014/main" id="{42C5B5D9-2F37-47DC-BD76-BBC69969426C}"/>
               </a:ext>
             </a:extLst>
           </p:cNvPr>
@@ -9161,33 +9920,57 @@
                   <a:srgbClr val="64748B"/>
                 </a:solidFill>
               </a:rPr>
-              <a:t>09</a:t>
-            </a:r>
-          </a:p>
-        </p:txBody>
-      </p:sp>
-      <p:sp>
-        <p:nvSpPr>
-          <p:cNvPr id="7" name="implemented">
-            <a:extLst>
-              <a:ext uri="{FF2B5EF4-FFF2-40B4-BE49-F238E27FC236}">
-                <a16:creationId xmlns:a16="http://schemas.microsoft.com/office/drawing/2014/main" id="{7ED790B3-1A98-41FC-81E6-9825712F169E}"/>
-              </a:ext>
-            </a:extLst>
-          </p:cNvPr>
-          <p:cNvSpPr>
-            <a:spLocks noGrp="1"/>
-          </p:cNvSpPr>
-          <p:nvPr/>
-        </p:nvSpPr>
-        <p:spPr>
-          <a:xfrm>
-            <a:off x="685800" y="2076450"/>
-            <a:ext cx="4953000" cy="3333750"/>
+              <a:t>07</a:t>
+            </a:r>
+          </a:p>
+        </p:txBody>
+      </p:sp>
+      <p:pic>
+        <p:nvPicPr>
+          <p:cNvPr id="25" name="Picture 24"/>
+          <p:cNvPicPr>
+            <a:picLocks noChangeAspect="1"/>
+          </p:cNvPicPr>
+          <p:nvPr/>
+        </p:nvPicPr>
+        <p:blipFill>
+          <a:blip r:embed="rId3"/>
+          <a:stretch/>
+        </p:blipFill>
+        <p:spPr>
+          <a:xfrm>
+            <a:off x="685800" y="2549523"/>
+            <a:ext cx="6429375" cy="2139955"/>
           </a:xfrm>
           <a:prstGeom prst="roundRect">
             <a:avLst>
-              <a:gd name="adj" fmla="val 3429"/>
+              <a:gd name="adj" fmla="val 3636"/>
+            </a:avLst>
+          </a:prstGeom>
+        </p:spPr>
+      </p:pic>
+      <p:sp>
+        <p:nvSpPr>
+          <p:cNvPr id="8" name="test-summary">
+            <a:extLst>
+              <a:ext uri="{FF2B5EF4-FFF2-40B4-BE49-F238E27FC236}">
+                <a16:creationId xmlns:a16="http://schemas.microsoft.com/office/drawing/2014/main" id="{3817C399-D854-4641-BCBA-22953E575044}"/>
+              </a:ext>
+            </a:extLst>
+          </p:cNvPr>
+          <p:cNvSpPr>
+            <a:spLocks noGrp="1"/>
+          </p:cNvSpPr>
+          <p:nvPr/>
+        </p:nvSpPr>
+        <p:spPr>
+          <a:xfrm>
+            <a:off x="7667625" y="2095500"/>
+            <a:ext cx="3810000" cy="3095625"/>
+          </a:xfrm>
+          <a:prstGeom prst="roundRect">
+            <a:avLst>
+              <a:gd name="adj" fmla="val 3692"/>
             </a:avLst>
           </a:prstGeom>
           <a:solidFill>
@@ -9201,71 +9984,71 @@
       </p:sp>
       <p:sp>
         <p:nvSpPr>
-          <p:cNvPr id="8" name="imp-h">
-            <a:extLst>
-              <a:ext uri="{FF2B5EF4-FFF2-40B4-BE49-F238E27FC236}">
-                <a16:creationId xmlns:a16="http://schemas.microsoft.com/office/drawing/2014/main" id="{B5A5917C-2BA2-466C-A694-AD8137DB5EE1}"/>
-              </a:ext>
-            </a:extLst>
-          </p:cNvPr>
-          <p:cNvSpPr>
-            <a:spLocks noGrp="1"/>
-          </p:cNvSpPr>
-          <p:nvPr/>
-        </p:nvSpPr>
-        <p:spPr>
-          <a:xfrm>
-            <a:off x="1028700" y="2400300"/>
-            <a:ext cx="2476500" cy="342900"/>
-          </a:xfrm>
-          <a:prstGeom prst="rect">
-            <a:avLst/>
-          </a:prstGeom>
-          <a:noFill/>
-          <a:ln w="0">
-            <a:noFill/>
-            <a:prstDash val="solid"/>
-          </a:ln>
-        </p:spPr>
-        <p:txBody>
-          <a:bodyPr anchor="t"/>
-          <a:lstStyle/>
-          <a:p>
-            <a:pPr algn="l">
-              <a:defRPr sz="2100" b="1">
-                <a:solidFill>
-                  <a:srgbClr val="0F766E"/>
-                </a:solidFill>
-              </a:defRPr>
-            </a:pPr>
-            <a:r>
-              <a:rPr sz="2100" b="1">
-                <a:solidFill>
-                  <a:srgbClr val="0F766E"/>
-                </a:solidFill>
-              </a:rPr>
-              <a:t>Implemented</a:t>
-            </a:r>
-          </a:p>
-        </p:txBody>
-      </p:sp>
-      <p:sp>
-        <p:nvSpPr>
-          <p:cNvPr id="9" name="b-Agents">
-            <a:extLst>
-              <a:ext uri="{FF2B5EF4-FFF2-40B4-BE49-F238E27FC236}">
-                <a16:creationId xmlns:a16="http://schemas.microsoft.com/office/drawing/2014/main" id="{25E29489-7D1E-4943-AC1B-894EFB7AB27B}"/>
-              </a:ext>
-            </a:extLst>
-          </p:cNvPr>
-          <p:cNvSpPr>
-            <a:spLocks noGrp="1"/>
-          </p:cNvSpPr>
-          <p:nvPr/>
-        </p:nvSpPr>
-        <p:spPr>
-          <a:xfrm>
-            <a:off x="1028700" y="3009900"/>
+          <p:cNvPr id="9" name="test-head">
+            <a:extLst>
+              <a:ext uri="{FF2B5EF4-FFF2-40B4-BE49-F238E27FC236}">
+                <a16:creationId xmlns:a16="http://schemas.microsoft.com/office/drawing/2014/main" id="{93671DBE-AC14-4A83-979A-D8914FCF1BD9}"/>
+              </a:ext>
+            </a:extLst>
+          </p:cNvPr>
+          <p:cNvSpPr>
+            <a:spLocks noGrp="1"/>
+          </p:cNvSpPr>
+          <p:nvPr/>
+        </p:nvSpPr>
+        <p:spPr>
+          <a:xfrm>
+            <a:off x="8001000" y="2428875"/>
+            <a:ext cx="2857500" cy="304800"/>
+          </a:xfrm>
+          <a:prstGeom prst="rect">
+            <a:avLst/>
+          </a:prstGeom>
+          <a:noFill/>
+          <a:ln w="0">
+            <a:noFill/>
+            <a:prstDash val="solid"/>
+          </a:ln>
+        </p:spPr>
+        <p:txBody>
+          <a:bodyPr anchor="t"/>
+          <a:lstStyle/>
+          <a:p>
+            <a:pPr algn="l">
+              <a:defRPr sz="1800" b="1">
+                <a:solidFill>
+                  <a:srgbClr val="10213F"/>
+                </a:solidFill>
+              </a:defRPr>
+            </a:pPr>
+            <a:r>
+              <a:rPr sz="1800" b="1">
+                <a:solidFill>
+                  <a:srgbClr val="10213F"/>
+                </a:solidFill>
+              </a:rPr>
+              <a:t>What the checks prove</a:t>
+            </a:r>
+          </a:p>
+        </p:txBody>
+      </p:sp>
+      <p:sp>
+        <p:nvSpPr>
+          <p:cNvPr id="10" name="b-Retry">
+            <a:extLst>
+              <a:ext uri="{FF2B5EF4-FFF2-40B4-BE49-F238E27FC236}">
+                <a16:creationId xmlns:a16="http://schemas.microsoft.com/office/drawing/2014/main" id="{E52BFA2B-59D4-4426-9AA5-10F32F9310A6}"/>
+              </a:ext>
+            </a:extLst>
+          </p:cNvPr>
+          <p:cNvSpPr>
+            <a:spLocks noGrp="1"/>
+          </p:cNvSpPr>
+          <p:nvPr/>
+        </p:nvSpPr>
+        <p:spPr>
+          <a:xfrm>
+            <a:off x="8001000" y="3048000"/>
             <a:ext cx="190500" cy="247650"/>
           </a:xfrm>
           <a:prstGeom prst="rect">
@@ -9301,22 +10084,22 @@
       </p:sp>
       <p:sp>
         <p:nvSpPr>
-          <p:cNvPr id="10" name="bl-Agents">
-            <a:extLst>
-              <a:ext uri="{FF2B5EF4-FFF2-40B4-BE49-F238E27FC236}">
-                <a16:creationId xmlns:a16="http://schemas.microsoft.com/office/drawing/2014/main" id="{1CBDA511-29A1-40AD-9F7E-B345A3A9CF40}"/>
-              </a:ext>
-            </a:extLst>
-          </p:cNvPr>
-          <p:cNvSpPr>
-            <a:spLocks noGrp="1"/>
-          </p:cNvSpPr>
-          <p:nvPr/>
-        </p:nvSpPr>
-        <p:spPr>
-          <a:xfrm>
-            <a:off x="1276350" y="3009900"/>
-            <a:ext cx="3467100" cy="238125"/>
+          <p:cNvPr id="11" name="bl-Retry">
+            <a:extLst>
+              <a:ext uri="{FF2B5EF4-FFF2-40B4-BE49-F238E27FC236}">
+                <a16:creationId xmlns:a16="http://schemas.microsoft.com/office/drawing/2014/main" id="{7ABD4741-E20F-4BA4-8541-5871D57CFE84}"/>
+              </a:ext>
+            </a:extLst>
+          </p:cNvPr>
+          <p:cNvSpPr>
+            <a:spLocks noGrp="1"/>
+          </p:cNvSpPr>
+          <p:nvPr/>
+        </p:nvSpPr>
+        <p:spPr>
+          <a:xfrm>
+            <a:off x="8248650" y="3048000"/>
+            <a:ext cx="2800350" cy="238125"/>
           </a:xfrm>
           <a:prstGeom prst="rect">
             <a:avLst/>
@@ -9344,29 +10127,29 @@
                   <a:srgbClr val="10213F"/>
                 </a:solidFill>
               </a:rPr>
-              <a:t>Agents</a:t>
-            </a:r>
-          </a:p>
-        </p:txBody>
-      </p:sp>
-      <p:sp>
-        <p:nvSpPr>
-          <p:cNvPr id="11" name="bb-Agents">
-            <a:extLst>
-              <a:ext uri="{FF2B5EF4-FFF2-40B4-BE49-F238E27FC236}">
-                <a16:creationId xmlns:a16="http://schemas.microsoft.com/office/drawing/2014/main" id="{395E0D78-75A2-4F4D-90C2-AD46CEFAEA90}"/>
-              </a:ext>
-            </a:extLst>
-          </p:cNvPr>
-          <p:cNvSpPr>
-            <a:spLocks noGrp="1"/>
-          </p:cNvSpPr>
-          <p:nvPr/>
-        </p:nvSpPr>
-        <p:spPr>
-          <a:xfrm>
-            <a:off x="1276350" y="3267075"/>
-            <a:ext cx="3467100" cy="476250"/>
+              <a:t>Retry</a:t>
+            </a:r>
+          </a:p>
+        </p:txBody>
+      </p:sp>
+      <p:sp>
+        <p:nvSpPr>
+          <p:cNvPr id="12" name="bb-Retry">
+            <a:extLst>
+              <a:ext uri="{FF2B5EF4-FFF2-40B4-BE49-F238E27FC236}">
+                <a16:creationId xmlns:a16="http://schemas.microsoft.com/office/drawing/2014/main" id="{F6DAD9C5-11A3-4D1C-88F9-504BA6E93A0C}"/>
+              </a:ext>
+            </a:extLst>
+          </p:cNvPr>
+          <p:cNvSpPr>
+            <a:spLocks noGrp="1"/>
+          </p:cNvSpPr>
+          <p:nvPr/>
+        </p:nvSpPr>
+        <p:spPr>
+          <a:xfrm>
+            <a:off x="8248650" y="3305175"/>
+            <a:ext cx="2800350" cy="476250"/>
           </a:xfrm>
           <a:prstGeom prst="rect">
             <a:avLst/>
@@ -9394,28 +10177,28 @@
                   <a:srgbClr val="64748B"/>
                 </a:solidFill>
               </a:rPr>
-              <a:t>Document and SQL specialist routes.</a:t>
-            </a:r>
-          </a:p>
-        </p:txBody>
-      </p:sp>
-      <p:sp>
-        <p:nvSpPr>
-          <p:cNvPr id="12" name="b-Safety">
-            <a:extLst>
-              <a:ext uri="{FF2B5EF4-FFF2-40B4-BE49-F238E27FC236}">
-                <a16:creationId xmlns:a16="http://schemas.microsoft.com/office/drawing/2014/main" id="{88D56E0F-8A26-440A-ACA8-CC45D2445A17}"/>
-              </a:ext>
-            </a:extLst>
-          </p:cNvPr>
-          <p:cNvSpPr>
-            <a:spLocks noGrp="1"/>
-          </p:cNvSpPr>
-          <p:nvPr/>
-        </p:nvSpPr>
-        <p:spPr>
-          <a:xfrm>
-            <a:off x="1028700" y="3714750"/>
+              <a:t>Weak retrieval triggers a second search.</a:t>
+            </a:r>
+          </a:p>
+        </p:txBody>
+      </p:sp>
+      <p:sp>
+        <p:nvSpPr>
+          <p:cNvPr id="13" name="b-Rewrite">
+            <a:extLst>
+              <a:ext uri="{FF2B5EF4-FFF2-40B4-BE49-F238E27FC236}">
+                <a16:creationId xmlns:a16="http://schemas.microsoft.com/office/drawing/2014/main" id="{080C7480-FAAB-46DD-8CE7-56EDD4F85F45}"/>
+              </a:ext>
+            </a:extLst>
+          </p:cNvPr>
+          <p:cNvSpPr>
+            <a:spLocks noGrp="1"/>
+          </p:cNvSpPr>
+          <p:nvPr/>
+        </p:nvSpPr>
+        <p:spPr>
+          <a:xfrm>
+            <a:off x="8001000" y="3743325"/>
             <a:ext cx="190500" cy="247650"/>
           </a:xfrm>
           <a:prstGeom prst="rect">
@@ -9451,22 +10234,22 @@
       </p:sp>
       <p:sp>
         <p:nvSpPr>
-          <p:cNvPr id="13" name="bl-Safety">
-            <a:extLst>
-              <a:ext uri="{FF2B5EF4-FFF2-40B4-BE49-F238E27FC236}">
-                <a16:creationId xmlns:a16="http://schemas.microsoft.com/office/drawing/2014/main" id="{483743D3-5CC5-4829-A237-8623FE902668}"/>
-              </a:ext>
-            </a:extLst>
-          </p:cNvPr>
-          <p:cNvSpPr>
-            <a:spLocks noGrp="1"/>
-          </p:cNvSpPr>
-          <p:nvPr/>
-        </p:nvSpPr>
-        <p:spPr>
-          <a:xfrm>
-            <a:off x="1276350" y="3714750"/>
-            <a:ext cx="3467100" cy="238125"/>
+          <p:cNvPr id="14" name="bl-Rewrite">
+            <a:extLst>
+              <a:ext uri="{FF2B5EF4-FFF2-40B4-BE49-F238E27FC236}">
+                <a16:creationId xmlns:a16="http://schemas.microsoft.com/office/drawing/2014/main" id="{46FD94C7-3FED-4B45-A915-28E80AD62246}"/>
+              </a:ext>
+            </a:extLst>
+          </p:cNvPr>
+          <p:cNvSpPr>
+            <a:spLocks noGrp="1"/>
+          </p:cNvSpPr>
+          <p:nvPr/>
+        </p:nvSpPr>
+        <p:spPr>
+          <a:xfrm>
+            <a:off x="8248650" y="3743325"/>
+            <a:ext cx="2800350" cy="238125"/>
           </a:xfrm>
           <a:prstGeom prst="rect">
             <a:avLst/>
@@ -9494,29 +10277,29 @@
                   <a:srgbClr val="10213F"/>
                 </a:solidFill>
               </a:rPr>
-              <a:t>Safety</a:t>
-            </a:r>
-          </a:p>
-        </p:txBody>
-      </p:sp>
-      <p:sp>
-        <p:nvSpPr>
-          <p:cNvPr id="14" name="bb-Safety">
-            <a:extLst>
-              <a:ext uri="{FF2B5EF4-FFF2-40B4-BE49-F238E27FC236}">
-                <a16:creationId xmlns:a16="http://schemas.microsoft.com/office/drawing/2014/main" id="{925623DB-C88D-4E3B-A059-6A576E43A51E}"/>
-              </a:ext>
-            </a:extLst>
-          </p:cNvPr>
-          <p:cNvSpPr>
-            <a:spLocks noGrp="1"/>
-          </p:cNvSpPr>
-          <p:nvPr/>
-        </p:nvSpPr>
-        <p:spPr>
-          <a:xfrm>
-            <a:off x="1276350" y="3971925"/>
-            <a:ext cx="3467100" cy="476250"/>
+              <a:t>Rewrite</a:t>
+            </a:r>
+          </a:p>
+        </p:txBody>
+      </p:sp>
+      <p:sp>
+        <p:nvSpPr>
+          <p:cNvPr id="15" name="bb-Rewrite">
+            <a:extLst>
+              <a:ext uri="{FF2B5EF4-FFF2-40B4-BE49-F238E27FC236}">
+                <a16:creationId xmlns:a16="http://schemas.microsoft.com/office/drawing/2014/main" id="{A978F13A-575D-4FD2-9381-D655B4CE61DA}"/>
+              </a:ext>
+            </a:extLst>
+          </p:cNvPr>
+          <p:cNvSpPr>
+            <a:spLocks noGrp="1"/>
+          </p:cNvSpPr>
+          <p:nvPr/>
+        </p:nvSpPr>
+        <p:spPr>
+          <a:xfrm>
+            <a:off x="8248650" y="4000500"/>
+            <a:ext cx="2800350" cy="476250"/>
           </a:xfrm>
           <a:prstGeom prst="rect">
             <a:avLst/>
@@ -9544,28 +10327,28 @@
                   <a:srgbClr val="64748B"/>
                 </a:solidFill>
               </a:rPr>
-              <a:t>Self-RAG retry, citations, and refusal.</a:t>
-            </a:r>
-          </a:p>
-        </p:txBody>
-      </p:sp>
-      <p:sp>
-        <p:nvSpPr>
-          <p:cNvPr id="15" name="b-Audit">
-            <a:extLst>
-              <a:ext uri="{FF2B5EF4-FFF2-40B4-BE49-F238E27FC236}">
-                <a16:creationId xmlns:a16="http://schemas.microsoft.com/office/drawing/2014/main" id="{3CCE3320-42D0-438F-AD3C-340B29E2DD64}"/>
-              </a:ext>
-            </a:extLst>
-          </p:cNvPr>
-          <p:cNvSpPr>
-            <a:spLocks noGrp="1"/>
-          </p:cNvSpPr>
-          <p:nvPr/>
-        </p:nvSpPr>
-        <p:spPr>
-          <a:xfrm>
-            <a:off x="1028700" y="4419600"/>
+              <a:t>The retry query becomes more specific.</a:t>
+            </a:r>
+          </a:p>
+        </p:txBody>
+      </p:sp>
+      <p:sp>
+        <p:nvSpPr>
+          <p:cNvPr id="16" name="b-Citations">
+            <a:extLst>
+              <a:ext uri="{FF2B5EF4-FFF2-40B4-BE49-F238E27FC236}">
+                <a16:creationId xmlns:a16="http://schemas.microsoft.com/office/drawing/2014/main" id="{94716346-3D1F-43A1-860B-73EFFAFD8F42}"/>
+              </a:ext>
+            </a:extLst>
+          </p:cNvPr>
+          <p:cNvSpPr>
+            <a:spLocks noGrp="1"/>
+          </p:cNvSpPr>
+          <p:nvPr/>
+        </p:nvSpPr>
+        <p:spPr>
+          <a:xfrm>
+            <a:off x="8001000" y="4438650"/>
             <a:ext cx="190500" cy="247650"/>
           </a:xfrm>
           <a:prstGeom prst="rect">
@@ -9601,22 +10384,22 @@
       </p:sp>
       <p:sp>
         <p:nvSpPr>
-          <p:cNvPr id="16" name="bl-Audit">
-            <a:extLst>
-              <a:ext uri="{FF2B5EF4-FFF2-40B4-BE49-F238E27FC236}">
-                <a16:creationId xmlns:a16="http://schemas.microsoft.com/office/drawing/2014/main" id="{1E64AEE1-CBFC-459A-973B-794F6643E1E4}"/>
-              </a:ext>
-            </a:extLst>
-          </p:cNvPr>
-          <p:cNvSpPr>
-            <a:spLocks noGrp="1"/>
-          </p:cNvSpPr>
-          <p:nvPr/>
-        </p:nvSpPr>
-        <p:spPr>
-          <a:xfrm>
-            <a:off x="1276350" y="4419600"/>
-            <a:ext cx="3467100" cy="238125"/>
+          <p:cNvPr id="17" name="bl-Citations">
+            <a:extLst>
+              <a:ext uri="{FF2B5EF4-FFF2-40B4-BE49-F238E27FC236}">
+                <a16:creationId xmlns:a16="http://schemas.microsoft.com/office/drawing/2014/main" id="{49433936-6F8B-4205-AFA6-3520668E0F72}"/>
+              </a:ext>
+            </a:extLst>
+          </p:cNvPr>
+          <p:cNvSpPr>
+            <a:spLocks noGrp="1"/>
+          </p:cNvSpPr>
+          <p:nvPr/>
+        </p:nvSpPr>
+        <p:spPr>
+          <a:xfrm>
+            <a:off x="8248650" y="4438650"/>
+            <a:ext cx="2800350" cy="238125"/>
           </a:xfrm>
           <a:prstGeom prst="rect">
             <a:avLst/>
@@ -9644,29 +10427,29 @@
                   <a:srgbClr val="10213F"/>
                 </a:solidFill>
               </a:rPr>
-              <a:t>Audit</a:t>
-            </a:r>
-          </a:p>
-        </p:txBody>
-      </p:sp>
-      <p:sp>
-        <p:nvSpPr>
-          <p:cNvPr id="17" name="bb-Audit">
-            <a:extLst>
-              <a:ext uri="{FF2B5EF4-FFF2-40B4-BE49-F238E27FC236}">
-                <a16:creationId xmlns:a16="http://schemas.microsoft.com/office/drawing/2014/main" id="{69114B1B-6B53-461D-946A-E64C4A179BC9}"/>
-              </a:ext>
-            </a:extLst>
-          </p:cNvPr>
-          <p:cNvSpPr>
-            <a:spLocks noGrp="1"/>
-          </p:cNvSpPr>
-          <p:nvPr/>
-        </p:nvSpPr>
-        <p:spPr>
-          <a:xfrm>
-            <a:off x="1276350" y="4676775"/>
-            <a:ext cx="3467100" cy="476250"/>
+              <a:t>Citations</a:t>
+            </a:r>
+          </a:p>
+        </p:txBody>
+      </p:sp>
+      <p:sp>
+        <p:nvSpPr>
+          <p:cNvPr id="18" name="bb-Citations">
+            <a:extLst>
+              <a:ext uri="{FF2B5EF4-FFF2-40B4-BE49-F238E27FC236}">
+                <a16:creationId xmlns:a16="http://schemas.microsoft.com/office/drawing/2014/main" id="{C1C78F36-D706-49B7-8093-85296DC96359}"/>
+              </a:ext>
+            </a:extLst>
+          </p:cNvPr>
+          <p:cNvSpPr>
+            <a:spLocks noGrp="1"/>
+          </p:cNvSpPr>
+          <p:nvPr/>
+        </p:nvSpPr>
+        <p:spPr>
+          <a:xfrm>
+            <a:off x="8248650" y="4695825"/>
+            <a:ext cx="2800350" cy="476250"/>
           </a:xfrm>
           <a:prstGeom prst="rect">
             <a:avLst/>
@@ -9694,542 +10477,7 @@
                   <a:srgbClr val="64748B"/>
                 </a:solidFill>
               </a:rPr>
-              <a:t>Routing and guardrail unit tests.</a:t>
-            </a:r>
-          </a:p>
-        </p:txBody>
-      </p:sp>
-      <p:sp>
-        <p:nvSpPr>
-          <p:cNvPr id="18" name="roadmap">
-            <a:extLst>
-              <a:ext uri="{FF2B5EF4-FFF2-40B4-BE49-F238E27FC236}">
-                <a16:creationId xmlns:a16="http://schemas.microsoft.com/office/drawing/2014/main" id="{811EEB4F-E2DF-4341-889C-C5F417712754}"/>
-              </a:ext>
-            </a:extLst>
-          </p:cNvPr>
-          <p:cNvSpPr>
-            <a:spLocks noGrp="1"/>
-          </p:cNvSpPr>
-          <p:nvPr/>
-        </p:nvSpPr>
-        <p:spPr>
-          <a:xfrm>
-            <a:off x="6553200" y="2076450"/>
-            <a:ext cx="4953000" cy="3333750"/>
-          </a:xfrm>
-          <a:prstGeom prst="roundRect">
-            <a:avLst>
-              <a:gd name="adj" fmla="val 3429"/>
-            </a:avLst>
-          </a:prstGeom>
-          <a:solidFill>
-            <a:srgbClr val="FFFFFF"/>
-          </a:solidFill>
-          <a:ln w="9525">
-            <a:solidFill>
-              <a:srgbClr val="CBD5E1"/>
-            </a:solidFill>
-            <a:prstDash val="solid"/>
-          </a:ln>
-        </p:spPr>
-      </p:sp>
-      <p:sp>
-        <p:nvSpPr>
-          <p:cNvPr id="19" name="road-h">
-            <a:extLst>
-              <a:ext uri="{FF2B5EF4-FFF2-40B4-BE49-F238E27FC236}">
-                <a16:creationId xmlns:a16="http://schemas.microsoft.com/office/drawing/2014/main" id="{C57C3315-3B3B-40BA-A982-E64939A95F83}"/>
-              </a:ext>
-            </a:extLst>
-          </p:cNvPr>
-          <p:cNvSpPr>
-            <a:spLocks noGrp="1"/>
-          </p:cNvSpPr>
-          <p:nvPr/>
-        </p:nvSpPr>
-        <p:spPr>
-          <a:xfrm>
-            <a:off x="6896100" y="2400300"/>
-            <a:ext cx="2857500" cy="342900"/>
-          </a:xfrm>
-          <a:prstGeom prst="rect">
-            <a:avLst/>
-          </a:prstGeom>
-          <a:noFill/>
-          <a:ln w="0">
-            <a:noFill/>
-            <a:prstDash val="solid"/>
-          </a:ln>
-        </p:spPr>
-        <p:txBody>
-          <a:bodyPr anchor="t"/>
-          <a:lstStyle/>
-          <a:p>
-            <a:pPr algn="l">
-              <a:defRPr sz="2100" b="1">
-                <a:solidFill>
-                  <a:srgbClr val="3D8DFF"/>
-                </a:solidFill>
-              </a:defRPr>
-            </a:pPr>
-            <a:r>
-              <a:rPr sz="2100" b="1">
-                <a:solidFill>
-                  <a:srgbClr val="3D8DFF"/>
-                </a:solidFill>
-              </a:rPr>
-              <a:t>Next milestones</a:t>
-            </a:r>
-          </a:p>
-        </p:txBody>
-      </p:sp>
-      <p:sp>
-        <p:nvSpPr>
-          <p:cNvPr id="20" name="b-Vision">
-            <a:extLst>
-              <a:ext uri="{FF2B5EF4-FFF2-40B4-BE49-F238E27FC236}">
-                <a16:creationId xmlns:a16="http://schemas.microsoft.com/office/drawing/2014/main" id="{B8C83F93-3A0F-46E6-ADBC-5F99E9990E17}"/>
-              </a:ext>
-            </a:extLst>
-          </p:cNvPr>
-          <p:cNvSpPr>
-            <a:spLocks noGrp="1"/>
-          </p:cNvSpPr>
-          <p:nvPr/>
-        </p:nvSpPr>
-        <p:spPr>
-          <a:xfrm>
-            <a:off x="6896100" y="3009900"/>
-            <a:ext cx="190500" cy="247650"/>
-          </a:xfrm>
-          <a:prstGeom prst="rect">
-            <a:avLst/>
-          </a:prstGeom>
-          <a:noFill/>
-          <a:ln w="0">
-            <a:noFill/>
-            <a:prstDash val="solid"/>
-          </a:ln>
-        </p:spPr>
-        <p:txBody>
-          <a:bodyPr anchor="t"/>
-          <a:lstStyle/>
-          <a:p>
-            <a:pPr algn="l">
-              <a:defRPr sz="1800" b="1">
-                <a:solidFill>
-                  <a:srgbClr val="3D8DFF"/>
-                </a:solidFill>
-              </a:defRPr>
-            </a:pPr>
-            <a:r>
-              <a:rPr sz="1800" b="1">
-                <a:solidFill>
-                  <a:srgbClr val="3D8DFF"/>
-                </a:solidFill>
-              </a:rPr>
-              <a:t>•</a:t>
-            </a:r>
-          </a:p>
-        </p:txBody>
-      </p:sp>
-      <p:sp>
-        <p:nvSpPr>
-          <p:cNvPr id="21" name="bl-Vision">
-            <a:extLst>
-              <a:ext uri="{FF2B5EF4-FFF2-40B4-BE49-F238E27FC236}">
-                <a16:creationId xmlns:a16="http://schemas.microsoft.com/office/drawing/2014/main" id="{7508921B-5565-4F41-AC8E-32F815974422}"/>
-              </a:ext>
-            </a:extLst>
-          </p:cNvPr>
-          <p:cNvSpPr>
-            <a:spLocks noGrp="1"/>
-          </p:cNvSpPr>
-          <p:nvPr/>
-        </p:nvSpPr>
-        <p:spPr>
-          <a:xfrm>
-            <a:off x="7143750" y="3009900"/>
-            <a:ext cx="3467100" cy="238125"/>
-          </a:xfrm>
-          <a:prstGeom prst="rect">
-            <a:avLst/>
-          </a:prstGeom>
-          <a:noFill/>
-          <a:ln w="0">
-            <a:noFill/>
-            <a:prstDash val="solid"/>
-          </a:ln>
-        </p:spPr>
-        <p:txBody>
-          <a:bodyPr anchor="t"/>
-          <a:lstStyle/>
-          <a:p>
-            <a:pPr algn="l">
-              <a:defRPr sz="1350" b="1">
-                <a:solidFill>
-                  <a:srgbClr val="10213F"/>
-                </a:solidFill>
-              </a:defRPr>
-            </a:pPr>
-            <a:r>
-              <a:rPr sz="1350" b="1">
-                <a:solidFill>
-                  <a:srgbClr val="10213F"/>
-                </a:solidFill>
-              </a:rPr>
-              <a:t>Vision</a:t>
-            </a:r>
-          </a:p>
-        </p:txBody>
-      </p:sp>
-      <p:sp>
-        <p:nvSpPr>
-          <p:cNvPr id="22" name="bb-Vision">
-            <a:extLst>
-              <a:ext uri="{FF2B5EF4-FFF2-40B4-BE49-F238E27FC236}">
-                <a16:creationId xmlns:a16="http://schemas.microsoft.com/office/drawing/2014/main" id="{9ECBB8F7-61CC-49CF-BDEE-964510A5C84D}"/>
-              </a:ext>
-            </a:extLst>
-          </p:cNvPr>
-          <p:cNvSpPr>
-            <a:spLocks noGrp="1"/>
-          </p:cNvSpPr>
-          <p:nvPr/>
-        </p:nvSpPr>
-        <p:spPr>
-          <a:xfrm>
-            <a:off x="7143750" y="3267075"/>
-            <a:ext cx="3467100" cy="476250"/>
-          </a:xfrm>
-          <a:prstGeom prst="rect">
-            <a:avLst/>
-          </a:prstGeom>
-          <a:noFill/>
-          <a:ln w="0">
-            <a:noFill/>
-            <a:prstDash val="solid"/>
-          </a:ln>
-        </p:spPr>
-        <p:txBody>
-          <a:bodyPr anchor="t"/>
-          <a:lstStyle/>
-          <a:p>
-            <a:pPr algn="l">
-              <a:defRPr sz="1125" b="0">
-                <a:solidFill>
-                  <a:srgbClr val="64748B"/>
-                </a:solidFill>
-              </a:defRPr>
-            </a:pPr>
-            <a:r>
-              <a:rPr sz="1125" b="0">
-                <a:solidFill>
-                  <a:srgbClr val="64748B"/>
-                </a:solidFill>
-              </a:rPr>
-              <a:t>Dedicated VLM route for charts and figures.</a:t>
-            </a:r>
-          </a:p>
-        </p:txBody>
-      </p:sp>
-      <p:sp>
-        <p:nvSpPr>
-          <p:cNvPr id="23" name="b-Embeddings">
-            <a:extLst>
-              <a:ext uri="{FF2B5EF4-FFF2-40B4-BE49-F238E27FC236}">
-                <a16:creationId xmlns:a16="http://schemas.microsoft.com/office/drawing/2014/main" id="{286F1127-C09D-433F-ACD9-17188838D13B}"/>
-              </a:ext>
-            </a:extLst>
-          </p:cNvPr>
-          <p:cNvSpPr>
-            <a:spLocks noGrp="1"/>
-          </p:cNvSpPr>
-          <p:nvPr/>
-        </p:nvSpPr>
-        <p:spPr>
-          <a:xfrm>
-            <a:off x="6896100" y="3714750"/>
-            <a:ext cx="190500" cy="247650"/>
-          </a:xfrm>
-          <a:prstGeom prst="rect">
-            <a:avLst/>
-          </a:prstGeom>
-          <a:noFill/>
-          <a:ln w="0">
-            <a:noFill/>
-            <a:prstDash val="solid"/>
-          </a:ln>
-        </p:spPr>
-        <p:txBody>
-          <a:bodyPr anchor="t"/>
-          <a:lstStyle/>
-          <a:p>
-            <a:pPr algn="l">
-              <a:defRPr sz="1800" b="1">
-                <a:solidFill>
-                  <a:srgbClr val="3D8DFF"/>
-                </a:solidFill>
-              </a:defRPr>
-            </a:pPr>
-            <a:r>
-              <a:rPr sz="1800" b="1">
-                <a:solidFill>
-                  <a:srgbClr val="3D8DFF"/>
-                </a:solidFill>
-              </a:rPr>
-              <a:t>•</a:t>
-            </a:r>
-          </a:p>
-        </p:txBody>
-      </p:sp>
-      <p:sp>
-        <p:nvSpPr>
-          <p:cNvPr id="24" name="bl-Embeddings">
-            <a:extLst>
-              <a:ext uri="{FF2B5EF4-FFF2-40B4-BE49-F238E27FC236}">
-                <a16:creationId xmlns:a16="http://schemas.microsoft.com/office/drawing/2014/main" id="{ECB38178-4BAE-400D-A9A5-978401176FA4}"/>
-              </a:ext>
-            </a:extLst>
-          </p:cNvPr>
-          <p:cNvSpPr>
-            <a:spLocks noGrp="1"/>
-          </p:cNvSpPr>
-          <p:nvPr/>
-        </p:nvSpPr>
-        <p:spPr>
-          <a:xfrm>
-            <a:off x="7143750" y="3714750"/>
-            <a:ext cx="3467100" cy="238125"/>
-          </a:xfrm>
-          <a:prstGeom prst="rect">
-            <a:avLst/>
-          </a:prstGeom>
-          <a:noFill/>
-          <a:ln w="0">
-            <a:noFill/>
-            <a:prstDash val="solid"/>
-          </a:ln>
-        </p:spPr>
-        <p:txBody>
-          <a:bodyPr anchor="t"/>
-          <a:lstStyle/>
-          <a:p>
-            <a:pPr algn="l">
-              <a:defRPr sz="1350" b="1">
-                <a:solidFill>
-                  <a:srgbClr val="10213F"/>
-                </a:solidFill>
-              </a:defRPr>
-            </a:pPr>
-            <a:r>
-              <a:rPr sz="1350" b="1">
-                <a:solidFill>
-                  <a:srgbClr val="10213F"/>
-                </a:solidFill>
-              </a:rPr>
-              <a:t>Embeddings</a:t>
-            </a:r>
-          </a:p>
-        </p:txBody>
-      </p:sp>
-      <p:sp>
-        <p:nvSpPr>
-          <p:cNvPr id="25" name="bb-Embeddings">
-            <a:extLst>
-              <a:ext uri="{FF2B5EF4-FFF2-40B4-BE49-F238E27FC236}">
-                <a16:creationId xmlns:a16="http://schemas.microsoft.com/office/drawing/2014/main" id="{EBB9662D-5E2F-4F6E-BFCF-7ED34ECEFA8D}"/>
-              </a:ext>
-            </a:extLst>
-          </p:cNvPr>
-          <p:cNvSpPr>
-            <a:spLocks noGrp="1"/>
-          </p:cNvSpPr>
-          <p:nvPr/>
-        </p:nvSpPr>
-        <p:spPr>
-          <a:xfrm>
-            <a:off x="7143750" y="3971925"/>
-            <a:ext cx="3467100" cy="476250"/>
-          </a:xfrm>
-          <a:prstGeom prst="rect">
-            <a:avLst/>
-          </a:prstGeom>
-          <a:noFill/>
-          <a:ln w="0">
-            <a:noFill/>
-            <a:prstDash val="solid"/>
-          </a:ln>
-        </p:spPr>
-        <p:txBody>
-          <a:bodyPr anchor="t"/>
-          <a:lstStyle/>
-          <a:p>
-            <a:pPr algn="l">
-              <a:defRPr sz="1125" b="0">
-                <a:solidFill>
-                  <a:srgbClr val="64748B"/>
-                </a:solidFill>
-              </a:defRPr>
-            </a:pPr>
-            <a:r>
-              <a:rPr sz="1125" b="0">
-                <a:solidFill>
-                  <a:srgbClr val="64748B"/>
-                </a:solidFill>
-              </a:rPr>
-              <a:t>Image embeddings for true multi-modal retrieval.</a:t>
-            </a:r>
-          </a:p>
-        </p:txBody>
-      </p:sp>
-      <p:sp>
-        <p:nvSpPr>
-          <p:cNvPr id="26" name="b-Observe">
-            <a:extLst>
-              <a:ext uri="{FF2B5EF4-FFF2-40B4-BE49-F238E27FC236}">
-                <a16:creationId xmlns:a16="http://schemas.microsoft.com/office/drawing/2014/main" id="{014D7B5F-805C-4D7F-BED9-B3B590717AD6}"/>
-              </a:ext>
-            </a:extLst>
-          </p:cNvPr>
-          <p:cNvSpPr>
-            <a:spLocks noGrp="1"/>
-          </p:cNvSpPr>
-          <p:nvPr/>
-        </p:nvSpPr>
-        <p:spPr>
-          <a:xfrm>
-            <a:off x="6896100" y="4419600"/>
-            <a:ext cx="190500" cy="247650"/>
-          </a:xfrm>
-          <a:prstGeom prst="rect">
-            <a:avLst/>
-          </a:prstGeom>
-          <a:noFill/>
-          <a:ln w="0">
-            <a:noFill/>
-            <a:prstDash val="solid"/>
-          </a:ln>
-        </p:spPr>
-        <p:txBody>
-          <a:bodyPr anchor="t"/>
-          <a:lstStyle/>
-          <a:p>
-            <a:pPr algn="l">
-              <a:defRPr sz="1800" b="1">
-                <a:solidFill>
-                  <a:srgbClr val="3D8DFF"/>
-                </a:solidFill>
-              </a:defRPr>
-            </a:pPr>
-            <a:r>
-              <a:rPr sz="1800" b="1">
-                <a:solidFill>
-                  <a:srgbClr val="3D8DFF"/>
-                </a:solidFill>
-              </a:rPr>
-              <a:t>•</a:t>
-            </a:r>
-          </a:p>
-        </p:txBody>
-      </p:sp>
-      <p:sp>
-        <p:nvSpPr>
-          <p:cNvPr id="27" name="bl-Observe">
-            <a:extLst>
-              <a:ext uri="{FF2B5EF4-FFF2-40B4-BE49-F238E27FC236}">
-                <a16:creationId xmlns:a16="http://schemas.microsoft.com/office/drawing/2014/main" id="{5B86EBF1-C701-4966-B1F9-C978B332AA49}"/>
-              </a:ext>
-            </a:extLst>
-          </p:cNvPr>
-          <p:cNvSpPr>
-            <a:spLocks noGrp="1"/>
-          </p:cNvSpPr>
-          <p:nvPr/>
-        </p:nvSpPr>
-        <p:spPr>
-          <a:xfrm>
-            <a:off x="7143750" y="4419600"/>
-            <a:ext cx="3467100" cy="238125"/>
-          </a:xfrm>
-          <a:prstGeom prst="rect">
-            <a:avLst/>
-          </a:prstGeom>
-          <a:noFill/>
-          <a:ln w="0">
-            <a:noFill/>
-            <a:prstDash val="solid"/>
-          </a:ln>
-        </p:spPr>
-        <p:txBody>
-          <a:bodyPr anchor="t"/>
-          <a:lstStyle/>
-          <a:p>
-            <a:pPr algn="l">
-              <a:defRPr sz="1350" b="1">
-                <a:solidFill>
-                  <a:srgbClr val="10213F"/>
-                </a:solidFill>
-              </a:defRPr>
-            </a:pPr>
-            <a:r>
-              <a:rPr sz="1350" b="1">
-                <a:solidFill>
-                  <a:srgbClr val="10213F"/>
-                </a:solidFill>
-              </a:rPr>
-              <a:t>Observe</a:t>
-            </a:r>
-          </a:p>
-        </p:txBody>
-      </p:sp>
-      <p:sp>
-        <p:nvSpPr>
-          <p:cNvPr id="28" name="bb-Observe">
-            <a:extLst>
-              <a:ext uri="{FF2B5EF4-FFF2-40B4-BE49-F238E27FC236}">
-                <a16:creationId xmlns:a16="http://schemas.microsoft.com/office/drawing/2014/main" id="{F9981493-F3A2-475D-A04C-CD64A9B89685}"/>
-              </a:ext>
-            </a:extLst>
-          </p:cNvPr>
-          <p:cNvSpPr>
-            <a:spLocks noGrp="1"/>
-          </p:cNvSpPr>
-          <p:nvPr/>
-        </p:nvSpPr>
-        <p:spPr>
-          <a:xfrm>
-            <a:off x="7143750" y="4676775"/>
-            <a:ext cx="3467100" cy="476250"/>
-          </a:xfrm>
-          <a:prstGeom prst="rect">
-            <a:avLst/>
-          </a:prstGeom>
-          <a:noFill/>
-          <a:ln w="0">
-            <a:noFill/>
-            <a:prstDash val="solid"/>
-          </a:ln>
-        </p:spPr>
-        <p:txBody>
-          <a:bodyPr anchor="t"/>
-          <a:lstStyle/>
-          <a:p>
-            <a:pPr algn="l">
-              <a:defRPr sz="1125" b="0">
-                <a:solidFill>
-                  <a:srgbClr val="64748B"/>
-                </a:solidFill>
-              </a:defRPr>
-            </a:pPr>
-            <a:r>
-              <a:rPr sz="1125" b="0">
-                <a:solidFill>
-                  <a:srgbClr val="64748B"/>
-                </a:solidFill>
-              </a:rPr>
-              <a:t>Langfuse + NeMo Guardrails evaluation layer.</a:t>
+              <a:t>Uncited answers are blocked; cited ones pass.</a:t>
             </a:r>
           </a:p>
         </p:txBody>
@@ -10237,7 +10485,7 @@
     </p:spTree>
     <p:extLst>
       <p:ext uri="{BB962C8B-B14F-4D97-AF65-F5344CB8AC3E}">
-        <p14:creationId xmlns:p14="http://schemas.microsoft.com/office/powerpoint/2010/main" val="1718776872"/>
+        <p14:creationId xmlns:p14="http://schemas.microsoft.com/office/powerpoint/2010/main" val="838198572"/>
       </p:ext>
     </p:extLst>
   </p:cSld>
